--- a/dba/coursework/GEB7365_International_Business/Malik_GEB7365_IB_Field_Map.pptx
+++ b/dba/coursework/GEB7365_International_Business/Malik_GEB7365_IB_Field_Map.pptx
@@ -6,9 +6,10 @@
   </p:sldMasterIdLst>
   <p:sldIdLst>
     <p:sldId id="256" r:id="rId2"/>
+    <p:sldId id="257" r:id="rId3"/>
   </p:sldIdLst>
   <p:notesMasterIdLst>
-    <p:notesMasterId r:id="rId3"/>
+    <p:notesMasterId r:id="rId4"/>
   </p:notesMasterIdLst>
   <p:sldSz cx="12192000" cy="6858000"/>
   <p:notesSz cx="6858000" cy="12192000"/>
@@ -502,7 +503,7 @@
           <a:p>
             <a:r>
               <a:rPr lang="en-US" dirty="0"/>
-              <a:t>Chandra &amp; Newburry map the field as an overlap of five disciplines that developed in parallel and integrated only on strategy. The extension: method is a second integration point — every discipline hits the same population-reachability wall the moment the question becomes cross-national.</a:t>
+              <a:t>Run map (a) with management fanned: strategy sits deep inside IB, HR partly, OB barely. One circle per discipline is too coarse. Run map (b): the crossbars are between SUB-FIELDS, and OB flowed back into management from IB rather than out of it. Both maps treat integration as topical. Method is a third, structural integration point.</a:t>
             </a:r>
             <a:endParaRPr lang="en-US" dirty="0"/>
           </a:p>
@@ -526,6 +527,94 @@
             <a:fld id="{F7021451-1387-4CA6-816F-3879F97B5CBC}" type="slidenum">
               <a:rPr lang="en-US"/>
               <a:t>1</a:t>
+            </a:fld>
+            <a:endParaRPr lang="en-US"/>
+          </a:p>
+        </p:txBody>
+      </p:sp>
+    </p:spTree>
+    <p:extLst>
+      <p:ext uri="{BB962C8B-B14F-4D97-AF65-F5344CB8AC3E}">
+        <p14:creationId xmlns:p14="http://schemas.microsoft.com/office/powerpoint/2010/main" val="1024086991"/>
+      </p:ext>
+    </p:extLst>
+  </p:cSld>
+  <p:clrMapOvr>
+    <a:masterClrMapping/>
+  </p:clrMapOvr>
+</p:notes>
+</file>
+
+<file path=ppt/notesSlides/notesSlide2.xml><?xml version="1.0" encoding="utf-8"?>
+<p:notes xmlns:a="http://schemas.openxmlformats.org/drawingml/2006/main" xmlns:r="http://schemas.openxmlformats.org/officeDocument/2006/relationships" xmlns:p="http://schemas.openxmlformats.org/presentationml/2006/main">
+  <p:cSld>
+    <p:spTree>
+      <p:nvGrpSpPr>
+        <p:cNvPr id="1" name=""/>
+        <p:cNvGrpSpPr/>
+        <p:nvPr/>
+      </p:nvGrpSpPr>
+      <p:grpSpPr>
+        <a:xfrm>
+          <a:off x="0" y="0"/>
+          <a:ext cx="0" cy="0"/>
+          <a:chOff x="0" y="0"/>
+          <a:chExt cx="0" cy="0"/>
+        </a:xfrm>
+      </p:grpSpPr>
+      <p:sp>
+        <p:nvSpPr>
+          <p:cNvPr id="2" name="Slide Image Placeholder 1"/>
+          <p:cNvSpPr>
+            <a:spLocks noGrp="1" noRot="1" noChangeAspect="1"/>
+          </p:cNvSpPr>
+          <p:nvPr>
+            <p:ph type="sldImg"/>
+          </p:nvPr>
+        </p:nvSpPr>
+        <p:spPr/>
+      </p:sp>
+      <p:sp>
+        <p:nvSpPr>
+          <p:cNvPr id="3" name="Notes Placeholder 2"/>
+          <p:cNvSpPr>
+            <a:spLocks noGrp="1"/>
+          </p:cNvSpPr>
+          <p:nvPr>
+            <p:ph type="body" idx="1"/>
+          </p:nvPr>
+        </p:nvSpPr>
+        <p:spPr/>
+        <p:txBody>
+          <a:bodyPr/>
+          <a:lstStyle/>
+          <a:p>
+            <a:r>
+              <a:rPr lang="en-US" dirty="0"/>
+              <a:t>The microscope objection is the one that matters. Answer: it is not a shared tool, it is a shared definition — comparison across countries requires comparable populations, so the constraint sits at the definition of the field. Do not overclaim past that: this is a second axis, not a replacement.</a:t>
+            </a:r>
+            <a:endParaRPr lang="en-US" dirty="0"/>
+          </a:p>
+        </p:txBody>
+      </p:sp>
+      <p:sp>
+        <p:nvSpPr>
+          <p:cNvPr id="4" name="Slide Number Placeholder 3"/>
+          <p:cNvSpPr>
+            <a:spLocks noGrp="1"/>
+          </p:cNvSpPr>
+          <p:nvPr>
+            <p:ph type="sldNum" sz="quarter" idx="10"/>
+          </p:nvPr>
+        </p:nvSpPr>
+        <p:spPr/>
+        <p:txBody>
+          <a:bodyPr/>
+          <a:lstStyle/>
+          <a:p>
+            <a:fld id="{F7021451-1387-4CA6-816F-3879F97B5CBC}" type="slidenum">
+              <a:rPr lang="en-US"/>
+              <a:t>2</a:t>
             </a:fld>
             <a:endParaRPr lang="en-US"/>
           </a:p>
@@ -1103,7 +1192,7 @@
                 <a:ea typeface="Cambria" pitchFamily="34" charset="-122"/>
                 <a:cs typeface="Cambria" pitchFamily="34" charset="-120"/>
               </a:rPr>
-              <a:t>Two maps, one diagnosis: International Business is where five disciplines overlap — and they only ever met on strategy.</a:t>
+              <a:t>Run the maps with management split into its sub-fields and two things break — then a third integration point appears.</a:t>
             </a:r>
             <a:endParaRPr lang="en-US" sz="1250" dirty="0"/>
           </a:p>
@@ -1182,7 +1271,7 @@
         <p:spPr>
           <a:xfrm>
             <a:off x="1060704" y="1481328"/>
-            <a:ext cx="1828800" cy="237744"/>
+            <a:ext cx="2377440" cy="237744"/>
           </a:xfrm>
           <a:prstGeom prst="rect">
             <a:avLst/>
@@ -1206,7 +1295,7 @@
                 <a:ea typeface="Georgia" pitchFamily="34" charset="-122"/>
                 <a:cs typeface="Georgia" pitchFamily="34" charset="-120"/>
               </a:rPr>
-              <a:t>IB as the overlap</a:t>
+              <a:t>The circle is too coarse</a:t>
             </a:r>
             <a:endParaRPr lang="en-US" sz="1400" dirty="0"/>
           </a:p>
@@ -1328,33 +1417,6 @@
         </p:nvSpPr>
         <p:spPr>
           <a:xfrm>
-            <a:off x="3035808" y="3035808"/>
-            <a:ext cx="914400" cy="914400"/>
-          </a:xfrm>
-          <a:prstGeom prst="ellipse">
-            <a:avLst/>
-          </a:prstGeom>
-          <a:solidFill>
-            <a:srgbClr val="FFFFFF">
-              <a:alpha val="0"/>
-            </a:srgbClr>
-          </a:solidFill>
-          <a:ln w="15875">
-            <a:solidFill>
-              <a:srgbClr val="1F4E79"/>
-            </a:solidFill>
-            <a:prstDash val="solid"/>
-          </a:ln>
-        </p:spPr>
-      </p:sp>
-      <p:sp>
-        <p:nvSpPr>
-          <p:cNvPr id="16" name="Shape 14"/>
-          <p:cNvSpPr/>
-          <p:nvPr/>
-        </p:nvSpPr>
-        <p:spPr>
-          <a:xfrm>
             <a:off x="1965960" y="2148840"/>
             <a:ext cx="1783080" cy="1783080"/>
           </a:xfrm>
@@ -1376,14 +1438,14 @@
       </p:sp>
       <p:sp>
         <p:nvSpPr>
-          <p:cNvPr id="17" name="Text 15"/>
-          <p:cNvSpPr/>
-          <p:nvPr/>
-        </p:nvSpPr>
-        <p:spPr>
-          <a:xfrm>
-            <a:off x="1965960" y="2798064"/>
-            <a:ext cx="1783080" cy="411480"/>
+          <p:cNvPr id="16" name="Text 14"/>
+          <p:cNvSpPr/>
+          <p:nvPr/>
+        </p:nvSpPr>
+        <p:spPr>
+          <a:xfrm>
+            <a:off x="1965960" y="2670048"/>
+            <a:ext cx="1783080" cy="365760"/>
           </a:xfrm>
           <a:prstGeom prst="rect">
             <a:avLst/>
@@ -1399,7 +1461,7 @@
               <a:buNone/>
             </a:pPr>
             <a:r>
-              <a:rPr lang="en-US" sz="2200" b="1" dirty="0">
+              <a:rPr lang="en-US" sz="2000" b="1" dirty="0">
                 <a:solidFill>
                   <a:srgbClr val="1F4E79"/>
                 </a:solidFill>
@@ -1409,20 +1471,101 @@
               </a:rPr>
               <a:t>IB</a:t>
             </a:r>
-            <a:endParaRPr lang="en-US" sz="2200" dirty="0"/>
-          </a:p>
-        </p:txBody>
-      </p:sp>
-      <p:sp>
-        <p:nvSpPr>
-          <p:cNvPr id="18" name="Text 16"/>
+            <a:endParaRPr lang="en-US" sz="2000" dirty="0"/>
+          </a:p>
+        </p:txBody>
+      </p:sp>
+      <p:sp>
+        <p:nvSpPr>
+          <p:cNvPr id="17" name="Shape 15"/>
+          <p:cNvSpPr/>
+          <p:nvPr/>
+        </p:nvSpPr>
+        <p:spPr>
+          <a:xfrm>
+            <a:off x="2788920" y="3017520"/>
+            <a:ext cx="713232" cy="713232"/>
+          </a:xfrm>
+          <a:prstGeom prst="ellipse">
+            <a:avLst/>
+          </a:prstGeom>
+          <a:solidFill>
+            <a:srgbClr val="FFFFFF">
+              <a:alpha val="0"/>
+            </a:srgbClr>
+          </a:solidFill>
+          <a:ln w="15875">
+            <a:solidFill>
+              <a:srgbClr val="1C6B63"/>
+            </a:solidFill>
+            <a:prstDash val="solid"/>
+          </a:ln>
+        </p:spPr>
+      </p:sp>
+      <p:sp>
+        <p:nvSpPr>
+          <p:cNvPr id="18" name="Shape 16"/>
+          <p:cNvSpPr/>
+          <p:nvPr/>
+        </p:nvSpPr>
+        <p:spPr>
+          <a:xfrm>
+            <a:off x="3401568" y="3182112"/>
+            <a:ext cx="621792" cy="621792"/>
+          </a:xfrm>
+          <a:prstGeom prst="ellipse">
+            <a:avLst/>
+          </a:prstGeom>
+          <a:solidFill>
+            <a:srgbClr val="FFFFFF">
+              <a:alpha val="0"/>
+            </a:srgbClr>
+          </a:solidFill>
+          <a:ln w="15875">
+            <a:solidFill>
+              <a:srgbClr val="1C6B63"/>
+            </a:solidFill>
+            <a:prstDash val="solid"/>
+          </a:ln>
+        </p:spPr>
+      </p:sp>
+      <p:sp>
+        <p:nvSpPr>
+          <p:cNvPr id="19" name="Shape 17"/>
+          <p:cNvSpPr/>
+          <p:nvPr/>
+        </p:nvSpPr>
+        <p:spPr>
+          <a:xfrm>
+            <a:off x="3950208" y="3291840"/>
+            <a:ext cx="530352" cy="530352"/>
+          </a:xfrm>
+          <a:prstGeom prst="ellipse">
+            <a:avLst/>
+          </a:prstGeom>
+          <a:solidFill>
+            <a:srgbClr val="FFFFFF">
+              <a:alpha val="0"/>
+            </a:srgbClr>
+          </a:solidFill>
+          <a:ln w="15875">
+            <a:solidFill>
+              <a:srgbClr val="1C6B63"/>
+            </a:solidFill>
+            <a:prstDash val="solid"/>
+          </a:ln>
+        </p:spPr>
+      </p:sp>
+      <p:sp>
+        <p:nvSpPr>
+          <p:cNvPr id="20" name="Text 18"/>
           <p:cNvSpPr/>
           <p:nvPr/>
         </p:nvSpPr>
         <p:spPr>
           <a:xfrm>
             <a:off x="877824" y="2103120"/>
-            <a:ext cx="914400" cy="201168"/>
+            <a:ext cx="914400" cy="182880"/>
           </a:xfrm>
           <a:prstGeom prst="rect">
             <a:avLst/>
@@ -1454,14 +1597,14 @@
       </p:sp>
       <p:sp>
         <p:nvSpPr>
-          <p:cNvPr id="19" name="Text 17"/>
+          <p:cNvPr id="21" name="Text 19"/>
           <p:cNvSpPr/>
           <p:nvPr/>
         </p:nvSpPr>
         <p:spPr>
           <a:xfrm>
             <a:off x="1874520" y="1764792"/>
-            <a:ext cx="914400" cy="201168"/>
+            <a:ext cx="914400" cy="182880"/>
           </a:xfrm>
           <a:prstGeom prst="rect">
             <a:avLst/>
@@ -1493,14 +1636,14 @@
       </p:sp>
       <p:sp>
         <p:nvSpPr>
-          <p:cNvPr id="20" name="Text 18"/>
+          <p:cNvPr id="22" name="Text 20"/>
           <p:cNvSpPr/>
           <p:nvPr/>
         </p:nvSpPr>
         <p:spPr>
           <a:xfrm>
             <a:off x="2971800" y="1764792"/>
-            <a:ext cx="914400" cy="201168"/>
+            <a:ext cx="914400" cy="182880"/>
           </a:xfrm>
           <a:prstGeom prst="rect">
             <a:avLst/>
@@ -1532,14 +1675,14 @@
       </p:sp>
       <p:sp>
         <p:nvSpPr>
-          <p:cNvPr id="21" name="Text 19"/>
+          <p:cNvPr id="23" name="Text 21"/>
           <p:cNvSpPr/>
           <p:nvPr/>
         </p:nvSpPr>
         <p:spPr>
           <a:xfrm>
             <a:off x="1133856" y="3931920"/>
-            <a:ext cx="914400" cy="201168"/>
+            <a:ext cx="914400" cy="182880"/>
           </a:xfrm>
           <a:prstGeom prst="rect">
             <a:avLst/>
@@ -1571,14 +1714,14 @@
       </p:sp>
       <p:sp>
         <p:nvSpPr>
-          <p:cNvPr id="22" name="Text 20"/>
-          <p:cNvSpPr/>
-          <p:nvPr/>
-        </p:nvSpPr>
-        <p:spPr>
-          <a:xfrm>
-            <a:off x="3127248" y="3968496"/>
-            <a:ext cx="1051560" cy="201168"/>
+          <p:cNvPr id="24" name="Text 22"/>
+          <p:cNvSpPr/>
+          <p:nvPr/>
+        </p:nvSpPr>
+        <p:spPr>
+          <a:xfrm>
+            <a:off x="2871216" y="3785616"/>
+            <a:ext cx="548640" cy="182880"/>
           </a:xfrm>
           <a:prstGeom prst="rect">
             <a:avLst/>
@@ -1594,30 +1737,164 @@
               <a:buNone/>
             </a:pPr>
             <a:r>
-              <a:rPr lang="en-US" sz="900" dirty="0">
-                <a:solidFill>
-                  <a:srgbClr val="454B54"/>
+              <a:rPr lang="en-US" sz="850" dirty="0">
+                <a:solidFill>
+                  <a:srgbClr val="1C6B63"/>
                 </a:solidFill>
                 <a:latin typeface="Courier New" pitchFamily="34" charset="0"/>
                 <a:ea typeface="Courier New" pitchFamily="34" charset="-122"/>
                 <a:cs typeface="Courier New" pitchFamily="34" charset="-120"/>
               </a:rPr>
-              <a:t>Management</a:t>
-            </a:r>
-            <a:endParaRPr lang="en-US" sz="900" dirty="0"/>
-          </a:p>
-        </p:txBody>
-      </p:sp>
-      <p:sp>
-        <p:nvSpPr>
-          <p:cNvPr id="23" name="Text 21"/>
-          <p:cNvSpPr/>
-          <p:nvPr/>
-        </p:nvSpPr>
-        <p:spPr>
-          <a:xfrm>
-            <a:off x="658368" y="4206240"/>
-            <a:ext cx="4663440" cy="292608"/>
+              <a:t>STRAT</a:t>
+            </a:r>
+            <a:endParaRPr lang="en-US" sz="850" dirty="0"/>
+          </a:p>
+        </p:txBody>
+      </p:sp>
+      <p:sp>
+        <p:nvSpPr>
+          <p:cNvPr id="25" name="Text 23"/>
+          <p:cNvSpPr/>
+          <p:nvPr/>
+        </p:nvSpPr>
+        <p:spPr>
+          <a:xfrm>
+            <a:off x="3529584" y="3877056"/>
+            <a:ext cx="365760" cy="182880"/>
+          </a:xfrm>
+          <a:prstGeom prst="rect">
+            <a:avLst/>
+          </a:prstGeom>
+          <a:noFill/>
+          <a:ln/>
+        </p:spPr>
+        <p:txBody>
+          <a:bodyPr wrap="square" lIns="0" tIns="0" rIns="0" bIns="0" rtlCol="0" anchor="ctr"/>
+          <a:lstStyle/>
+          <a:p>
+            <a:pPr algn="ctr" indent="0" marL="0">
+              <a:buNone/>
+            </a:pPr>
+            <a:r>
+              <a:rPr lang="en-US" sz="850" dirty="0">
+                <a:solidFill>
+                  <a:srgbClr val="1C6B63"/>
+                </a:solidFill>
+                <a:latin typeface="Courier New" pitchFamily="34" charset="0"/>
+                <a:ea typeface="Courier New" pitchFamily="34" charset="-122"/>
+                <a:cs typeface="Courier New" pitchFamily="34" charset="-120"/>
+              </a:rPr>
+              <a:t>HR</a:t>
+            </a:r>
+            <a:endParaRPr lang="en-US" sz="850" dirty="0"/>
+          </a:p>
+        </p:txBody>
+      </p:sp>
+      <p:sp>
+        <p:nvSpPr>
+          <p:cNvPr id="26" name="Text 24"/>
+          <p:cNvSpPr/>
+          <p:nvPr/>
+        </p:nvSpPr>
+        <p:spPr>
+          <a:xfrm>
+            <a:off x="4078224" y="3968496"/>
+            <a:ext cx="365760" cy="182880"/>
+          </a:xfrm>
+          <a:prstGeom prst="rect">
+            <a:avLst/>
+          </a:prstGeom>
+          <a:noFill/>
+          <a:ln/>
+        </p:spPr>
+        <p:txBody>
+          <a:bodyPr wrap="square" lIns="0" tIns="0" rIns="0" bIns="0" rtlCol="0" anchor="ctr"/>
+          <a:lstStyle/>
+          <a:p>
+            <a:pPr algn="ctr" indent="0" marL="0">
+              <a:buNone/>
+            </a:pPr>
+            <a:r>
+              <a:rPr lang="en-US" sz="850" dirty="0">
+                <a:solidFill>
+                  <a:srgbClr val="1C6B63"/>
+                </a:solidFill>
+                <a:latin typeface="Courier New" pitchFamily="34" charset="0"/>
+                <a:ea typeface="Courier New" pitchFamily="34" charset="-122"/>
+                <a:cs typeface="Courier New" pitchFamily="34" charset="-120"/>
+              </a:rPr>
+              <a:t>OB</a:t>
+            </a:r>
+            <a:endParaRPr lang="en-US" sz="850" dirty="0"/>
+          </a:p>
+        </p:txBody>
+      </p:sp>
+      <p:sp>
+        <p:nvSpPr>
+          <p:cNvPr id="27" name="Text 25"/>
+          <p:cNvSpPr/>
+          <p:nvPr/>
+        </p:nvSpPr>
+        <p:spPr>
+          <a:xfrm>
+            <a:off x="4590288" y="3255264"/>
+            <a:ext cx="868680" cy="329184"/>
+          </a:xfrm>
+          <a:prstGeom prst="rect">
+            <a:avLst/>
+          </a:prstGeom>
+          <a:noFill/>
+          <a:ln/>
+        </p:spPr>
+        <p:txBody>
+          <a:bodyPr wrap="square" lIns="0" tIns="0" rIns="0" bIns="0" rtlCol="0" anchor="ctr"/>
+          <a:lstStyle/>
+          <a:p>
+            <a:pPr indent="0" marL="0">
+              <a:buNone/>
+            </a:pPr>
+            <a:r>
+              <a:rPr lang="en-US" sz="850" b="1" spc="80" kern="0" dirty="0">
+                <a:solidFill>
+                  <a:srgbClr val="1C6B63"/>
+                </a:solidFill>
+                <a:latin typeface="Courier New" pitchFamily="34" charset="0"/>
+                <a:ea typeface="Courier New" pitchFamily="34" charset="-122"/>
+                <a:cs typeface="Courier New" pitchFamily="34" charset="-120"/>
+              </a:rPr>
+              <a:t>MANAGEMENT</a:t>
+            </a:r>
+            <a:endParaRPr lang="en-US" sz="850" dirty="0"/>
+          </a:p>
+          <a:p>
+            <a:pPr indent="0" marL="0">
+              <a:buNone/>
+            </a:pPr>
+            <a:r>
+              <a:rPr lang="en-US" sz="850" b="1" spc="80" kern="0" dirty="0">
+                <a:solidFill>
+                  <a:srgbClr val="1C6B63"/>
+                </a:solidFill>
+                <a:latin typeface="Courier New" pitchFamily="34" charset="0"/>
+                <a:ea typeface="Courier New" pitchFamily="34" charset="-122"/>
+                <a:cs typeface="Courier New" pitchFamily="34" charset="-120"/>
+              </a:rPr>
+              <a:t>fanned</a:t>
+            </a:r>
+            <a:endParaRPr lang="en-US" sz="850" dirty="0"/>
+          </a:p>
+        </p:txBody>
+      </p:sp>
+      <p:sp>
+        <p:nvSpPr>
+          <p:cNvPr id="28" name="Text 26"/>
+          <p:cNvSpPr/>
+          <p:nvPr/>
+        </p:nvSpPr>
+        <p:spPr>
+          <a:xfrm>
+            <a:off x="658368" y="4187952"/>
+            <a:ext cx="4663440" cy="310896"/>
           </a:xfrm>
           <a:prstGeom prst="rect">
             <a:avLst/>
@@ -1641,7 +1918,7 @@
                 <a:ea typeface="Cambria" pitchFamily="34" charset="-122"/>
                 <a:cs typeface="Cambria" pitchFamily="34" charset="-120"/>
               </a:rPr>
-              <a:t>The field is defined by where the disciplines cross — not by a territory of its own.</a:t>
+              <a:t>One circle per discipline hides the real picture: strategy sits deep inside IB, HR partly, OB barely touches it.</a:t>
             </a:r>
             <a:endParaRPr lang="en-US" sz="1100" dirty="0"/>
           </a:p>
@@ -1649,7 +1926,7 @@
       </p:sp>
       <p:sp>
         <p:nvSpPr>
-          <p:cNvPr id="24" name="Shape 22"/>
+          <p:cNvPr id="29" name="Shape 27"/>
           <p:cNvSpPr/>
           <p:nvPr/>
         </p:nvSpPr>
@@ -1674,7 +1951,7 @@
       </p:sp>
       <p:sp>
         <p:nvSpPr>
-          <p:cNvPr id="25" name="Text 23"/>
+          <p:cNvPr id="30" name="Text 28"/>
           <p:cNvSpPr/>
           <p:nvPr/>
         </p:nvSpPr>
@@ -1713,14 +1990,14 @@
       </p:sp>
       <p:sp>
         <p:nvSpPr>
-          <p:cNvPr id="26" name="Text 24"/>
+          <p:cNvPr id="31" name="Text 29"/>
           <p:cNvSpPr/>
           <p:nvPr/>
         </p:nvSpPr>
         <p:spPr>
           <a:xfrm>
             <a:off x="6345936" y="1481328"/>
-            <a:ext cx="2377440" cy="237744"/>
+            <a:ext cx="2743200" cy="237744"/>
           </a:xfrm>
           <a:prstGeom prst="rect">
             <a:avLst/>
@@ -1744,7 +2021,7 @@
                 <a:ea typeface="Georgia" pitchFamily="34" charset="-122"/>
                 <a:cs typeface="Georgia" pitchFamily="34" charset="-120"/>
               </a:rPr>
-              <a:t>Five parallel descents</a:t>
+              <a:t>The crossbars run both ways</a:t>
             </a:r>
             <a:endParaRPr lang="en-US" sz="1400" dirty="0"/>
           </a:p>
@@ -1752,14 +2029,14 @@
       </p:sp>
       <p:sp>
         <p:nvSpPr>
-          <p:cNvPr id="27" name="Text 25"/>
-          <p:cNvSpPr/>
-          <p:nvPr/>
-        </p:nvSpPr>
-        <p:spPr>
-          <a:xfrm>
-            <a:off x="6062472" y="1737360"/>
-            <a:ext cx="768096" cy="201168"/>
+          <p:cNvPr id="32" name="Text 30"/>
+          <p:cNvSpPr/>
+          <p:nvPr/>
+        </p:nvSpPr>
+        <p:spPr>
+          <a:xfrm>
+            <a:off x="6016752" y="1773936"/>
+            <a:ext cx="768096" cy="182880"/>
           </a:xfrm>
           <a:prstGeom prst="rect">
             <a:avLst/>
@@ -1791,14 +2068,14 @@
       </p:sp>
       <p:sp>
         <p:nvSpPr>
-          <p:cNvPr id="28" name="Shape 26"/>
-          <p:cNvSpPr/>
-          <p:nvPr/>
-        </p:nvSpPr>
-        <p:spPr>
-          <a:xfrm>
-            <a:off x="6446520" y="1993392"/>
-            <a:ext cx="0" cy="1938528"/>
+          <p:cNvPr id="33" name="Shape 31"/>
+          <p:cNvSpPr/>
+          <p:nvPr/>
+        </p:nvSpPr>
+        <p:spPr>
+          <a:xfrm>
+            <a:off x="6400800" y="2011680"/>
+            <a:ext cx="0" cy="1901952"/>
           </a:xfrm>
           <a:prstGeom prst="line">
             <a:avLst/>
@@ -1815,14 +2092,14 @@
       </p:sp>
       <p:sp>
         <p:nvSpPr>
-          <p:cNvPr id="29" name="Text 27"/>
-          <p:cNvSpPr/>
-          <p:nvPr/>
-        </p:nvSpPr>
-        <p:spPr>
-          <a:xfrm>
-            <a:off x="7022592" y="1865376"/>
-            <a:ext cx="768096" cy="201168"/>
+          <p:cNvPr id="34" name="Text 32"/>
+          <p:cNvSpPr/>
+          <p:nvPr/>
+        </p:nvSpPr>
+        <p:spPr>
+          <a:xfrm>
+            <a:off x="6931152" y="1901952"/>
+            <a:ext cx="768096" cy="182880"/>
           </a:xfrm>
           <a:prstGeom prst="rect">
             <a:avLst/>
@@ -1854,14 +2131,14 @@
       </p:sp>
       <p:sp>
         <p:nvSpPr>
-          <p:cNvPr id="30" name="Shape 28"/>
-          <p:cNvSpPr/>
-          <p:nvPr/>
-        </p:nvSpPr>
-        <p:spPr>
-          <a:xfrm>
-            <a:off x="7406640" y="2121408"/>
-            <a:ext cx="0" cy="1810512"/>
+          <p:cNvPr id="35" name="Shape 33"/>
+          <p:cNvSpPr/>
+          <p:nvPr/>
+        </p:nvSpPr>
+        <p:spPr>
+          <a:xfrm>
+            <a:off x="7315200" y="2139696"/>
+            <a:ext cx="0" cy="1773936"/>
           </a:xfrm>
           <a:prstGeom prst="line">
             <a:avLst/>
@@ -1878,14 +2155,14 @@
       </p:sp>
       <p:sp>
         <p:nvSpPr>
-          <p:cNvPr id="31" name="Text 29"/>
-          <p:cNvSpPr/>
-          <p:nvPr/>
-        </p:nvSpPr>
-        <p:spPr>
-          <a:xfrm>
-            <a:off x="7982712" y="2048256"/>
-            <a:ext cx="768096" cy="201168"/>
+          <p:cNvPr id="36" name="Text 34"/>
+          <p:cNvSpPr/>
+          <p:nvPr/>
+        </p:nvSpPr>
+        <p:spPr>
+          <a:xfrm>
+            <a:off x="7845552" y="2084832"/>
+            <a:ext cx="768096" cy="182880"/>
           </a:xfrm>
           <a:prstGeom prst="rect">
             <a:avLst/>
@@ -1917,14 +2194,14 @@
       </p:sp>
       <p:sp>
         <p:nvSpPr>
-          <p:cNvPr id="32" name="Shape 30"/>
-          <p:cNvSpPr/>
-          <p:nvPr/>
-        </p:nvSpPr>
-        <p:spPr>
-          <a:xfrm>
-            <a:off x="8366760" y="2304288"/>
-            <a:ext cx="0" cy="1627632"/>
+          <p:cNvPr id="37" name="Shape 35"/>
+          <p:cNvSpPr/>
+          <p:nvPr/>
+        </p:nvSpPr>
+        <p:spPr>
+          <a:xfrm>
+            <a:off x="8229600" y="2322576"/>
+            <a:ext cx="0" cy="1591056"/>
           </a:xfrm>
           <a:prstGeom prst="line">
             <a:avLst/>
@@ -1941,14 +2218,14 @@
       </p:sp>
       <p:sp>
         <p:nvSpPr>
-          <p:cNvPr id="33" name="Text 31"/>
-          <p:cNvSpPr/>
-          <p:nvPr/>
-        </p:nvSpPr>
-        <p:spPr>
-          <a:xfrm>
-            <a:off x="8942832" y="1938528"/>
-            <a:ext cx="768096" cy="201168"/>
+          <p:cNvPr id="38" name="Text 36"/>
+          <p:cNvSpPr/>
+          <p:nvPr/>
+        </p:nvSpPr>
+        <p:spPr>
+          <a:xfrm>
+            <a:off x="10634472" y="2157984"/>
+            <a:ext cx="768096" cy="182880"/>
           </a:xfrm>
           <a:prstGeom prst="rect">
             <a:avLst/>
@@ -1972,7 +2249,7 @@
                 <a:ea typeface="Courier New" pitchFamily="34" charset="-122"/>
                 <a:cs typeface="Courier New" pitchFamily="34" charset="-120"/>
               </a:rPr>
-              <a:t>MGMT</a:t>
+              <a:t>MKTG</a:t>
             </a:r>
             <a:endParaRPr lang="en-US" sz="900" dirty="0"/>
           </a:p>
@@ -1980,14 +2257,14 @@
       </p:sp>
       <p:sp>
         <p:nvSpPr>
-          <p:cNvPr id="34" name="Shape 32"/>
-          <p:cNvSpPr/>
-          <p:nvPr/>
-        </p:nvSpPr>
-        <p:spPr>
-          <a:xfrm>
-            <a:off x="9326880" y="2194560"/>
-            <a:ext cx="0" cy="1737360"/>
+          <p:cNvPr id="39" name="Shape 37"/>
+          <p:cNvSpPr/>
+          <p:nvPr/>
+        </p:nvSpPr>
+        <p:spPr>
+          <a:xfrm>
+            <a:off x="11018520" y="2395728"/>
+            <a:ext cx="0" cy="1517904"/>
           </a:xfrm>
           <a:prstGeom prst="line">
             <a:avLst/>
@@ -2004,14 +2281,14 @@
       </p:sp>
       <p:sp>
         <p:nvSpPr>
-          <p:cNvPr id="35" name="Text 33"/>
-          <p:cNvSpPr/>
-          <p:nvPr/>
-        </p:nvSpPr>
-        <p:spPr>
-          <a:xfrm>
-            <a:off x="9902952" y="2121408"/>
-            <a:ext cx="768096" cy="201168"/>
+          <p:cNvPr id="40" name="Text 38"/>
+          <p:cNvSpPr/>
+          <p:nvPr/>
+        </p:nvSpPr>
+        <p:spPr>
+          <a:xfrm>
+            <a:off x="9052560" y="1792224"/>
+            <a:ext cx="1554480" cy="182880"/>
           </a:xfrm>
           <a:prstGeom prst="rect">
             <a:avLst/>
@@ -2029,13 +2306,13 @@
             <a:r>
               <a:rPr lang="en-US" sz="900" b="1" dirty="0">
                 <a:solidFill>
-                  <a:srgbClr val="1F4E79"/>
+                  <a:srgbClr val="1C6B63"/>
                 </a:solidFill>
                 <a:latin typeface="Courier New" pitchFamily="34" charset="0"/>
                 <a:ea typeface="Courier New" pitchFamily="34" charset="-122"/>
                 <a:cs typeface="Courier New" pitchFamily="34" charset="-120"/>
               </a:rPr>
-              <a:t>MKTG</a:t>
+              <a:t>MGMT</a:t>
             </a:r>
             <a:endParaRPr lang="en-US" sz="900" dirty="0"/>
           </a:p>
@@ -2043,14 +2320,37 @@
       </p:sp>
       <p:sp>
         <p:nvSpPr>
-          <p:cNvPr id="36" name="Shape 34"/>
-          <p:cNvSpPr/>
-          <p:nvPr/>
-        </p:nvSpPr>
-        <p:spPr>
-          <a:xfrm>
-            <a:off x="10287000" y="2377440"/>
-            <a:ext cx="0" cy="1554480"/>
+          <p:cNvPr id="41" name="Shape 39"/>
+          <p:cNvSpPr/>
+          <p:nvPr/>
+        </p:nvSpPr>
+        <p:spPr>
+          <a:xfrm>
+            <a:off x="9125712" y="1975104"/>
+            <a:ext cx="1408176" cy="0"/>
+          </a:xfrm>
+          <a:prstGeom prst="line">
+            <a:avLst/>
+          </a:prstGeom>
+          <a:noFill/>
+          <a:ln w="12700">
+            <a:solidFill>
+              <a:srgbClr val="1C6B63"/>
+            </a:solidFill>
+            <a:prstDash val="dash"/>
+          </a:ln>
+        </p:spPr>
+      </p:sp>
+      <p:sp>
+        <p:nvSpPr>
+          <p:cNvPr id="42" name="Shape 40"/>
+          <p:cNvSpPr/>
+          <p:nvPr/>
+        </p:nvSpPr>
+        <p:spPr>
+          <a:xfrm>
+            <a:off x="9189720" y="2066544"/>
+            <a:ext cx="0" cy="1847088"/>
           </a:xfrm>
           <a:prstGeom prst="line">
             <a:avLst/>
@@ -2058,7 +2358,7 @@
           <a:noFill/>
           <a:ln w="28575">
             <a:solidFill>
-              <a:srgbClr val="1F4E79"/>
+              <a:srgbClr val="1C6B63"/>
             </a:solidFill>
             <a:prstDash val="solid"/>
             <a:tailEnd type="triangle"/>
@@ -2067,14 +2367,179 @@
       </p:sp>
       <p:sp>
         <p:nvSpPr>
-          <p:cNvPr id="37" name="Shape 35"/>
-          <p:cNvSpPr/>
-          <p:nvPr/>
-        </p:nvSpPr>
-        <p:spPr>
-          <a:xfrm>
-            <a:off x="6446520" y="2615184"/>
-            <a:ext cx="960120" cy="118872"/>
+          <p:cNvPr id="43" name="Shape 41"/>
+          <p:cNvSpPr/>
+          <p:nvPr/>
+        </p:nvSpPr>
+        <p:spPr>
+          <a:xfrm>
+            <a:off x="9829800" y="2761488"/>
+            <a:ext cx="0" cy="1152144"/>
+          </a:xfrm>
+          <a:prstGeom prst="line">
+            <a:avLst/>
+          </a:prstGeom>
+          <a:noFill/>
+          <a:ln w="25400">
+            <a:solidFill>
+              <a:srgbClr val="1C6B63"/>
+            </a:solidFill>
+            <a:prstDash val="solid"/>
+            <a:tailEnd type="triangle"/>
+          </a:ln>
+        </p:spPr>
+      </p:sp>
+      <p:sp>
+        <p:nvSpPr>
+          <p:cNvPr id="44" name="Shape 42"/>
+          <p:cNvSpPr/>
+          <p:nvPr/>
+        </p:nvSpPr>
+        <p:spPr>
+          <a:xfrm>
+            <a:off x="10469880" y="3877056"/>
+            <a:ext cx="0" cy="-969264"/>
+          </a:xfrm>
+          <a:prstGeom prst="line">
+            <a:avLst/>
+          </a:prstGeom>
+          <a:noFill/>
+          <a:ln w="25400">
+            <a:solidFill>
+              <a:srgbClr val="1C6B63"/>
+            </a:solidFill>
+            <a:prstDash val="dash"/>
+            <a:tailEnd type="triangle"/>
+          </a:ln>
+        </p:spPr>
+      </p:sp>
+      <p:sp>
+        <p:nvSpPr>
+          <p:cNvPr id="45" name="Text 43"/>
+          <p:cNvSpPr/>
+          <p:nvPr/>
+        </p:nvSpPr>
+        <p:spPr>
+          <a:xfrm>
+            <a:off x="8887968" y="3950208"/>
+            <a:ext cx="603504" cy="182880"/>
+          </a:xfrm>
+          <a:prstGeom prst="rect">
+            <a:avLst/>
+          </a:prstGeom>
+          <a:noFill/>
+          <a:ln/>
+        </p:spPr>
+        <p:txBody>
+          <a:bodyPr wrap="square" lIns="0" tIns="0" rIns="0" bIns="0" rtlCol="0" anchor="ctr"/>
+          <a:lstStyle/>
+          <a:p>
+            <a:pPr algn="ctr" indent="0" marL="0">
+              <a:buNone/>
+            </a:pPr>
+            <a:r>
+              <a:rPr lang="en-US" sz="800" dirty="0">
+                <a:solidFill>
+                  <a:srgbClr val="1C6B63"/>
+                </a:solidFill>
+                <a:latin typeface="Courier New" pitchFamily="34" charset="0"/>
+                <a:ea typeface="Courier New" pitchFamily="34" charset="-122"/>
+                <a:cs typeface="Courier New" pitchFamily="34" charset="-120"/>
+              </a:rPr>
+              <a:t>strat</a:t>
+            </a:r>
+            <a:endParaRPr lang="en-US" sz="800" dirty="0"/>
+          </a:p>
+        </p:txBody>
+      </p:sp>
+      <p:sp>
+        <p:nvSpPr>
+          <p:cNvPr id="46" name="Text 44"/>
+          <p:cNvSpPr/>
+          <p:nvPr/>
+        </p:nvSpPr>
+        <p:spPr>
+          <a:xfrm>
+            <a:off x="9555480" y="3950208"/>
+            <a:ext cx="548640" cy="182880"/>
+          </a:xfrm>
+          <a:prstGeom prst="rect">
+            <a:avLst/>
+          </a:prstGeom>
+          <a:noFill/>
+          <a:ln/>
+        </p:spPr>
+        <p:txBody>
+          <a:bodyPr wrap="square" lIns="0" tIns="0" rIns="0" bIns="0" rtlCol="0" anchor="ctr"/>
+          <a:lstStyle/>
+          <a:p>
+            <a:pPr algn="ctr" indent="0" marL="0">
+              <a:buNone/>
+            </a:pPr>
+            <a:r>
+              <a:rPr lang="en-US" sz="800" dirty="0">
+                <a:solidFill>
+                  <a:srgbClr val="1C6B63"/>
+                </a:solidFill>
+                <a:latin typeface="Courier New" pitchFamily="34" charset="0"/>
+                <a:ea typeface="Courier New" pitchFamily="34" charset="-122"/>
+                <a:cs typeface="Courier New" pitchFamily="34" charset="-120"/>
+              </a:rPr>
+              <a:t>HR</a:t>
+            </a:r>
+            <a:endParaRPr lang="en-US" sz="800" dirty="0"/>
+          </a:p>
+        </p:txBody>
+      </p:sp>
+      <p:sp>
+        <p:nvSpPr>
+          <p:cNvPr id="47" name="Text 45"/>
+          <p:cNvSpPr/>
+          <p:nvPr/>
+        </p:nvSpPr>
+        <p:spPr>
+          <a:xfrm>
+            <a:off x="10195560" y="3950208"/>
+            <a:ext cx="548640" cy="182880"/>
+          </a:xfrm>
+          <a:prstGeom prst="rect">
+            <a:avLst/>
+          </a:prstGeom>
+          <a:noFill/>
+          <a:ln/>
+        </p:spPr>
+        <p:txBody>
+          <a:bodyPr wrap="square" lIns="0" tIns="0" rIns="0" bIns="0" rtlCol="0" anchor="ctr"/>
+          <a:lstStyle/>
+          <a:p>
+            <a:pPr algn="ctr" indent="0" marL="0">
+              <a:buNone/>
+            </a:pPr>
+            <a:r>
+              <a:rPr lang="en-US" sz="800" dirty="0">
+                <a:solidFill>
+                  <a:srgbClr val="1C6B63"/>
+                </a:solidFill>
+                <a:latin typeface="Courier New" pitchFamily="34" charset="0"/>
+                <a:ea typeface="Courier New" pitchFamily="34" charset="-122"/>
+                <a:cs typeface="Courier New" pitchFamily="34" charset="-120"/>
+              </a:rPr>
+              <a:t>OB</a:t>
+            </a:r>
+            <a:endParaRPr lang="en-US" sz="800" dirty="0"/>
+          </a:p>
+        </p:txBody>
+      </p:sp>
+      <p:sp>
+        <p:nvSpPr>
+          <p:cNvPr id="48" name="Shape 46"/>
+          <p:cNvSpPr/>
+          <p:nvPr/>
+        </p:nvSpPr>
+        <p:spPr>
+          <a:xfrm>
+            <a:off x="6400800" y="2596896"/>
+            <a:ext cx="914400" cy="109728"/>
           </a:xfrm>
           <a:prstGeom prst="rect">
             <a:avLst/>
@@ -2094,14 +2559,14 @@
       </p:sp>
       <p:sp>
         <p:nvSpPr>
-          <p:cNvPr id="38" name="Shape 36"/>
-          <p:cNvSpPr/>
-          <p:nvPr/>
-        </p:nvSpPr>
-        <p:spPr>
-          <a:xfrm>
-            <a:off x="7406640" y="2962656"/>
-            <a:ext cx="960120" cy="118872"/>
+          <p:cNvPr id="49" name="Shape 47"/>
+          <p:cNvSpPr/>
+          <p:nvPr/>
+        </p:nvSpPr>
+        <p:spPr>
+          <a:xfrm>
+            <a:off x="7315200" y="2926080"/>
+            <a:ext cx="914400" cy="109728"/>
           </a:xfrm>
           <a:prstGeom prst="rect">
             <a:avLst/>
@@ -2121,26 +2586,26 @@
       </p:sp>
       <p:sp>
         <p:nvSpPr>
-          <p:cNvPr id="39" name="Shape 37"/>
-          <p:cNvSpPr/>
-          <p:nvPr/>
-        </p:nvSpPr>
-        <p:spPr>
-          <a:xfrm>
-            <a:off x="9326880" y="3218688"/>
-            <a:ext cx="960120" cy="118872"/>
+          <p:cNvPr id="50" name="Shape 48"/>
+          <p:cNvSpPr/>
+          <p:nvPr/>
+        </p:nvSpPr>
+        <p:spPr>
+          <a:xfrm>
+            <a:off x="9189720" y="3255264"/>
+            <a:ext cx="1828800" cy="109728"/>
           </a:xfrm>
           <a:prstGeom prst="rect">
             <a:avLst/>
           </a:prstGeom>
           <a:solidFill>
-            <a:srgbClr val="1F4E79">
+            <a:srgbClr val="1C6B63">
               <a:alpha val="45000"/>
             </a:srgbClr>
           </a:solidFill>
           <a:ln w="9525">
             <a:solidFill>
-              <a:srgbClr val="1F4E79"/>
+              <a:srgbClr val="1C6B63"/>
             </a:solidFill>
             <a:prstDash val="solid"/>
           </a:ln>
@@ -2148,14 +2613,53 @@
       </p:sp>
       <p:sp>
         <p:nvSpPr>
-          <p:cNvPr id="40" name="Shape 38"/>
-          <p:cNvSpPr/>
-          <p:nvPr/>
-        </p:nvSpPr>
-        <p:spPr>
-          <a:xfrm>
-            <a:off x="6144768" y="3986784"/>
-            <a:ext cx="4663440" cy="329184"/>
+          <p:cNvPr id="51" name="Text 49"/>
+          <p:cNvSpPr/>
+          <p:nvPr/>
+        </p:nvSpPr>
+        <p:spPr>
+          <a:xfrm>
+            <a:off x="9692640" y="2432304"/>
+            <a:ext cx="2011680" cy="310896"/>
+          </a:xfrm>
+          <a:prstGeom prst="rect">
+            <a:avLst/>
+          </a:prstGeom>
+          <a:noFill/>
+          <a:ln/>
+        </p:spPr>
+        <p:txBody>
+          <a:bodyPr wrap="square" lIns="0" tIns="0" rIns="0" bIns="0" rtlCol="0" anchor="ctr"/>
+          <a:lstStyle/>
+          <a:p>
+            <a:pPr indent="0" marL="0">
+              <a:buNone/>
+            </a:pPr>
+            <a:r>
+              <a:rPr lang="en-US" sz="750" dirty="0">
+                <a:solidFill>
+                  <a:srgbClr val="1C6B63"/>
+                </a:solidFill>
+                <a:latin typeface="Courier New" pitchFamily="34" charset="0"/>
+                <a:ea typeface="Courier New" pitchFamily="34" charset="-122"/>
+                <a:cs typeface="Courier New" pitchFamily="34" charset="-120"/>
+              </a:rPr>
+              <a:t>OB flows back INTO management (Hofstede, GLOBE)</a:t>
+            </a:r>
+            <a:endParaRPr lang="en-US" sz="750" dirty="0"/>
+          </a:p>
+        </p:txBody>
+      </p:sp>
+      <p:sp>
+        <p:nvSpPr>
+          <p:cNvPr id="52" name="Shape 50"/>
+          <p:cNvSpPr/>
+          <p:nvPr/>
+        </p:nvSpPr>
+        <p:spPr>
+          <a:xfrm>
+            <a:off x="6035040" y="4169664"/>
+            <a:ext cx="4754880" cy="292608"/>
           </a:xfrm>
           <a:prstGeom prst="rect">
             <a:avLst/>
@@ -2175,14 +2679,14 @@
       </p:sp>
       <p:sp>
         <p:nvSpPr>
-          <p:cNvPr id="41" name="Text 39"/>
-          <p:cNvSpPr/>
-          <p:nvPr/>
-        </p:nvSpPr>
-        <p:spPr>
-          <a:xfrm>
-            <a:off x="6144768" y="4050792"/>
-            <a:ext cx="4663440" cy="219456"/>
+          <p:cNvPr id="53" name="Text 51"/>
+          <p:cNvSpPr/>
+          <p:nvPr/>
+        </p:nvSpPr>
+        <p:spPr>
+          <a:xfrm>
+            <a:off x="6035040" y="4224528"/>
+            <a:ext cx="4754880" cy="201168"/>
           </a:xfrm>
           <a:prstGeom prst="rect">
             <a:avLst/>
@@ -2198,7 +2702,7 @@
               <a:buNone/>
             </a:pPr>
             <a:r>
-              <a:rPr lang="en-US" sz="950" dirty="0">
+              <a:rPr lang="en-US" sz="900" dirty="0">
                 <a:solidFill>
                   <a:srgbClr val="1F4E79"/>
                 </a:solidFill>
@@ -2208,47 +2712,20 @@
               </a:rPr>
               <a:t>Minor IB field integration — only on strategy issues</a:t>
             </a:r>
-            <a:endParaRPr lang="en-US" sz="950" dirty="0"/>
-          </a:p>
-        </p:txBody>
-      </p:sp>
-      <p:sp>
-        <p:nvSpPr>
-          <p:cNvPr id="42" name="Shape 40"/>
-          <p:cNvSpPr/>
-          <p:nvPr/>
-        </p:nvSpPr>
-        <p:spPr>
-          <a:xfrm>
-            <a:off x="10991088" y="2615184"/>
-            <a:ext cx="182880" cy="118872"/>
-          </a:xfrm>
-          <a:prstGeom prst="rect">
-            <a:avLst/>
-          </a:prstGeom>
-          <a:solidFill>
-            <a:srgbClr val="1F4E79">
-              <a:alpha val="45000"/>
-            </a:srgbClr>
-          </a:solidFill>
-          <a:ln w="9525">
-            <a:solidFill>
-              <a:srgbClr val="1F4E79"/>
-            </a:solidFill>
-            <a:prstDash val="solid"/>
-          </a:ln>
-        </p:spPr>
-      </p:sp>
-      <p:sp>
-        <p:nvSpPr>
-          <p:cNvPr id="43" name="Text 41"/>
-          <p:cNvSpPr/>
-          <p:nvPr/>
-        </p:nvSpPr>
-        <p:spPr>
-          <a:xfrm>
-            <a:off x="11228832" y="2523744"/>
-            <a:ext cx="822960" cy="347472"/>
+            <a:endParaRPr lang="en-US" sz="900" dirty="0"/>
+          </a:p>
+        </p:txBody>
+      </p:sp>
+      <p:sp>
+        <p:nvSpPr>
+          <p:cNvPr id="54" name="Text 52"/>
+          <p:cNvSpPr/>
+          <p:nvPr/>
+        </p:nvSpPr>
+        <p:spPr>
+          <a:xfrm>
+            <a:off x="11356848" y="3474720"/>
+            <a:ext cx="640080" cy="182880"/>
           </a:xfrm>
           <a:prstGeom prst="rect">
             <a:avLst/>
@@ -2272,117 +2749,22 @@
                 <a:ea typeface="Courier New" pitchFamily="34" charset="-122"/>
                 <a:cs typeface="Courier New" pitchFamily="34" charset="-120"/>
               </a:rPr>
-              <a:t>some</a:t>
+              <a:t>time</a:t>
             </a:r>
             <a:endParaRPr lang="en-US" sz="800" dirty="0"/>
           </a:p>
-          <a:p>
-            <a:pPr indent="0" marL="0">
-              <a:buNone/>
-            </a:pPr>
-            <a:r>
-              <a:rPr lang="en-US" sz="800" dirty="0">
-                <a:solidFill>
-                  <a:srgbClr val="767D86"/>
-                </a:solidFill>
-                <a:latin typeface="Courier New" pitchFamily="34" charset="0"/>
-                <a:ea typeface="Courier New" pitchFamily="34" charset="-122"/>
-                <a:cs typeface="Courier New" pitchFamily="34" charset="-120"/>
-              </a:rPr>
-              <a:t>integration</a:t>
-            </a:r>
-            <a:endParaRPr lang="en-US" sz="800" dirty="0"/>
-          </a:p>
-        </p:txBody>
-      </p:sp>
-      <p:sp>
-        <p:nvSpPr>
-          <p:cNvPr id="44" name="Text 42"/>
-          <p:cNvSpPr/>
-          <p:nvPr/>
-        </p:nvSpPr>
-        <p:spPr>
-          <a:xfrm>
-            <a:off x="11228832" y="3584448"/>
-            <a:ext cx="822960" cy="201168"/>
-          </a:xfrm>
-          <a:prstGeom prst="rect">
-            <a:avLst/>
-          </a:prstGeom>
-          <a:noFill/>
-          <a:ln/>
-        </p:spPr>
-        <p:txBody>
-          <a:bodyPr wrap="square" lIns="0" tIns="0" rIns="0" bIns="0" rtlCol="0" anchor="ctr"/>
-          <a:lstStyle/>
-          <a:p>
-            <a:pPr indent="0" marL="0">
-              <a:buNone/>
-            </a:pPr>
-            <a:r>
-              <a:rPr lang="en-US" sz="800" dirty="0">
-                <a:solidFill>
-                  <a:srgbClr val="767D86"/>
-                </a:solidFill>
-                <a:latin typeface="Courier New" pitchFamily="34" charset="0"/>
-                <a:ea typeface="Courier New" pitchFamily="34" charset="-122"/>
-                <a:cs typeface="Courier New" pitchFamily="34" charset="-120"/>
-              </a:rPr>
-              <a:t>time</a:t>
-            </a:r>
-            <a:endParaRPr lang="en-US" sz="800" dirty="0"/>
-          </a:p>
-        </p:txBody>
-      </p:sp>
-      <p:sp>
-        <p:nvSpPr>
-          <p:cNvPr id="45" name="Text 43"/>
-          <p:cNvSpPr/>
-          <p:nvPr/>
-        </p:nvSpPr>
-        <p:spPr>
-          <a:xfrm>
-            <a:off x="5943600" y="4389120"/>
-            <a:ext cx="5577840" cy="256032"/>
-          </a:xfrm>
-          <a:prstGeom prst="rect">
-            <a:avLst/>
-          </a:prstGeom>
-          <a:noFill/>
-          <a:ln/>
-        </p:spPr>
-        <p:txBody>
-          <a:bodyPr wrap="square" lIns="0" tIns="0" rIns="0" bIns="0" rtlCol="0" anchor="ctr"/>
-          <a:lstStyle/>
-          <a:p>
-            <a:pPr indent="0" marL="0">
-              <a:buNone/>
-            </a:pPr>
-            <a:r>
-              <a:rPr lang="en-US" sz="1100" dirty="0">
-                <a:solidFill>
-                  <a:srgbClr val="454B54"/>
-                </a:solidFill>
-                <a:latin typeface="Cambria" pitchFamily="34" charset="0"/>
-                <a:ea typeface="Cambria" pitchFamily="34" charset="-122"/>
-                <a:cs typeface="Cambria" pitchFamily="34" charset="-120"/>
-              </a:rPr>
-              <a:t>Each discipline developed on its own track. The bars are the only crossings.</a:t>
-            </a:r>
-            <a:endParaRPr lang="en-US" sz="1100" dirty="0"/>
-          </a:p>
-        </p:txBody>
-      </p:sp>
-      <p:sp>
-        <p:nvSpPr>
-          <p:cNvPr id="46" name="Shape 44"/>
-          <p:cNvSpPr/>
-          <p:nvPr/>
-        </p:nvSpPr>
-        <p:spPr>
-          <a:xfrm>
-            <a:off x="457200" y="4754880"/>
-            <a:ext cx="11274552" cy="1572768"/>
+        </p:txBody>
+      </p:sp>
+      <p:sp>
+        <p:nvSpPr>
+          <p:cNvPr id="55" name="Shape 53"/>
+          <p:cNvSpPr/>
+          <p:nvPr/>
+        </p:nvSpPr>
+        <p:spPr>
+          <a:xfrm>
+            <a:off x="457200" y="4736592"/>
+            <a:ext cx="11274552" cy="1591056"/>
           </a:xfrm>
           <a:prstGeom prst="rect">
             <a:avLst/>
@@ -2400,14 +2782,14 @@
       </p:sp>
       <p:sp>
         <p:nvSpPr>
-          <p:cNvPr id="47" name="Text 45"/>
-          <p:cNvSpPr/>
-          <p:nvPr/>
-        </p:nvSpPr>
-        <p:spPr>
-          <a:xfrm>
-            <a:off x="713232" y="4882896"/>
-            <a:ext cx="8229600" cy="219456"/>
+          <p:cNvPr id="56" name="Text 54"/>
+          <p:cNvSpPr/>
+          <p:nvPr/>
+        </p:nvSpPr>
+        <p:spPr>
+          <a:xfrm>
+            <a:off x="713232" y="4864608"/>
+            <a:ext cx="8229600" cy="201168"/>
           </a:xfrm>
           <a:prstGeom prst="rect">
             <a:avLst/>
@@ -2431,7 +2813,7 @@
                 <a:ea typeface="Courier New" pitchFamily="34" charset="-122"/>
                 <a:cs typeface="Courier New" pitchFamily="34" charset="-120"/>
               </a:rPr>
-              <a:t>THE EXTENSION — A SECOND CROSSBAR, THIRTY YEARS ON</a:t>
+              <a:t>THE THIRD INTEGRATION POINT</a:t>
             </a:r>
             <a:endParaRPr lang="en-US" sz="900" dirty="0"/>
           </a:p>
@@ -2439,13 +2821,13 @@
       </p:sp>
       <p:sp>
         <p:nvSpPr>
-          <p:cNvPr id="48" name="Text 46"/>
-          <p:cNvSpPr/>
-          <p:nvPr/>
-        </p:nvSpPr>
-        <p:spPr>
-          <a:xfrm>
-            <a:off x="713232" y="5120640"/>
+          <p:cNvPr id="57" name="Text 55"/>
+          <p:cNvSpPr/>
+          <p:nvPr/>
+        </p:nvSpPr>
+        <p:spPr>
+          <a:xfrm>
+            <a:off x="713232" y="5084064"/>
             <a:ext cx="8778240" cy="329184"/>
           </a:xfrm>
           <a:prstGeom prst="rect">
@@ -2470,7 +2852,7 @@
                 <a:ea typeface="Georgia" pitchFamily="34" charset="-122"/>
                 <a:cs typeface="Georgia" pitchFamily="34" charset="-120"/>
               </a:rPr>
-              <a:t>Strategy was never the only place these five could meet. Method is the other one.</a:t>
+              <a:t>Management gave IB the integral plan for operations. Nobody has written the integral plan for evidence.</a:t>
             </a:r>
             <a:endParaRPr lang="en-US" sz="1700" dirty="0"/>
           </a:p>
@@ -2478,14 +2860,14 @@
       </p:sp>
       <p:sp>
         <p:nvSpPr>
-          <p:cNvPr id="49" name="Text 47"/>
-          <p:cNvSpPr/>
-          <p:nvPr/>
-        </p:nvSpPr>
-        <p:spPr>
-          <a:xfrm>
-            <a:off x="713232" y="5486400"/>
-            <a:ext cx="8778240" cy="731520"/>
+          <p:cNvPr id="58" name="Text 56"/>
+          <p:cNvSpPr/>
+          <p:nvPr/>
+        </p:nvSpPr>
+        <p:spPr>
+          <a:xfrm>
+            <a:off x="713232" y="5449824"/>
+            <a:ext cx="8778240" cy="768096"/>
           </a:xfrm>
           <a:prstGeom prst="rect">
             <a:avLst/>
@@ -2509,7 +2891,7 @@
                 <a:ea typeface="Cambria" pitchFamily="34" charset="-122"/>
                 <a:cs typeface="Cambria" pitchFamily="34" charset="-120"/>
               </a:rPr>
-              <a:t>Finance, accounting, marketing, management and economics all become international at the same moment — when the question is asked in more than one country at once. Every one of them then hits the same wall: reaching the same specialist population in each country. That constraint is field-wide, and it is not a strategy issue.</a:t>
+              <a:t>Both maps describe integration as TOPICAL — disciplines meet where their subject matter overlaps, which is rare and accidental. There is a second kind. Every sub-field above becomes international at the same moment: when it must collect comparable evidence from specialists in more than one country. That is structural, and field-wide by construction.</a:t>
             </a:r>
             <a:endParaRPr lang="en-US" sz="1150" dirty="0"/>
           </a:p>
@@ -2517,14 +2899,14 @@
       </p:sp>
       <p:sp>
         <p:nvSpPr>
-          <p:cNvPr id="50" name="Shape 48"/>
-          <p:cNvSpPr/>
-          <p:nvPr/>
-        </p:nvSpPr>
-        <p:spPr>
-          <a:xfrm>
-            <a:off x="9710928" y="4956048"/>
-            <a:ext cx="0" cy="1170432"/>
+          <p:cNvPr id="59" name="Shape 57"/>
+          <p:cNvSpPr/>
+          <p:nvPr/>
+        </p:nvSpPr>
+        <p:spPr>
+          <a:xfrm>
+            <a:off x="9710928" y="4937760"/>
+            <a:ext cx="0" cy="1188720"/>
           </a:xfrm>
           <a:prstGeom prst="line">
             <a:avLst/>
@@ -2540,13 +2922,13 @@
       </p:sp>
       <p:sp>
         <p:nvSpPr>
-          <p:cNvPr id="51" name="Text 49"/>
-          <p:cNvSpPr/>
-          <p:nvPr/>
-        </p:nvSpPr>
-        <p:spPr>
-          <a:xfrm>
-            <a:off x="9921240" y="5029200"/>
+          <p:cNvPr id="60" name="Text 58"/>
+          <p:cNvSpPr/>
+          <p:nvPr/>
+        </p:nvSpPr>
+        <p:spPr>
+          <a:xfrm>
+            <a:off x="9921240" y="5010912"/>
             <a:ext cx="1097280" cy="585216"/>
           </a:xfrm>
           <a:prstGeom prst="rect">
@@ -2579,13 +2961,13 @@
       </p:sp>
       <p:sp>
         <p:nvSpPr>
-          <p:cNvPr id="52" name="Text 50"/>
-          <p:cNvSpPr/>
-          <p:nvPr/>
-        </p:nvSpPr>
-        <p:spPr>
-          <a:xfrm>
-            <a:off x="9921240" y="5632704"/>
+          <p:cNvPr id="61" name="Text 59"/>
+          <p:cNvSpPr/>
+          <p:nvPr/>
+        </p:nvSpPr>
+        <p:spPr>
+          <a:xfrm>
+            <a:off x="9921240" y="5614416"/>
             <a:ext cx="1783080" cy="402336"/>
           </a:xfrm>
           <a:prstGeom prst="rect">
@@ -2635,14 +3017,14 @@
       </p:sp>
       <p:sp>
         <p:nvSpPr>
-          <p:cNvPr id="53" name="Text 51"/>
+          <p:cNvPr id="62" name="Text 60"/>
           <p:cNvSpPr/>
           <p:nvPr/>
         </p:nvSpPr>
         <p:spPr>
           <a:xfrm>
             <a:off x="457200" y="6419088"/>
-            <a:ext cx="7315200" cy="219456"/>
+            <a:ext cx="7315200" cy="201168"/>
           </a:xfrm>
           <a:prstGeom prst="rect">
             <a:avLst/>
@@ -2666,7 +3048,1309 @@
                 <a:ea typeface="Courier New" pitchFamily="34" charset="-122"/>
                 <a:cs typeface="Courier New" pitchFamily="34" charset="-120"/>
               </a:rPr>
-              <a:t>Yasir A. Malik   ·   github.com/AuditingAI/Profile</a:t>
+              <a:t>Yasir A. Malik   ·   github.com/AuditingAI/Profile   ·   1 / 2</a:t>
+            </a:r>
+            <a:endParaRPr lang="en-US" sz="850" dirty="0"/>
+          </a:p>
+        </p:txBody>
+      </p:sp>
+    </p:spTree>
+  </p:cSld>
+  <p:clrMapOvr>
+    <a:masterClrMapping/>
+  </p:clrMapOvr>
+</p:sld>
+</file>
+
+<file path=ppt/slides/slide2.xml><?xml version="1.0" encoding="utf-8"?>
+<p:sld xmlns:a="http://schemas.openxmlformats.org/drawingml/2006/main" xmlns:r="http://schemas.openxmlformats.org/officeDocument/2006/relationships" xmlns:p="http://schemas.openxmlformats.org/presentationml/2006/main">
+  <p:cSld name="Slide 2">
+    <p:bg>
+      <p:bgPr>
+        <a:solidFill>
+          <a:srgbClr val="FFFFFF"/>
+        </a:solidFill>
+      </p:bgPr>
+    </p:bg>
+    <p:spTree>
+      <p:nvGrpSpPr>
+        <p:cNvPr id="1" name=""/>
+        <p:cNvGrpSpPr/>
+        <p:nvPr/>
+      </p:nvGrpSpPr>
+      <p:grpSpPr>
+        <a:xfrm>
+          <a:off x="0" y="0"/>
+          <a:ext cx="0" cy="0"/>
+          <a:chOff x="0" y="0"/>
+          <a:chExt cx="0" cy="0"/>
+        </a:xfrm>
+      </p:grpSpPr>
+      <p:sp>
+        <p:nvSpPr>
+          <p:cNvPr id="2" name="Text 0"/>
+          <p:cNvSpPr/>
+          <p:nvPr/>
+        </p:nvSpPr>
+        <p:spPr>
+          <a:xfrm>
+            <a:off x="457200" y="128016"/>
+            <a:ext cx="2743200" cy="237744"/>
+          </a:xfrm>
+          <a:prstGeom prst="rect">
+            <a:avLst/>
+          </a:prstGeom>
+          <a:noFill/>
+          <a:ln/>
+        </p:spPr>
+        <p:txBody>
+          <a:bodyPr wrap="square" lIns="0" tIns="0" rIns="0" bIns="0" rtlCol="0" anchor="ctr"/>
+          <a:lstStyle/>
+          <a:p>
+            <a:pPr indent="0" marL="0">
+              <a:buNone/>
+            </a:pPr>
+            <a:r>
+              <a:rPr lang="en-US" sz="1100" b="1" dirty="0">
+                <a:solidFill>
+                  <a:srgbClr val="1F4E79"/>
+                </a:solidFill>
+                <a:latin typeface="Georgia" pitchFamily="34" charset="0"/>
+                <a:ea typeface="Georgia" pitchFamily="34" charset="-122"/>
+                <a:cs typeface="Georgia" pitchFamily="34" charset="-120"/>
+              </a:rPr>
+              <a:t>Audit </a:t>
+            </a:r>
+            <a:pPr indent="0" marL="0">
+              <a:buNone/>
+            </a:pPr>
+            <a:r>
+              <a:rPr lang="en-US" sz="900" i="1" dirty="0">
+                <a:solidFill>
+                  <a:srgbClr val="767D86"/>
+                </a:solidFill>
+                <a:latin typeface="Georgia" pitchFamily="34" charset="0"/>
+                <a:ea typeface="Georgia" pitchFamily="34" charset="-122"/>
+                <a:cs typeface="Georgia" pitchFamily="34" charset="-120"/>
+              </a:rPr>
+              <a:t>the </a:t>
+            </a:r>
+            <a:pPr indent="0" marL="0">
+              <a:buNone/>
+            </a:pPr>
+            <a:r>
+              <a:rPr lang="en-US" sz="1100" b="1" dirty="0">
+                <a:solidFill>
+                  <a:srgbClr val="1F4E79"/>
+                </a:solidFill>
+                <a:latin typeface="Georgia" pitchFamily="34" charset="0"/>
+                <a:ea typeface="Georgia" pitchFamily="34" charset="-122"/>
+                <a:cs typeface="Georgia" pitchFamily="34" charset="-120"/>
+              </a:rPr>
+              <a:t>Algorithm</a:t>
+            </a:r>
+            <a:endParaRPr lang="en-US" sz="1100" dirty="0"/>
+          </a:p>
+        </p:txBody>
+      </p:sp>
+      <p:sp>
+        <p:nvSpPr>
+          <p:cNvPr id="3" name="Text 1"/>
+          <p:cNvSpPr/>
+          <p:nvPr/>
+        </p:nvSpPr>
+        <p:spPr>
+          <a:xfrm>
+            <a:off x="457200" y="475488"/>
+            <a:ext cx="7315200" cy="457200"/>
+          </a:xfrm>
+          <a:prstGeom prst="rect">
+            <a:avLst/>
+          </a:prstGeom>
+          <a:noFill/>
+          <a:ln/>
+        </p:spPr>
+        <p:txBody>
+          <a:bodyPr wrap="square" lIns="0" tIns="0" rIns="0" bIns="0" rtlCol="0" anchor="ctr"/>
+          <a:lstStyle/>
+          <a:p>
+            <a:pPr indent="0" marL="0">
+              <a:buNone/>
+            </a:pPr>
+            <a:r>
+              <a:rPr lang="en-US" sz="2800" b="1" dirty="0">
+                <a:solidFill>
+                  <a:srgbClr val="14171C"/>
+                </a:solidFill>
+                <a:latin typeface="Georgia" pitchFamily="34" charset="0"/>
+                <a:ea typeface="Georgia" pitchFamily="34" charset="-122"/>
+                <a:cs typeface="Georgia" pitchFamily="34" charset="-120"/>
+              </a:rPr>
+              <a:t>Questions I expect</a:t>
+            </a:r>
+            <a:endParaRPr lang="en-US" sz="2800" dirty="0"/>
+          </a:p>
+        </p:txBody>
+      </p:sp>
+      <p:sp>
+        <p:nvSpPr>
+          <p:cNvPr id="4" name="Text 2"/>
+          <p:cNvSpPr/>
+          <p:nvPr/>
+        </p:nvSpPr>
+        <p:spPr>
+          <a:xfrm>
+            <a:off x="457200" y="950976"/>
+            <a:ext cx="7315200" cy="256032"/>
+          </a:xfrm>
+          <a:prstGeom prst="rect">
+            <a:avLst/>
+          </a:prstGeom>
+          <a:noFill/>
+          <a:ln/>
+        </p:spPr>
+        <p:txBody>
+          <a:bodyPr wrap="square" lIns="0" tIns="0" rIns="0" bIns="0" rtlCol="0" anchor="ctr"/>
+          <a:lstStyle/>
+          <a:p>
+            <a:pPr indent="0" marL="0">
+              <a:buNone/>
+            </a:pPr>
+            <a:r>
+              <a:rPr lang="en-US" sz="1300" i="1" dirty="0">
+                <a:solidFill>
+                  <a:srgbClr val="767D86"/>
+                </a:solidFill>
+                <a:latin typeface="Cambria" pitchFamily="34" charset="0"/>
+                <a:ea typeface="Cambria" pitchFamily="34" charset="-122"/>
+                <a:cs typeface="Cambria" pitchFamily="34" charset="-120"/>
+              </a:rPr>
+              <a:t>and the answers I am prepared to defend</a:t>
+            </a:r>
+            <a:endParaRPr lang="en-US" sz="1300" dirty="0"/>
+          </a:p>
+        </p:txBody>
+      </p:sp>
+      <p:sp>
+        <p:nvSpPr>
+          <p:cNvPr id="5" name="Shape 3"/>
+          <p:cNvSpPr/>
+          <p:nvPr/>
+        </p:nvSpPr>
+        <p:spPr>
+          <a:xfrm>
+            <a:off x="457200" y="1444752"/>
+            <a:ext cx="5623560" cy="1481328"/>
+          </a:xfrm>
+          <a:prstGeom prst="rect">
+            <a:avLst/>
+          </a:prstGeom>
+          <a:solidFill>
+            <a:srgbClr val="FBFAF7"/>
+          </a:solidFill>
+          <a:ln w="12700">
+            <a:solidFill>
+              <a:srgbClr val="D8D4CB"/>
+            </a:solidFill>
+            <a:prstDash val="solid"/>
+          </a:ln>
+        </p:spPr>
+      </p:sp>
+      <p:sp>
+        <p:nvSpPr>
+          <p:cNvPr id="6" name="Text 4"/>
+          <p:cNvSpPr/>
+          <p:nvPr/>
+        </p:nvSpPr>
+        <p:spPr>
+          <a:xfrm>
+            <a:off x="676656" y="1591056"/>
+            <a:ext cx="274320" cy="219456"/>
+          </a:xfrm>
+          <a:prstGeom prst="rect">
+            <a:avLst/>
+          </a:prstGeom>
+          <a:noFill/>
+          <a:ln/>
+        </p:spPr>
+        <p:txBody>
+          <a:bodyPr wrap="square" lIns="0" tIns="0" rIns="0" bIns="0" rtlCol="0" anchor="ctr"/>
+          <a:lstStyle/>
+          <a:p>
+            <a:pPr indent="0" marL="0">
+              <a:buNone/>
+            </a:pPr>
+            <a:r>
+              <a:rPr lang="en-US" sz="1000" b="1" dirty="0">
+                <a:solidFill>
+                  <a:srgbClr val="8A6410"/>
+                </a:solidFill>
+                <a:latin typeface="Courier New" pitchFamily="34" charset="0"/>
+                <a:ea typeface="Courier New" pitchFamily="34" charset="-122"/>
+                <a:cs typeface="Courier New" pitchFamily="34" charset="-120"/>
+              </a:rPr>
+              <a:t>Q</a:t>
+            </a:r>
+            <a:endParaRPr lang="en-US" sz="1000" dirty="0"/>
+          </a:p>
+        </p:txBody>
+      </p:sp>
+      <p:sp>
+        <p:nvSpPr>
+          <p:cNvPr id="7" name="Text 5"/>
+          <p:cNvSpPr/>
+          <p:nvPr/>
+        </p:nvSpPr>
+        <p:spPr>
+          <a:xfrm>
+            <a:off x="1005840" y="1572768"/>
+            <a:ext cx="4892040" cy="384048"/>
+          </a:xfrm>
+          <a:prstGeom prst="rect">
+            <a:avLst/>
+          </a:prstGeom>
+          <a:noFill/>
+          <a:ln/>
+        </p:spPr>
+        <p:txBody>
+          <a:bodyPr wrap="square" lIns="0" tIns="0" rIns="0" bIns="0" rtlCol="0" anchor="ctr"/>
+          <a:lstStyle/>
+          <a:p>
+            <a:pPr indent="0" marL="0">
+              <a:buNone/>
+            </a:pPr>
+            <a:r>
+              <a:rPr lang="en-US" sz="1250" b="1" dirty="0">
+                <a:solidFill>
+                  <a:srgbClr val="14171C"/>
+                </a:solidFill>
+                <a:latin typeface="Georgia" pitchFamily="34" charset="0"/>
+                <a:ea typeface="Georgia" pitchFamily="34" charset="-122"/>
+                <a:cs typeface="Georgia" pitchFamily="34" charset="-120"/>
+              </a:rPr>
+              <a:t>Isn't a shared difficulty just a shared tool? Physics and biology both need microscopes.</a:t>
+            </a:r>
+            <a:endParaRPr lang="en-US" sz="1250" dirty="0"/>
+          </a:p>
+        </p:txBody>
+      </p:sp>
+      <p:sp>
+        <p:nvSpPr>
+          <p:cNvPr id="8" name="Text 6"/>
+          <p:cNvSpPr/>
+          <p:nvPr/>
+        </p:nvSpPr>
+        <p:spPr>
+          <a:xfrm>
+            <a:off x="676656" y="2048256"/>
+            <a:ext cx="274320" cy="219456"/>
+          </a:xfrm>
+          <a:prstGeom prst="rect">
+            <a:avLst/>
+          </a:prstGeom>
+          <a:noFill/>
+          <a:ln/>
+        </p:spPr>
+        <p:txBody>
+          <a:bodyPr wrap="square" lIns="0" tIns="0" rIns="0" bIns="0" rtlCol="0" anchor="ctr"/>
+          <a:lstStyle/>
+          <a:p>
+            <a:pPr indent="0" marL="0">
+              <a:buNone/>
+            </a:pPr>
+            <a:r>
+              <a:rPr lang="en-US" sz="1000" b="1" dirty="0">
+                <a:solidFill>
+                  <a:srgbClr val="1F4E79"/>
+                </a:solidFill>
+                <a:latin typeface="Courier New" pitchFamily="34" charset="0"/>
+                <a:ea typeface="Courier New" pitchFamily="34" charset="-122"/>
+                <a:cs typeface="Courier New" pitchFamily="34" charset="-120"/>
+              </a:rPr>
+              <a:t>A</a:t>
+            </a:r>
+            <a:endParaRPr lang="en-US" sz="1000" dirty="0"/>
+          </a:p>
+        </p:txBody>
+      </p:sp>
+      <p:sp>
+        <p:nvSpPr>
+          <p:cNvPr id="9" name="Text 7"/>
+          <p:cNvSpPr/>
+          <p:nvPr/>
+        </p:nvSpPr>
+        <p:spPr>
+          <a:xfrm>
+            <a:off x="1005840" y="2011680"/>
+            <a:ext cx="4892040" cy="804672"/>
+          </a:xfrm>
+          <a:prstGeom prst="rect">
+            <a:avLst/>
+          </a:prstGeom>
+          <a:noFill/>
+          <a:ln/>
+        </p:spPr>
+        <p:txBody>
+          <a:bodyPr wrap="square" lIns="0" tIns="0" rIns="0" bIns="0" rtlCol="0" anchor="ctr"/>
+          <a:lstStyle/>
+          <a:p>
+            <a:pPr indent="0" marL="0">
+              <a:buNone/>
+            </a:pPr>
+            <a:r>
+              <a:rPr lang="en-US" sz="1050" dirty="0">
+                <a:solidFill>
+                  <a:srgbClr val="454B54"/>
+                </a:solidFill>
+                <a:latin typeface="Cambria" pitchFamily="34" charset="0"/>
+                <a:ea typeface="Cambria" pitchFamily="34" charset="-122"/>
+                <a:cs typeface="Cambria" pitchFamily="34" charset="-120"/>
+              </a:rPr>
+              <a:t>It is not a tool, it is a definition. What makes a study international is comparison across countries — and comparison requires comparable populations. The constraint sits at the definition of the field, not at its equipment.</a:t>
+            </a:r>
+            <a:endParaRPr lang="en-US" sz="1050" dirty="0"/>
+          </a:p>
+        </p:txBody>
+      </p:sp>
+      <p:sp>
+        <p:nvSpPr>
+          <p:cNvPr id="10" name="Shape 8"/>
+          <p:cNvSpPr/>
+          <p:nvPr/>
+        </p:nvSpPr>
+        <p:spPr>
+          <a:xfrm>
+            <a:off x="6327648" y="1444752"/>
+            <a:ext cx="5623560" cy="1481328"/>
+          </a:xfrm>
+          <a:prstGeom prst="rect">
+            <a:avLst/>
+          </a:prstGeom>
+          <a:solidFill>
+            <a:srgbClr val="FBFAF7"/>
+          </a:solidFill>
+          <a:ln w="12700">
+            <a:solidFill>
+              <a:srgbClr val="D8D4CB"/>
+            </a:solidFill>
+            <a:prstDash val="solid"/>
+          </a:ln>
+        </p:spPr>
+      </p:sp>
+      <p:sp>
+        <p:nvSpPr>
+          <p:cNvPr id="11" name="Text 9"/>
+          <p:cNvSpPr/>
+          <p:nvPr/>
+        </p:nvSpPr>
+        <p:spPr>
+          <a:xfrm>
+            <a:off x="6547104" y="1591056"/>
+            <a:ext cx="274320" cy="219456"/>
+          </a:xfrm>
+          <a:prstGeom prst="rect">
+            <a:avLst/>
+          </a:prstGeom>
+          <a:noFill/>
+          <a:ln/>
+        </p:spPr>
+        <p:txBody>
+          <a:bodyPr wrap="square" lIns="0" tIns="0" rIns="0" bIns="0" rtlCol="0" anchor="ctr"/>
+          <a:lstStyle/>
+          <a:p>
+            <a:pPr indent="0" marL="0">
+              <a:buNone/>
+            </a:pPr>
+            <a:r>
+              <a:rPr lang="en-US" sz="1000" b="1" dirty="0">
+                <a:solidFill>
+                  <a:srgbClr val="8A6410"/>
+                </a:solidFill>
+                <a:latin typeface="Courier New" pitchFamily="34" charset="0"/>
+                <a:ea typeface="Courier New" pitchFamily="34" charset="-122"/>
+                <a:cs typeface="Courier New" pitchFamily="34" charset="-120"/>
+              </a:rPr>
+              <a:t>Q</a:t>
+            </a:r>
+            <a:endParaRPr lang="en-US" sz="1000" dirty="0"/>
+          </a:p>
+        </p:txBody>
+      </p:sp>
+      <p:sp>
+        <p:nvSpPr>
+          <p:cNvPr id="12" name="Text 10"/>
+          <p:cNvSpPr/>
+          <p:nvPr/>
+        </p:nvSpPr>
+        <p:spPr>
+          <a:xfrm>
+            <a:off x="6876288" y="1572768"/>
+            <a:ext cx="4892040" cy="384048"/>
+          </a:xfrm>
+          <a:prstGeom prst="rect">
+            <a:avLst/>
+          </a:prstGeom>
+          <a:noFill/>
+          <a:ln/>
+        </p:spPr>
+        <p:txBody>
+          <a:bodyPr wrap="square" lIns="0" tIns="0" rIns="0" bIns="0" rtlCol="0" anchor="ctr"/>
+          <a:lstStyle/>
+          <a:p>
+            <a:pPr indent="0" marL="0">
+              <a:buNone/>
+            </a:pPr>
+            <a:r>
+              <a:rPr lang="en-US" sz="1250" b="1" dirty="0">
+                <a:solidFill>
+                  <a:srgbClr val="14171C"/>
+                </a:solidFill>
+                <a:latin typeface="Georgia" pitchFamily="34" charset="0"/>
+                <a:ea typeface="Georgia" pitchFamily="34" charset="-122"/>
+                <a:cs typeface="Georgia" pitchFamily="34" charset="-120"/>
+              </a:rPr>
+              <a:t>Doesn't strategy already cover this?</a:t>
+            </a:r>
+            <a:endParaRPr lang="en-US" sz="1250" dirty="0"/>
+          </a:p>
+        </p:txBody>
+      </p:sp>
+      <p:sp>
+        <p:nvSpPr>
+          <p:cNvPr id="13" name="Text 11"/>
+          <p:cNvSpPr/>
+          <p:nvPr/>
+        </p:nvSpPr>
+        <p:spPr>
+          <a:xfrm>
+            <a:off x="6547104" y="2048256"/>
+            <a:ext cx="274320" cy="219456"/>
+          </a:xfrm>
+          <a:prstGeom prst="rect">
+            <a:avLst/>
+          </a:prstGeom>
+          <a:noFill/>
+          <a:ln/>
+        </p:spPr>
+        <p:txBody>
+          <a:bodyPr wrap="square" lIns="0" tIns="0" rIns="0" bIns="0" rtlCol="0" anchor="ctr"/>
+          <a:lstStyle/>
+          <a:p>
+            <a:pPr indent="0" marL="0">
+              <a:buNone/>
+            </a:pPr>
+            <a:r>
+              <a:rPr lang="en-US" sz="1000" b="1" dirty="0">
+                <a:solidFill>
+                  <a:srgbClr val="1F4E79"/>
+                </a:solidFill>
+                <a:latin typeface="Courier New" pitchFamily="34" charset="0"/>
+                <a:ea typeface="Courier New" pitchFamily="34" charset="-122"/>
+                <a:cs typeface="Courier New" pitchFamily="34" charset="-120"/>
+              </a:rPr>
+              <a:t>A</a:t>
+            </a:r>
+            <a:endParaRPr lang="en-US" sz="1000" dirty="0"/>
+          </a:p>
+        </p:txBody>
+      </p:sp>
+      <p:sp>
+        <p:nvSpPr>
+          <p:cNvPr id="14" name="Text 12"/>
+          <p:cNvSpPr/>
+          <p:nvPr/>
+        </p:nvSpPr>
+        <p:spPr>
+          <a:xfrm>
+            <a:off x="6876288" y="2011680"/>
+            <a:ext cx="4892040" cy="804672"/>
+          </a:xfrm>
+          <a:prstGeom prst="rect">
+            <a:avLst/>
+          </a:prstGeom>
+          <a:noFill/>
+          <a:ln/>
+        </p:spPr>
+        <p:txBody>
+          <a:bodyPr wrap="square" lIns="0" tIns="0" rIns="0" bIns="0" rtlCol="0" anchor="ctr"/>
+          <a:lstStyle/>
+          <a:p>
+            <a:pPr indent="0" marL="0">
+              <a:buNone/>
+            </a:pPr>
+            <a:r>
+              <a:rPr lang="en-US" sz="1050" dirty="0">
+                <a:solidFill>
+                  <a:srgbClr val="454B54"/>
+                </a:solidFill>
+                <a:latin typeface="Cambria" pitchFamily="34" charset="0"/>
+                <a:ea typeface="Cambria" pitchFamily="34" charset="-122"/>
+                <a:cs typeface="Cambria" pitchFamily="34" charset="-120"/>
+              </a:rPr>
+              <a:t>Strategy is topical integration — the disciplines meet because their subject matter overlaps. This is structural: it binds every sub-field the moment it goes cross-national, whether or not the topics have anything in common.</a:t>
+            </a:r>
+            <a:endParaRPr lang="en-US" sz="1050" dirty="0"/>
+          </a:p>
+        </p:txBody>
+      </p:sp>
+      <p:sp>
+        <p:nvSpPr>
+          <p:cNvPr id="15" name="Shape 13"/>
+          <p:cNvSpPr/>
+          <p:nvPr/>
+        </p:nvSpPr>
+        <p:spPr>
+          <a:xfrm>
+            <a:off x="457200" y="3072384"/>
+            <a:ext cx="5623560" cy="1481328"/>
+          </a:xfrm>
+          <a:prstGeom prst="rect">
+            <a:avLst/>
+          </a:prstGeom>
+          <a:solidFill>
+            <a:srgbClr val="FBFAF7"/>
+          </a:solidFill>
+          <a:ln w="12700">
+            <a:solidFill>
+              <a:srgbClr val="D8D4CB"/>
+            </a:solidFill>
+            <a:prstDash val="solid"/>
+          </a:ln>
+        </p:spPr>
+      </p:sp>
+      <p:sp>
+        <p:nvSpPr>
+          <p:cNvPr id="16" name="Text 14"/>
+          <p:cNvSpPr/>
+          <p:nvPr/>
+        </p:nvSpPr>
+        <p:spPr>
+          <a:xfrm>
+            <a:off x="676656" y="3218688"/>
+            <a:ext cx="274320" cy="219456"/>
+          </a:xfrm>
+          <a:prstGeom prst="rect">
+            <a:avLst/>
+          </a:prstGeom>
+          <a:noFill/>
+          <a:ln/>
+        </p:spPr>
+        <p:txBody>
+          <a:bodyPr wrap="square" lIns="0" tIns="0" rIns="0" bIns="0" rtlCol="0" anchor="ctr"/>
+          <a:lstStyle/>
+          <a:p>
+            <a:pPr indent="0" marL="0">
+              <a:buNone/>
+            </a:pPr>
+            <a:r>
+              <a:rPr lang="en-US" sz="1000" b="1" dirty="0">
+                <a:solidFill>
+                  <a:srgbClr val="8A6410"/>
+                </a:solidFill>
+                <a:latin typeface="Courier New" pitchFamily="34" charset="0"/>
+                <a:ea typeface="Courier New" pitchFamily="34" charset="-122"/>
+                <a:cs typeface="Courier New" pitchFamily="34" charset="-120"/>
+              </a:rPr>
+              <a:t>Q</a:t>
+            </a:r>
+            <a:endParaRPr lang="en-US" sz="1000" dirty="0"/>
+          </a:p>
+        </p:txBody>
+      </p:sp>
+      <p:sp>
+        <p:nvSpPr>
+          <p:cNvPr id="17" name="Text 15"/>
+          <p:cNvSpPr/>
+          <p:nvPr/>
+        </p:nvSpPr>
+        <p:spPr>
+          <a:xfrm>
+            <a:off x="1005840" y="3200400"/>
+            <a:ext cx="4892040" cy="384048"/>
+          </a:xfrm>
+          <a:prstGeom prst="rect">
+            <a:avLst/>
+          </a:prstGeom>
+          <a:noFill/>
+          <a:ln/>
+        </p:spPr>
+        <p:txBody>
+          <a:bodyPr wrap="square" lIns="0" tIns="0" rIns="0" bIns="0" rtlCol="0" anchor="ctr"/>
+          <a:lstStyle/>
+          <a:p>
+            <a:pPr indent="0" marL="0">
+              <a:buNone/>
+            </a:pPr>
+            <a:r>
+              <a:rPr lang="en-US" sz="1250" b="1" dirty="0">
+                <a:solidFill>
+                  <a:srgbClr val="14171C"/>
+                </a:solidFill>
+                <a:latin typeface="Georgia" pitchFamily="34" charset="0"/>
+                <a:ea typeface="Georgia" pitchFamily="34" charset="-122"/>
+                <a:cs typeface="Georgia" pitchFamily="34" charset="-120"/>
+              </a:rPr>
+              <a:t>Where is the evidence?</a:t>
+            </a:r>
+            <a:endParaRPr lang="en-US" sz="1250" dirty="0"/>
+          </a:p>
+        </p:txBody>
+      </p:sp>
+      <p:sp>
+        <p:nvSpPr>
+          <p:cNvPr id="18" name="Text 16"/>
+          <p:cNvSpPr/>
+          <p:nvPr/>
+        </p:nvSpPr>
+        <p:spPr>
+          <a:xfrm>
+            <a:off x="676656" y="3675888"/>
+            <a:ext cx="274320" cy="219456"/>
+          </a:xfrm>
+          <a:prstGeom prst="rect">
+            <a:avLst/>
+          </a:prstGeom>
+          <a:noFill/>
+          <a:ln/>
+        </p:spPr>
+        <p:txBody>
+          <a:bodyPr wrap="square" lIns="0" tIns="0" rIns="0" bIns="0" rtlCol="0" anchor="ctr"/>
+          <a:lstStyle/>
+          <a:p>
+            <a:pPr indent="0" marL="0">
+              <a:buNone/>
+            </a:pPr>
+            <a:r>
+              <a:rPr lang="en-US" sz="1000" b="1" dirty="0">
+                <a:solidFill>
+                  <a:srgbClr val="1F4E79"/>
+                </a:solidFill>
+                <a:latin typeface="Courier New" pitchFamily="34" charset="0"/>
+                <a:ea typeface="Courier New" pitchFamily="34" charset="-122"/>
+                <a:cs typeface="Courier New" pitchFamily="34" charset="-120"/>
+              </a:rPr>
+              <a:t>A</a:t>
+            </a:r>
+            <a:endParaRPr lang="en-US" sz="1000" dirty="0"/>
+          </a:p>
+        </p:txBody>
+      </p:sp>
+      <p:sp>
+        <p:nvSpPr>
+          <p:cNvPr id="19" name="Text 17"/>
+          <p:cNvSpPr/>
+          <p:nvPr/>
+        </p:nvSpPr>
+        <p:spPr>
+          <a:xfrm>
+            <a:off x="1005840" y="3639312"/>
+            <a:ext cx="4892040" cy="804672"/>
+          </a:xfrm>
+          <a:prstGeom prst="rect">
+            <a:avLst/>
+          </a:prstGeom>
+          <a:noFill/>
+          <a:ln/>
+        </p:spPr>
+        <p:txBody>
+          <a:bodyPr wrap="square" lIns="0" tIns="0" rIns="0" bIns="0" rtlCol="0" anchor="ctr"/>
+          <a:lstStyle/>
+          <a:p>
+            <a:pPr indent="0" marL="0">
+              <a:buNone/>
+            </a:pPr>
+            <a:r>
+              <a:rPr lang="en-US" sz="1050" dirty="0">
+                <a:solidFill>
+                  <a:srgbClr val="454B54"/>
+                </a:solidFill>
+                <a:latin typeface="Cambria" pitchFamily="34" charset="0"/>
+                <a:ea typeface="Cambria" pitchFamily="34" charset="-122"/>
+                <a:cs typeface="Cambria" pitchFamily="34" charset="-120"/>
+              </a:rPr>
+              <a:t>Screening a commercial research panel of 334,976 members against one specialist professional criterion returned roughly twenty eligible people — near six per hundred thousand. Visible on the platform's own configuration screen before any money was committed.</a:t>
+            </a:r>
+            <a:endParaRPr lang="en-US" sz="1050" dirty="0"/>
+          </a:p>
+        </p:txBody>
+      </p:sp>
+      <p:sp>
+        <p:nvSpPr>
+          <p:cNvPr id="20" name="Shape 18"/>
+          <p:cNvSpPr/>
+          <p:nvPr/>
+        </p:nvSpPr>
+        <p:spPr>
+          <a:xfrm>
+            <a:off x="6327648" y="3072384"/>
+            <a:ext cx="5623560" cy="1481328"/>
+          </a:xfrm>
+          <a:prstGeom prst="rect">
+            <a:avLst/>
+          </a:prstGeom>
+          <a:solidFill>
+            <a:srgbClr val="FBFAF7"/>
+          </a:solidFill>
+          <a:ln w="12700">
+            <a:solidFill>
+              <a:srgbClr val="D8D4CB"/>
+            </a:solidFill>
+            <a:prstDash val="solid"/>
+          </a:ln>
+        </p:spPr>
+      </p:sp>
+      <p:sp>
+        <p:nvSpPr>
+          <p:cNvPr id="21" name="Text 19"/>
+          <p:cNvSpPr/>
+          <p:nvPr/>
+        </p:nvSpPr>
+        <p:spPr>
+          <a:xfrm>
+            <a:off x="6547104" y="3218688"/>
+            <a:ext cx="274320" cy="219456"/>
+          </a:xfrm>
+          <a:prstGeom prst="rect">
+            <a:avLst/>
+          </a:prstGeom>
+          <a:noFill/>
+          <a:ln/>
+        </p:spPr>
+        <p:txBody>
+          <a:bodyPr wrap="square" lIns="0" tIns="0" rIns="0" bIns="0" rtlCol="0" anchor="ctr"/>
+          <a:lstStyle/>
+          <a:p>
+            <a:pPr indent="0" marL="0">
+              <a:buNone/>
+            </a:pPr>
+            <a:r>
+              <a:rPr lang="en-US" sz="1000" b="1" dirty="0">
+                <a:solidFill>
+                  <a:srgbClr val="8A6410"/>
+                </a:solidFill>
+                <a:latin typeface="Courier New" pitchFamily="34" charset="0"/>
+                <a:ea typeface="Courier New" pitchFamily="34" charset="-122"/>
+                <a:cs typeface="Courier New" pitchFamily="34" charset="-120"/>
+              </a:rPr>
+              <a:t>Q</a:t>
+            </a:r>
+            <a:endParaRPr lang="en-US" sz="1000" dirty="0"/>
+          </a:p>
+        </p:txBody>
+      </p:sp>
+      <p:sp>
+        <p:nvSpPr>
+          <p:cNvPr id="22" name="Text 20"/>
+          <p:cNvSpPr/>
+          <p:nvPr/>
+        </p:nvSpPr>
+        <p:spPr>
+          <a:xfrm>
+            <a:off x="6876288" y="3200400"/>
+            <a:ext cx="4892040" cy="384048"/>
+          </a:xfrm>
+          <a:prstGeom prst="rect">
+            <a:avLst/>
+          </a:prstGeom>
+          <a:noFill/>
+          <a:ln/>
+        </p:spPr>
+        <p:txBody>
+          <a:bodyPr wrap="square" lIns="0" tIns="0" rIns="0" bIns="0" rtlCol="0" anchor="ctr"/>
+          <a:lstStyle/>
+          <a:p>
+            <a:pPr indent="0" marL="0">
+              <a:buNone/>
+            </a:pPr>
+            <a:r>
+              <a:rPr lang="en-US" sz="1250" b="1" dirty="0">
+                <a:solidFill>
+                  <a:srgbClr val="14171C"/>
+                </a:solidFill>
+                <a:latin typeface="Georgia" pitchFamily="34" charset="0"/>
+                <a:ea typeface="Georgia" pitchFamily="34" charset="-122"/>
+                <a:cs typeface="Georgia" pitchFamily="34" charset="-120"/>
+              </a:rPr>
+              <a:t>Which discipline does this belong to?</a:t>
+            </a:r>
+            <a:endParaRPr lang="en-US" sz="1250" dirty="0"/>
+          </a:p>
+        </p:txBody>
+      </p:sp>
+      <p:sp>
+        <p:nvSpPr>
+          <p:cNvPr id="23" name="Text 21"/>
+          <p:cNvSpPr/>
+          <p:nvPr/>
+        </p:nvSpPr>
+        <p:spPr>
+          <a:xfrm>
+            <a:off x="6547104" y="3675888"/>
+            <a:ext cx="274320" cy="219456"/>
+          </a:xfrm>
+          <a:prstGeom prst="rect">
+            <a:avLst/>
+          </a:prstGeom>
+          <a:noFill/>
+          <a:ln/>
+        </p:spPr>
+        <p:txBody>
+          <a:bodyPr wrap="square" lIns="0" tIns="0" rIns="0" bIns="0" rtlCol="0" anchor="ctr"/>
+          <a:lstStyle/>
+          <a:p>
+            <a:pPr indent="0" marL="0">
+              <a:buNone/>
+            </a:pPr>
+            <a:r>
+              <a:rPr lang="en-US" sz="1000" b="1" dirty="0">
+                <a:solidFill>
+                  <a:srgbClr val="1F4E79"/>
+                </a:solidFill>
+                <a:latin typeface="Courier New" pitchFamily="34" charset="0"/>
+                <a:ea typeface="Courier New" pitchFamily="34" charset="-122"/>
+                <a:cs typeface="Courier New" pitchFamily="34" charset="-120"/>
+              </a:rPr>
+              <a:t>A</a:t>
+            </a:r>
+            <a:endParaRPr lang="en-US" sz="1000" dirty="0"/>
+          </a:p>
+        </p:txBody>
+      </p:sp>
+      <p:sp>
+        <p:nvSpPr>
+          <p:cNvPr id="24" name="Text 22"/>
+          <p:cNvSpPr/>
+          <p:nvPr/>
+        </p:nvSpPr>
+        <p:spPr>
+          <a:xfrm>
+            <a:off x="6876288" y="3639312"/>
+            <a:ext cx="4892040" cy="804672"/>
+          </a:xfrm>
+          <a:prstGeom prst="rect">
+            <a:avLst/>
+          </a:prstGeom>
+          <a:noFill/>
+          <a:ln/>
+        </p:spPr>
+        <p:txBody>
+          <a:bodyPr wrap="square" lIns="0" tIns="0" rIns="0" bIns="0" rtlCol="0" anchor="ctr"/>
+          <a:lstStyle/>
+          <a:p>
+            <a:pPr indent="0" marL="0">
+              <a:buNone/>
+            </a:pPr>
+            <a:r>
+              <a:rPr lang="en-US" sz="1050" dirty="0">
+                <a:solidFill>
+                  <a:srgbClr val="454B54"/>
+                </a:solidFill>
+                <a:latin typeface="Cambria" pitchFamily="34" charset="0"/>
+                <a:ea typeface="Cambria" pitchFamily="34" charset="-122"/>
+                <a:cs typeface="Cambria" pitchFamily="34" charset="-120"/>
+              </a:rPr>
+              <a:t>None of them, and that is the argument. It is a constraint on the act of comparing, so it sits between the circles rather than inside one.</a:t>
+            </a:r>
+            <a:endParaRPr lang="en-US" sz="1050" dirty="0"/>
+          </a:p>
+        </p:txBody>
+      </p:sp>
+      <p:sp>
+        <p:nvSpPr>
+          <p:cNvPr id="25" name="Shape 23"/>
+          <p:cNvSpPr/>
+          <p:nvPr/>
+        </p:nvSpPr>
+        <p:spPr>
+          <a:xfrm>
+            <a:off x="457200" y="4700016"/>
+            <a:ext cx="5623560" cy="1481328"/>
+          </a:xfrm>
+          <a:prstGeom prst="rect">
+            <a:avLst/>
+          </a:prstGeom>
+          <a:solidFill>
+            <a:srgbClr val="FBFAF7"/>
+          </a:solidFill>
+          <a:ln w="12700">
+            <a:solidFill>
+              <a:srgbClr val="D8D4CB"/>
+            </a:solidFill>
+            <a:prstDash val="solid"/>
+          </a:ln>
+        </p:spPr>
+      </p:sp>
+      <p:sp>
+        <p:nvSpPr>
+          <p:cNvPr id="26" name="Text 24"/>
+          <p:cNvSpPr/>
+          <p:nvPr/>
+        </p:nvSpPr>
+        <p:spPr>
+          <a:xfrm>
+            <a:off x="676656" y="4846320"/>
+            <a:ext cx="274320" cy="219456"/>
+          </a:xfrm>
+          <a:prstGeom prst="rect">
+            <a:avLst/>
+          </a:prstGeom>
+          <a:noFill/>
+          <a:ln/>
+        </p:spPr>
+        <p:txBody>
+          <a:bodyPr wrap="square" lIns="0" tIns="0" rIns="0" bIns="0" rtlCol="0" anchor="ctr"/>
+          <a:lstStyle/>
+          <a:p>
+            <a:pPr indent="0" marL="0">
+              <a:buNone/>
+            </a:pPr>
+            <a:r>
+              <a:rPr lang="en-US" sz="1000" b="1" dirty="0">
+                <a:solidFill>
+                  <a:srgbClr val="8A6410"/>
+                </a:solidFill>
+                <a:latin typeface="Courier New" pitchFamily="34" charset="0"/>
+                <a:ea typeface="Courier New" pitchFamily="34" charset="-122"/>
+                <a:cs typeface="Courier New" pitchFamily="34" charset="-120"/>
+              </a:rPr>
+              <a:t>Q</a:t>
+            </a:r>
+            <a:endParaRPr lang="en-US" sz="1000" dirty="0"/>
+          </a:p>
+        </p:txBody>
+      </p:sp>
+      <p:sp>
+        <p:nvSpPr>
+          <p:cNvPr id="27" name="Text 25"/>
+          <p:cNvSpPr/>
+          <p:nvPr/>
+        </p:nvSpPr>
+        <p:spPr>
+          <a:xfrm>
+            <a:off x="1005840" y="4828032"/>
+            <a:ext cx="4892040" cy="384048"/>
+          </a:xfrm>
+          <a:prstGeom prst="rect">
+            <a:avLst/>
+          </a:prstGeom>
+          <a:noFill/>
+          <a:ln/>
+        </p:spPr>
+        <p:txBody>
+          <a:bodyPr wrap="square" lIns="0" tIns="0" rIns="0" bIns="0" rtlCol="0" anchor="ctr"/>
+          <a:lstStyle/>
+          <a:p>
+            <a:pPr indent="0" marL="0">
+              <a:buNone/>
+            </a:pPr>
+            <a:r>
+              <a:rPr lang="en-US" sz="1250" b="1" dirty="0">
+                <a:solidFill>
+                  <a:srgbClr val="14171C"/>
+                </a:solidFill>
+                <a:latin typeface="Georgia" pitchFamily="34" charset="0"/>
+                <a:ea typeface="Georgia" pitchFamily="34" charset="-122"/>
+                <a:cs typeface="Georgia" pitchFamily="34" charset="-120"/>
+              </a:rPr>
+              <a:t>How would you test it?</a:t>
+            </a:r>
+            <a:endParaRPr lang="en-US" sz="1250" dirty="0"/>
+          </a:p>
+        </p:txBody>
+      </p:sp>
+      <p:sp>
+        <p:nvSpPr>
+          <p:cNvPr id="28" name="Text 26"/>
+          <p:cNvSpPr/>
+          <p:nvPr/>
+        </p:nvSpPr>
+        <p:spPr>
+          <a:xfrm>
+            <a:off x="676656" y="5303520"/>
+            <a:ext cx="274320" cy="219456"/>
+          </a:xfrm>
+          <a:prstGeom prst="rect">
+            <a:avLst/>
+          </a:prstGeom>
+          <a:noFill/>
+          <a:ln/>
+        </p:spPr>
+        <p:txBody>
+          <a:bodyPr wrap="square" lIns="0" tIns="0" rIns="0" bIns="0" rtlCol="0" anchor="ctr"/>
+          <a:lstStyle/>
+          <a:p>
+            <a:pPr indent="0" marL="0">
+              <a:buNone/>
+            </a:pPr>
+            <a:r>
+              <a:rPr lang="en-US" sz="1000" b="1" dirty="0">
+                <a:solidFill>
+                  <a:srgbClr val="1F4E79"/>
+                </a:solidFill>
+                <a:latin typeface="Courier New" pitchFamily="34" charset="0"/>
+                <a:ea typeface="Courier New" pitchFamily="34" charset="-122"/>
+                <a:cs typeface="Courier New" pitchFamily="34" charset="-120"/>
+              </a:rPr>
+              <a:t>A</a:t>
+            </a:r>
+            <a:endParaRPr lang="en-US" sz="1000" dirty="0"/>
+          </a:p>
+        </p:txBody>
+      </p:sp>
+      <p:sp>
+        <p:nvSpPr>
+          <p:cNvPr id="29" name="Text 27"/>
+          <p:cNvSpPr/>
+          <p:nvPr/>
+        </p:nvSpPr>
+        <p:spPr>
+          <a:xfrm>
+            <a:off x="1005840" y="5266944"/>
+            <a:ext cx="4892040" cy="804672"/>
+          </a:xfrm>
+          <a:prstGeom prst="rect">
+            <a:avLst/>
+          </a:prstGeom>
+          <a:noFill/>
+          <a:ln/>
+        </p:spPr>
+        <p:txBody>
+          <a:bodyPr wrap="square" lIns="0" tIns="0" rIns="0" bIns="0" rtlCol="0" anchor="ctr"/>
+          <a:lstStyle/>
+          <a:p>
+            <a:pPr indent="0" marL="0">
+              <a:buNone/>
+            </a:pPr>
+            <a:r>
+              <a:rPr lang="en-US" sz="1050" dirty="0">
+                <a:solidFill>
+                  <a:srgbClr val="454B54"/>
+                </a:solidFill>
+                <a:latin typeface="Cambria" pitchFamily="34" charset="0"/>
+                <a:ea typeface="Cambria" pitchFamily="34" charset="-122"/>
+                <a:cs typeface="Cambria" pitchFamily="34" charset="-120"/>
+              </a:rPr>
+              <a:t>Replicate the prevalence check across countries for the same specialist role, and report the distribution. If reachability varies sharply by country, comparative designs in every one of these sub-fields are resting on an assumption nobody states.</a:t>
+            </a:r>
+            <a:endParaRPr lang="en-US" sz="1050" dirty="0"/>
+          </a:p>
+        </p:txBody>
+      </p:sp>
+      <p:sp>
+        <p:nvSpPr>
+          <p:cNvPr id="30" name="Shape 28"/>
+          <p:cNvSpPr/>
+          <p:nvPr/>
+        </p:nvSpPr>
+        <p:spPr>
+          <a:xfrm>
+            <a:off x="6327648" y="4700016"/>
+            <a:ext cx="5623560" cy="1481328"/>
+          </a:xfrm>
+          <a:prstGeom prst="rect">
+            <a:avLst/>
+          </a:prstGeom>
+          <a:solidFill>
+            <a:srgbClr val="FBFAF7"/>
+          </a:solidFill>
+          <a:ln w="12700">
+            <a:solidFill>
+              <a:srgbClr val="D8D4CB"/>
+            </a:solidFill>
+            <a:prstDash val="solid"/>
+          </a:ln>
+        </p:spPr>
+      </p:sp>
+      <p:sp>
+        <p:nvSpPr>
+          <p:cNvPr id="31" name="Text 29"/>
+          <p:cNvSpPr/>
+          <p:nvPr/>
+        </p:nvSpPr>
+        <p:spPr>
+          <a:xfrm>
+            <a:off x="6547104" y="4846320"/>
+            <a:ext cx="274320" cy="219456"/>
+          </a:xfrm>
+          <a:prstGeom prst="rect">
+            <a:avLst/>
+          </a:prstGeom>
+          <a:noFill/>
+          <a:ln/>
+        </p:spPr>
+        <p:txBody>
+          <a:bodyPr wrap="square" lIns="0" tIns="0" rIns="0" bIns="0" rtlCol="0" anchor="ctr"/>
+          <a:lstStyle/>
+          <a:p>
+            <a:pPr indent="0" marL="0">
+              <a:buNone/>
+            </a:pPr>
+            <a:r>
+              <a:rPr lang="en-US" sz="1000" b="1" dirty="0">
+                <a:solidFill>
+                  <a:srgbClr val="8A6410"/>
+                </a:solidFill>
+                <a:latin typeface="Courier New" pitchFamily="34" charset="0"/>
+                <a:ea typeface="Courier New" pitchFamily="34" charset="-122"/>
+                <a:cs typeface="Courier New" pitchFamily="34" charset="-120"/>
+              </a:rPr>
+              <a:t>Q</a:t>
+            </a:r>
+            <a:endParaRPr lang="en-US" sz="1000" dirty="0"/>
+          </a:p>
+        </p:txBody>
+      </p:sp>
+      <p:sp>
+        <p:nvSpPr>
+          <p:cNvPr id="32" name="Text 30"/>
+          <p:cNvSpPr/>
+          <p:nvPr/>
+        </p:nvSpPr>
+        <p:spPr>
+          <a:xfrm>
+            <a:off x="6876288" y="4828032"/>
+            <a:ext cx="4892040" cy="384048"/>
+          </a:xfrm>
+          <a:prstGeom prst="rect">
+            <a:avLst/>
+          </a:prstGeom>
+          <a:noFill/>
+          <a:ln/>
+        </p:spPr>
+        <p:txBody>
+          <a:bodyPr wrap="square" lIns="0" tIns="0" rIns="0" bIns="0" rtlCol="0" anchor="ctr"/>
+          <a:lstStyle/>
+          <a:p>
+            <a:pPr indent="0" marL="0">
+              <a:buNone/>
+            </a:pPr>
+            <a:r>
+              <a:rPr lang="en-US" sz="1250" b="1" dirty="0">
+                <a:solidFill>
+                  <a:srgbClr val="14171C"/>
+                </a:solidFill>
+                <a:latin typeface="Georgia" pitchFamily="34" charset="0"/>
+                <a:ea typeface="Georgia" pitchFamily="34" charset="-122"/>
+                <a:cs typeface="Georgia" pitchFamily="34" charset="-120"/>
+              </a:rPr>
+              <a:t>Are you claiming the existing maps are wrong?</a:t>
+            </a:r>
+            <a:endParaRPr lang="en-US" sz="1250" dirty="0"/>
+          </a:p>
+        </p:txBody>
+      </p:sp>
+      <p:sp>
+        <p:nvSpPr>
+          <p:cNvPr id="33" name="Text 31"/>
+          <p:cNvSpPr/>
+          <p:nvPr/>
+        </p:nvSpPr>
+        <p:spPr>
+          <a:xfrm>
+            <a:off x="6547104" y="5303520"/>
+            <a:ext cx="274320" cy="219456"/>
+          </a:xfrm>
+          <a:prstGeom prst="rect">
+            <a:avLst/>
+          </a:prstGeom>
+          <a:noFill/>
+          <a:ln/>
+        </p:spPr>
+        <p:txBody>
+          <a:bodyPr wrap="square" lIns="0" tIns="0" rIns="0" bIns="0" rtlCol="0" anchor="ctr"/>
+          <a:lstStyle/>
+          <a:p>
+            <a:pPr indent="0" marL="0">
+              <a:buNone/>
+            </a:pPr>
+            <a:r>
+              <a:rPr lang="en-US" sz="1000" b="1" dirty="0">
+                <a:solidFill>
+                  <a:srgbClr val="1F4E79"/>
+                </a:solidFill>
+                <a:latin typeface="Courier New" pitchFamily="34" charset="0"/>
+                <a:ea typeface="Courier New" pitchFamily="34" charset="-122"/>
+                <a:cs typeface="Courier New" pitchFamily="34" charset="-120"/>
+              </a:rPr>
+              <a:t>A</a:t>
+            </a:r>
+            <a:endParaRPr lang="en-US" sz="1000" dirty="0"/>
+          </a:p>
+        </p:txBody>
+      </p:sp>
+      <p:sp>
+        <p:nvSpPr>
+          <p:cNvPr id="34" name="Text 32"/>
+          <p:cNvSpPr/>
+          <p:nvPr/>
+        </p:nvSpPr>
+        <p:spPr>
+          <a:xfrm>
+            <a:off x="6876288" y="5266944"/>
+            <a:ext cx="4892040" cy="804672"/>
+          </a:xfrm>
+          <a:prstGeom prst="rect">
+            <a:avLst/>
+          </a:prstGeom>
+          <a:noFill/>
+          <a:ln/>
+        </p:spPr>
+        <p:txBody>
+          <a:bodyPr wrap="square" lIns="0" tIns="0" rIns="0" bIns="0" rtlCol="0" anchor="ctr"/>
+          <a:lstStyle/>
+          <a:p>
+            <a:pPr indent="0" marL="0">
+              <a:buNone/>
+            </a:pPr>
+            <a:r>
+              <a:rPr lang="en-US" sz="1050" dirty="0">
+                <a:solidFill>
+                  <a:srgbClr val="454B54"/>
+                </a:solidFill>
+                <a:latin typeface="Cambria" pitchFamily="34" charset="0"/>
+                <a:ea typeface="Cambria" pitchFamily="34" charset="-122"/>
+                <a:cs typeface="Cambria" pitchFamily="34" charset="-120"/>
+              </a:rPr>
+              <a:t>No. They are right about topical integration and honest that neither map resolves every classification difficulty. I am proposing a second axis they do not draw — not replacing theirs.</a:t>
+            </a:r>
+            <a:endParaRPr lang="en-US" sz="1050" dirty="0"/>
+          </a:p>
+        </p:txBody>
+      </p:sp>
+      <p:sp>
+        <p:nvSpPr>
+          <p:cNvPr id="35" name="Text 33"/>
+          <p:cNvSpPr/>
+          <p:nvPr/>
+        </p:nvSpPr>
+        <p:spPr>
+          <a:xfrm>
+            <a:off x="457200" y="6419088"/>
+            <a:ext cx="7315200" cy="201168"/>
+          </a:xfrm>
+          <a:prstGeom prst="rect">
+            <a:avLst/>
+          </a:prstGeom>
+          <a:noFill/>
+          <a:ln/>
+        </p:spPr>
+        <p:txBody>
+          <a:bodyPr wrap="square" lIns="0" tIns="0" rIns="0" bIns="0" rtlCol="0" anchor="ctr"/>
+          <a:lstStyle/>
+          <a:p>
+            <a:pPr indent="0" marL="0">
+              <a:buNone/>
+            </a:pPr>
+            <a:r>
+              <a:rPr lang="en-US" sz="850" spc="50" kern="0" dirty="0">
+                <a:solidFill>
+                  <a:srgbClr val="767D86"/>
+                </a:solidFill>
+                <a:latin typeface="Courier New" pitchFamily="34" charset="0"/>
+                <a:ea typeface="Courier New" pitchFamily="34" charset="-122"/>
+                <a:cs typeface="Courier New" pitchFamily="34" charset="-120"/>
+              </a:rPr>
+              <a:t>Yasir A. Malik   ·   github.com/AuditingAI/Profile   ·   2 / 2</a:t>
             </a:r>
             <a:endParaRPr lang="en-US" sz="850" dirty="0"/>
           </a:p>

--- a/dba/coursework/GEB7365_International_Business/Malik_GEB7365_IB_Field_Map.pptx
+++ b/dba/coursework/GEB7365_International_Business/Malik_GEB7365_IB_Field_Map.pptx
@@ -7,9 +7,10 @@
   <p:sldIdLst>
     <p:sldId id="256" r:id="rId2"/>
     <p:sldId id="257" r:id="rId3"/>
+    <p:sldId id="258" r:id="rId4"/>
   </p:sldIdLst>
   <p:notesMasterIdLst>
-    <p:notesMasterId r:id="rId4"/>
+    <p:notesMasterId r:id="rId5"/>
   </p:notesMasterIdLst>
   <p:sldSz cx="12192000" cy="6858000"/>
   <p:notesSz cx="6858000" cy="12192000"/>
@@ -591,7 +592,7 @@
           <a:p>
             <a:r>
               <a:rPr lang="en-US" dirty="0"/>
-              <a:t>The microscope objection is the one that matters. Answer: it is not a shared tool, it is a shared definition — comparison across countries requires comparable populations, so the constraint sits at the definition of the field. Do not overclaim past that: this is a second axis, not a replacement.</a:t>
+              <a:t>Thirteen of fifteen possible pairings exist. The two that do not — General Management/Supply Chain and CSR/Supply Chain — are the entire structure. Drawn as a network because six circles cannot hold thirteen adjacencies without creating regions nobody claimed.</a:t>
             </a:r>
             <a:endParaRPr lang="en-US" dirty="0"/>
           </a:p>
@@ -615,6 +616,94 @@
             <a:fld id="{F7021451-1387-4CA6-816F-3879F97B5CBC}" type="slidenum">
               <a:rPr lang="en-US"/>
               <a:t>2</a:t>
+            </a:fld>
+            <a:endParaRPr lang="en-US"/>
+          </a:p>
+        </p:txBody>
+      </p:sp>
+    </p:spTree>
+    <p:extLst>
+      <p:ext uri="{BB962C8B-B14F-4D97-AF65-F5344CB8AC3E}">
+        <p14:creationId xmlns:p14="http://schemas.microsoft.com/office/powerpoint/2010/main" val="1024086991"/>
+      </p:ext>
+    </p:extLst>
+  </p:cSld>
+  <p:clrMapOvr>
+    <a:masterClrMapping/>
+  </p:clrMapOvr>
+</p:notes>
+</file>
+
+<file path=ppt/notesSlides/notesSlide3.xml><?xml version="1.0" encoding="utf-8"?>
+<p:notes xmlns:a="http://schemas.openxmlformats.org/drawingml/2006/main" xmlns:r="http://schemas.openxmlformats.org/officeDocument/2006/relationships" xmlns:p="http://schemas.openxmlformats.org/presentationml/2006/main">
+  <p:cSld>
+    <p:spTree>
+      <p:nvGrpSpPr>
+        <p:cNvPr id="1" name=""/>
+        <p:cNvGrpSpPr/>
+        <p:nvPr/>
+      </p:nvGrpSpPr>
+      <p:grpSpPr>
+        <a:xfrm>
+          <a:off x="0" y="0"/>
+          <a:ext cx="0" cy="0"/>
+          <a:chOff x="0" y="0"/>
+          <a:chExt cx="0" cy="0"/>
+        </a:xfrm>
+      </p:grpSpPr>
+      <p:sp>
+        <p:nvSpPr>
+          <p:cNvPr id="2" name="Slide Image Placeholder 1"/>
+          <p:cNvSpPr>
+            <a:spLocks noGrp="1" noRot="1" noChangeAspect="1"/>
+          </p:cNvSpPr>
+          <p:nvPr>
+            <p:ph type="sldImg"/>
+          </p:nvPr>
+        </p:nvSpPr>
+        <p:spPr/>
+      </p:sp>
+      <p:sp>
+        <p:nvSpPr>
+          <p:cNvPr id="3" name="Notes Placeholder 2"/>
+          <p:cNvSpPr>
+            <a:spLocks noGrp="1"/>
+          </p:cNvSpPr>
+          <p:nvPr>
+            <p:ph type="body" idx="1"/>
+          </p:nvPr>
+        </p:nvSpPr>
+        <p:spPr/>
+        <p:txBody>
+          <a:bodyPr/>
+          <a:lstStyle/>
+          <a:p>
+            <a:r>
+              <a:rPr lang="en-US" dirty="0"/>
+              <a:t>The microscope objection is the one that matters. Answer: it is not a shared tool, it is a shared definition — comparison across countries requires comparable populations, so the constraint sits at the definition of the field. Do not overclaim past that: this is a second axis, not a replacement.</a:t>
+            </a:r>
+            <a:endParaRPr lang="en-US" dirty="0"/>
+          </a:p>
+        </p:txBody>
+      </p:sp>
+      <p:sp>
+        <p:nvSpPr>
+          <p:cNvPr id="4" name="Slide Number Placeholder 3"/>
+          <p:cNvSpPr>
+            <a:spLocks noGrp="1"/>
+          </p:cNvSpPr>
+          <p:nvPr>
+            <p:ph type="sldNum" sz="quarter" idx="10"/>
+          </p:nvPr>
+        </p:nvSpPr>
+        <p:spPr/>
+        <p:txBody>
+          <a:bodyPr/>
+          <a:lstStyle/>
+          <a:p>
+            <a:fld id="{F7021451-1387-4CA6-816F-3879F97B5CBC}" type="slidenum">
+              <a:rPr lang="en-US"/>
+              <a:t>3</a:t>
             </a:fld>
             <a:endParaRPr lang="en-US"/>
           </a:p>
@@ -3048,7 +3137,7 @@
                 <a:ea typeface="Courier New" pitchFamily="34" charset="-122"/>
                 <a:cs typeface="Courier New" pitchFamily="34" charset="-120"/>
               </a:rPr>
-              <a:t>Yasir A. Malik   ·   github.com/AuditingAI/Profile   ·   1 / 2</a:t>
+              <a:t>Yasir A. Malik   ·   github.com/AuditingAI/Profile   ·   1 / 3</a:t>
             </a:r>
             <a:endParaRPr lang="en-US" sz="850" dirty="0"/>
           </a:p>
@@ -3065,6 +3154,3067 @@
 <file path=ppt/slides/slide2.xml><?xml version="1.0" encoding="utf-8"?>
 <p:sld xmlns:a="http://schemas.openxmlformats.org/drawingml/2006/main" xmlns:r="http://schemas.openxmlformats.org/officeDocument/2006/relationships" xmlns:p="http://schemas.openxmlformats.org/presentationml/2006/main">
   <p:cSld name="Slide 2">
+    <p:bg>
+      <p:bgPr>
+        <a:solidFill>
+          <a:srgbClr val="FBFAF7"/>
+        </a:solidFill>
+      </p:bgPr>
+    </p:bg>
+    <p:spTree>
+      <p:nvGrpSpPr>
+        <p:cNvPr id="1" name=""/>
+        <p:cNvGrpSpPr/>
+        <p:nvPr/>
+      </p:nvGrpSpPr>
+      <p:grpSpPr>
+        <a:xfrm>
+          <a:off x="0" y="0"/>
+          <a:ext cx="0" cy="0"/>
+          <a:chOff x="0" y="0"/>
+          <a:chExt cx="0" cy="0"/>
+        </a:xfrm>
+      </p:grpSpPr>
+      <p:sp>
+        <p:nvSpPr>
+          <p:cNvPr id="2" name="Text 0"/>
+          <p:cNvSpPr/>
+          <p:nvPr/>
+        </p:nvSpPr>
+        <p:spPr>
+          <a:xfrm>
+            <a:off x="457200" y="128016"/>
+            <a:ext cx="2743200" cy="237744"/>
+          </a:xfrm>
+          <a:prstGeom prst="rect">
+            <a:avLst/>
+          </a:prstGeom>
+          <a:noFill/>
+          <a:ln/>
+        </p:spPr>
+        <p:txBody>
+          <a:bodyPr wrap="square" lIns="0" tIns="0" rIns="0" bIns="0" rtlCol="0" anchor="ctr"/>
+          <a:lstStyle/>
+          <a:p>
+            <a:pPr indent="0" marL="0">
+              <a:buNone/>
+            </a:pPr>
+            <a:r>
+              <a:rPr lang="en-US" sz="1100" b="1" dirty="0">
+                <a:solidFill>
+                  <a:srgbClr val="1F4E79"/>
+                </a:solidFill>
+                <a:latin typeface="Georgia" pitchFamily="34" charset="0"/>
+                <a:ea typeface="Georgia" pitchFamily="34" charset="-122"/>
+                <a:cs typeface="Georgia" pitchFamily="34" charset="-120"/>
+              </a:rPr>
+              <a:t>Audit </a:t>
+            </a:r>
+            <a:pPr indent="0" marL="0">
+              <a:buNone/>
+            </a:pPr>
+            <a:r>
+              <a:rPr lang="en-US" sz="900" i="1" dirty="0">
+                <a:solidFill>
+                  <a:srgbClr val="767D86"/>
+                </a:solidFill>
+                <a:latin typeface="Georgia" pitchFamily="34" charset="0"/>
+                <a:ea typeface="Georgia" pitchFamily="34" charset="-122"/>
+                <a:cs typeface="Georgia" pitchFamily="34" charset="-120"/>
+              </a:rPr>
+              <a:t>the </a:t>
+            </a:r>
+            <a:pPr indent="0" marL="0">
+              <a:buNone/>
+            </a:pPr>
+            <a:r>
+              <a:rPr lang="en-US" sz="1100" b="1" dirty="0">
+                <a:solidFill>
+                  <a:srgbClr val="1F4E79"/>
+                </a:solidFill>
+                <a:latin typeface="Georgia" pitchFamily="34" charset="0"/>
+                <a:ea typeface="Georgia" pitchFamily="34" charset="-122"/>
+                <a:cs typeface="Georgia" pitchFamily="34" charset="-120"/>
+              </a:rPr>
+              <a:t>Algorithm</a:t>
+            </a:r>
+            <a:endParaRPr lang="en-US" sz="1100" dirty="0"/>
+          </a:p>
+        </p:txBody>
+      </p:sp>
+      <p:sp>
+        <p:nvSpPr>
+          <p:cNvPr id="3" name="Text 1"/>
+          <p:cNvSpPr/>
+          <p:nvPr/>
+        </p:nvSpPr>
+        <p:spPr>
+          <a:xfrm>
+            <a:off x="457200" y="457200"/>
+            <a:ext cx="8595360" cy="457200"/>
+          </a:xfrm>
+          <a:prstGeom prst="rect">
+            <a:avLst/>
+          </a:prstGeom>
+          <a:noFill/>
+          <a:ln/>
+        </p:spPr>
+        <p:txBody>
+          <a:bodyPr wrap="square" lIns="0" tIns="0" rIns="0" bIns="0" rtlCol="0" anchor="ctr"/>
+          <a:lstStyle/>
+          <a:p>
+            <a:pPr indent="0" marL="0">
+              <a:buNone/>
+            </a:pPr>
+            <a:r>
+              <a:rPr lang="en-US" sz="2500" b="1" dirty="0">
+                <a:solidFill>
+                  <a:srgbClr val="14171C"/>
+                </a:solidFill>
+                <a:latin typeface="Georgia" pitchFamily="34" charset="0"/>
+                <a:ea typeface="Georgia" pitchFamily="34" charset="-122"/>
+                <a:cs typeface="Georgia" pitchFamily="34" charset="-120"/>
+              </a:rPr>
+              <a:t>Six disciplines, thirteen shared boundaries — and two that do not exist</a:t>
+            </a:r>
+            <a:endParaRPr lang="en-US" sz="2500" dirty="0"/>
+          </a:p>
+        </p:txBody>
+      </p:sp>
+      <p:sp>
+        <p:nvSpPr>
+          <p:cNvPr id="4" name="Text 2"/>
+          <p:cNvSpPr/>
+          <p:nvPr/>
+        </p:nvSpPr>
+        <p:spPr>
+          <a:xfrm>
+            <a:off x="457200" y="932688"/>
+            <a:ext cx="8778240" cy="420624"/>
+          </a:xfrm>
+          <a:prstGeom prst="rect">
+            <a:avLst/>
+          </a:prstGeom>
+          <a:noFill/>
+          <a:ln/>
+        </p:spPr>
+        <p:txBody>
+          <a:bodyPr wrap="square" lIns="0" tIns="0" rIns="0" bIns="0" rtlCol="0" anchor="ctr"/>
+          <a:lstStyle/>
+          <a:p>
+            <a:pPr indent="0" marL="0">
+              <a:buNone/>
+            </a:pPr>
+            <a:r>
+              <a:rPr lang="en-US" sz="1200" i="1" dirty="0">
+                <a:solidFill>
+                  <a:srgbClr val="767D86"/>
+                </a:solidFill>
+                <a:latin typeface="Cambria" pitchFamily="34" charset="0"/>
+                <a:ea typeface="Cambria" pitchFamily="34" charset="-122"/>
+                <a:cs typeface="Cambria" pitchFamily="34" charset="-120"/>
+              </a:rPr>
+              <a:t>The relationships are consistent and the gaps are the finding. Drawn as a network rather than as overlapping circles, because six circles cannot hold these thirteen adjacencies without inventing regions that are not claimed.</a:t>
+            </a:r>
+            <a:endParaRPr lang="en-US" sz="1200" dirty="0"/>
+          </a:p>
+        </p:txBody>
+      </p:sp>
+      <p:sp>
+        <p:nvSpPr>
+          <p:cNvPr id="5" name="Shape 3"/>
+          <p:cNvSpPr/>
+          <p:nvPr/>
+        </p:nvSpPr>
+        <p:spPr>
+          <a:xfrm>
+            <a:off x="2011680" y="2450592"/>
+            <a:ext cx="2194560" cy="0"/>
+          </a:xfrm>
+          <a:prstGeom prst="line">
+            <a:avLst/>
+          </a:prstGeom>
+          <a:noFill/>
+          <a:ln w="13970">
+            <a:solidFill>
+              <a:srgbClr val="1F4E79">
+                <a:alpha val="55000"/>
+              </a:srgbClr>
+            </a:solidFill>
+            <a:prstDash val="solid"/>
+          </a:ln>
+        </p:spPr>
+      </p:sp>
+      <p:sp>
+        <p:nvSpPr>
+          <p:cNvPr id="6" name="Shape 4"/>
+          <p:cNvSpPr/>
+          <p:nvPr/>
+        </p:nvSpPr>
+        <p:spPr>
+          <a:xfrm>
+            <a:off x="2011680" y="2450592"/>
+            <a:ext cx="1097280" cy="1901952"/>
+          </a:xfrm>
+          <a:prstGeom prst="line">
+            <a:avLst/>
+          </a:prstGeom>
+          <a:noFill/>
+          <a:ln w="13970">
+            <a:solidFill>
+              <a:srgbClr val="1F4E79">
+                <a:alpha val="55000"/>
+              </a:srgbClr>
+            </a:solidFill>
+            <a:prstDash val="solid"/>
+          </a:ln>
+        </p:spPr>
+      </p:sp>
+      <p:sp>
+        <p:nvSpPr>
+          <p:cNvPr id="7" name="Shape 5"/>
+          <p:cNvSpPr/>
+          <p:nvPr/>
+        </p:nvSpPr>
+        <p:spPr>
+          <a:xfrm>
+            <a:off x="2011680" y="2450592"/>
+            <a:ext cx="0" cy="1261872"/>
+          </a:xfrm>
+          <a:prstGeom prst="line">
+            <a:avLst/>
+          </a:prstGeom>
+          <a:noFill/>
+          <a:ln w="13970">
+            <a:solidFill>
+              <a:srgbClr val="1F4E79">
+                <a:alpha val="55000"/>
+              </a:srgbClr>
+            </a:solidFill>
+            <a:prstDash val="solid"/>
+          </a:ln>
+        </p:spPr>
+      </p:sp>
+      <p:sp>
+        <p:nvSpPr>
+          <p:cNvPr id="8" name="Shape 6"/>
+          <p:cNvSpPr/>
+          <p:nvPr/>
+        </p:nvSpPr>
+        <p:spPr>
+          <a:xfrm>
+            <a:off x="2011680" y="2450592"/>
+            <a:ext cx="2194560" cy="1261872"/>
+          </a:xfrm>
+          <a:prstGeom prst="line">
+            <a:avLst/>
+          </a:prstGeom>
+          <a:noFill/>
+          <a:ln w="13970">
+            <a:solidFill>
+              <a:srgbClr val="1F4E79">
+                <a:alpha val="55000"/>
+              </a:srgbClr>
+            </a:solidFill>
+            <a:prstDash val="solid"/>
+          </a:ln>
+        </p:spPr>
+      </p:sp>
+      <p:sp>
+        <p:nvSpPr>
+          <p:cNvPr id="9" name="Shape 7"/>
+          <p:cNvSpPr/>
+          <p:nvPr/>
+        </p:nvSpPr>
+        <p:spPr>
+          <a:xfrm flipH="1">
+            <a:off x="2011680" y="1810512"/>
+            <a:ext cx="1097280" cy="640080"/>
+          </a:xfrm>
+          <a:prstGeom prst="line">
+            <a:avLst/>
+          </a:prstGeom>
+          <a:noFill/>
+          <a:ln w="13970">
+            <a:solidFill>
+              <a:srgbClr val="1F4E79">
+                <a:alpha val="55000"/>
+              </a:srgbClr>
+            </a:solidFill>
+            <a:prstDash val="solid"/>
+          </a:ln>
+        </p:spPr>
+      </p:sp>
+      <p:sp>
+        <p:nvSpPr>
+          <p:cNvPr id="10" name="Shape 8"/>
+          <p:cNvSpPr/>
+          <p:nvPr/>
+        </p:nvSpPr>
+        <p:spPr>
+          <a:xfrm flipH="1">
+            <a:off x="3108960" y="2450592"/>
+            <a:ext cx="1097280" cy="1901952"/>
+          </a:xfrm>
+          <a:prstGeom prst="line">
+            <a:avLst/>
+          </a:prstGeom>
+          <a:noFill/>
+          <a:ln w="13970">
+            <a:solidFill>
+              <a:srgbClr val="1F4E79">
+                <a:alpha val="55000"/>
+              </a:srgbClr>
+            </a:solidFill>
+            <a:prstDash val="solid"/>
+          </a:ln>
+        </p:spPr>
+      </p:sp>
+      <p:sp>
+        <p:nvSpPr>
+          <p:cNvPr id="11" name="Shape 9"/>
+          <p:cNvSpPr/>
+          <p:nvPr/>
+        </p:nvSpPr>
+        <p:spPr>
+          <a:xfrm flipH="1">
+            <a:off x="2011680" y="2450592"/>
+            <a:ext cx="2194560" cy="1261872"/>
+          </a:xfrm>
+          <a:prstGeom prst="line">
+            <a:avLst/>
+          </a:prstGeom>
+          <a:noFill/>
+          <a:ln w="13970">
+            <a:solidFill>
+              <a:srgbClr val="1F4E79">
+                <a:alpha val="55000"/>
+              </a:srgbClr>
+            </a:solidFill>
+            <a:prstDash val="solid"/>
+          </a:ln>
+        </p:spPr>
+      </p:sp>
+      <p:sp>
+        <p:nvSpPr>
+          <p:cNvPr id="12" name="Shape 10"/>
+          <p:cNvSpPr/>
+          <p:nvPr/>
+        </p:nvSpPr>
+        <p:spPr>
+          <a:xfrm>
+            <a:off x="4206240" y="2450592"/>
+            <a:ext cx="0" cy="1261872"/>
+          </a:xfrm>
+          <a:prstGeom prst="line">
+            <a:avLst/>
+          </a:prstGeom>
+          <a:noFill/>
+          <a:ln w="13970">
+            <a:solidFill>
+              <a:srgbClr val="1F4E79">
+                <a:alpha val="55000"/>
+              </a:srgbClr>
+            </a:solidFill>
+            <a:prstDash val="solid"/>
+          </a:ln>
+        </p:spPr>
+      </p:sp>
+      <p:sp>
+        <p:nvSpPr>
+          <p:cNvPr id="13" name="Shape 11"/>
+          <p:cNvSpPr/>
+          <p:nvPr/>
+        </p:nvSpPr>
+        <p:spPr>
+          <a:xfrm>
+            <a:off x="3108960" y="1810512"/>
+            <a:ext cx="1097280" cy="640080"/>
+          </a:xfrm>
+          <a:prstGeom prst="line">
+            <a:avLst/>
+          </a:prstGeom>
+          <a:noFill/>
+          <a:ln w="13970">
+            <a:solidFill>
+              <a:srgbClr val="1F4E79">
+                <a:alpha val="55000"/>
+              </a:srgbClr>
+            </a:solidFill>
+            <a:prstDash val="solid"/>
+          </a:ln>
+        </p:spPr>
+      </p:sp>
+      <p:sp>
+        <p:nvSpPr>
+          <p:cNvPr id="14" name="Shape 12"/>
+          <p:cNvSpPr/>
+          <p:nvPr/>
+        </p:nvSpPr>
+        <p:spPr>
+          <a:xfrm>
+            <a:off x="2011680" y="3712464"/>
+            <a:ext cx="1097280" cy="640080"/>
+          </a:xfrm>
+          <a:prstGeom prst="line">
+            <a:avLst/>
+          </a:prstGeom>
+          <a:noFill/>
+          <a:ln w="13970">
+            <a:solidFill>
+              <a:srgbClr val="1F4E79">
+                <a:alpha val="55000"/>
+              </a:srgbClr>
+            </a:solidFill>
+            <a:prstDash val="solid"/>
+          </a:ln>
+        </p:spPr>
+      </p:sp>
+      <p:sp>
+        <p:nvSpPr>
+          <p:cNvPr id="15" name="Shape 13"/>
+          <p:cNvSpPr/>
+          <p:nvPr/>
+        </p:nvSpPr>
+        <p:spPr>
+          <a:xfrm flipH="1">
+            <a:off x="3108960" y="3712464"/>
+            <a:ext cx="1097280" cy="640080"/>
+          </a:xfrm>
+          <a:prstGeom prst="line">
+            <a:avLst/>
+          </a:prstGeom>
+          <a:noFill/>
+          <a:ln w="13970">
+            <a:solidFill>
+              <a:srgbClr val="1F4E79">
+                <a:alpha val="55000"/>
+              </a:srgbClr>
+            </a:solidFill>
+            <a:prstDash val="solid"/>
+          </a:ln>
+        </p:spPr>
+      </p:sp>
+      <p:sp>
+        <p:nvSpPr>
+          <p:cNvPr id="16" name="Shape 14"/>
+          <p:cNvSpPr/>
+          <p:nvPr/>
+        </p:nvSpPr>
+        <p:spPr>
+          <a:xfrm>
+            <a:off x="3108960" y="1810512"/>
+            <a:ext cx="0" cy="2542032"/>
+          </a:xfrm>
+          <a:prstGeom prst="line">
+            <a:avLst/>
+          </a:prstGeom>
+          <a:noFill/>
+          <a:ln w="13970">
+            <a:solidFill>
+              <a:srgbClr val="1F4E79">
+                <a:alpha val="55000"/>
+              </a:srgbClr>
+            </a:solidFill>
+            <a:prstDash val="solid"/>
+          </a:ln>
+        </p:spPr>
+      </p:sp>
+      <p:sp>
+        <p:nvSpPr>
+          <p:cNvPr id="17" name="Shape 15"/>
+          <p:cNvSpPr/>
+          <p:nvPr/>
+        </p:nvSpPr>
+        <p:spPr>
+          <a:xfrm>
+            <a:off x="2011680" y="3712464"/>
+            <a:ext cx="2194560" cy="0"/>
+          </a:xfrm>
+          <a:prstGeom prst="line">
+            <a:avLst/>
+          </a:prstGeom>
+          <a:noFill/>
+          <a:ln w="13970">
+            <a:solidFill>
+              <a:srgbClr val="1F4E79">
+                <a:alpha val="55000"/>
+              </a:srgbClr>
+            </a:solidFill>
+            <a:prstDash val="solid"/>
+          </a:ln>
+        </p:spPr>
+      </p:sp>
+      <p:sp>
+        <p:nvSpPr>
+          <p:cNvPr id="18" name="Shape 16"/>
+          <p:cNvSpPr/>
+          <p:nvPr/>
+        </p:nvSpPr>
+        <p:spPr>
+          <a:xfrm flipH="1">
+            <a:off x="2011680" y="1810512"/>
+            <a:ext cx="1097280" cy="1901952"/>
+          </a:xfrm>
+          <a:prstGeom prst="line">
+            <a:avLst/>
+          </a:prstGeom>
+          <a:noFill/>
+          <a:ln w="20320">
+            <a:solidFill>
+              <a:srgbClr val="8C3A1B"/>
+            </a:solidFill>
+            <a:prstDash val="dash"/>
+          </a:ln>
+        </p:spPr>
+      </p:sp>
+      <p:sp>
+        <p:nvSpPr>
+          <p:cNvPr id="19" name="Shape 17"/>
+          <p:cNvSpPr/>
+          <p:nvPr/>
+        </p:nvSpPr>
+        <p:spPr>
+          <a:xfrm>
+            <a:off x="3108960" y="1810512"/>
+            <a:ext cx="1097280" cy="1901952"/>
+          </a:xfrm>
+          <a:prstGeom prst="line">
+            <a:avLst/>
+          </a:prstGeom>
+          <a:noFill/>
+          <a:ln w="20320">
+            <a:solidFill>
+              <a:srgbClr val="8C3A1B"/>
+            </a:solidFill>
+            <a:prstDash val="dash"/>
+          </a:ln>
+        </p:spPr>
+      </p:sp>
+      <p:sp>
+        <p:nvSpPr>
+          <p:cNvPr id="20" name="Shape 18"/>
+          <p:cNvSpPr/>
+          <p:nvPr/>
+        </p:nvSpPr>
+        <p:spPr>
+          <a:xfrm>
+            <a:off x="2706624" y="1408176"/>
+            <a:ext cx="804672" cy="804672"/>
+          </a:xfrm>
+          <a:prstGeom prst="ellipse">
+            <a:avLst/>
+          </a:prstGeom>
+          <a:solidFill>
+            <a:srgbClr val="FFFFFF"/>
+          </a:solidFill>
+          <a:ln w="20320">
+            <a:solidFill>
+              <a:srgbClr val="8C3A1B"/>
+            </a:solidFill>
+            <a:prstDash val="solid"/>
+          </a:ln>
+        </p:spPr>
+      </p:sp>
+      <p:sp>
+        <p:nvSpPr>
+          <p:cNvPr id="21" name="Text 19"/>
+          <p:cNvSpPr/>
+          <p:nvPr/>
+        </p:nvSpPr>
+        <p:spPr>
+          <a:xfrm>
+            <a:off x="2706624" y="1673352"/>
+            <a:ext cx="804672" cy="274320"/>
+          </a:xfrm>
+          <a:prstGeom prst="rect">
+            <a:avLst/>
+          </a:prstGeom>
+          <a:noFill/>
+          <a:ln/>
+        </p:spPr>
+        <p:txBody>
+          <a:bodyPr wrap="square" lIns="0" tIns="0" rIns="0" bIns="0" rtlCol="0" anchor="ctr"/>
+          <a:lstStyle/>
+          <a:p>
+            <a:pPr algn="ctr" indent="0" marL="0">
+              <a:buNone/>
+            </a:pPr>
+            <a:r>
+              <a:rPr lang="en-US" sz="1100" b="1" dirty="0">
+                <a:solidFill>
+                  <a:srgbClr val="1F4E79"/>
+                </a:solidFill>
+                <a:latin typeface="Courier New" pitchFamily="34" charset="0"/>
+                <a:ea typeface="Courier New" pitchFamily="34" charset="-122"/>
+                <a:cs typeface="Courier New" pitchFamily="34" charset="-120"/>
+              </a:rPr>
+              <a:t>SCM</a:t>
+            </a:r>
+            <a:endParaRPr lang="en-US" sz="1100" dirty="0"/>
+          </a:p>
+        </p:txBody>
+      </p:sp>
+      <p:sp>
+        <p:nvSpPr>
+          <p:cNvPr id="22" name="Text 20"/>
+          <p:cNvSpPr/>
+          <p:nvPr/>
+        </p:nvSpPr>
+        <p:spPr>
+          <a:xfrm>
+            <a:off x="2450592" y="2231136"/>
+            <a:ext cx="1316736" cy="182880"/>
+          </a:xfrm>
+          <a:prstGeom prst="rect">
+            <a:avLst/>
+          </a:prstGeom>
+          <a:noFill/>
+          <a:ln/>
+        </p:spPr>
+        <p:txBody>
+          <a:bodyPr wrap="square" lIns="0" tIns="0" rIns="0" bIns="0" rtlCol="0" anchor="ctr"/>
+          <a:lstStyle/>
+          <a:p>
+            <a:pPr algn="ctr" indent="0" marL="0">
+              <a:buNone/>
+            </a:pPr>
+            <a:r>
+              <a:rPr lang="en-US" sz="800" dirty="0">
+                <a:solidFill>
+                  <a:srgbClr val="767D86"/>
+                </a:solidFill>
+                <a:latin typeface="Courier New" pitchFamily="34" charset="0"/>
+                <a:ea typeface="Courier New" pitchFamily="34" charset="-122"/>
+                <a:cs typeface="Courier New" pitchFamily="34" charset="-120"/>
+              </a:rPr>
+              <a:t>Supply Chain</a:t>
+            </a:r>
+            <a:endParaRPr lang="en-US" sz="800" dirty="0"/>
+          </a:p>
+        </p:txBody>
+      </p:sp>
+      <p:sp>
+        <p:nvSpPr>
+          <p:cNvPr id="23" name="Shape 21"/>
+          <p:cNvSpPr/>
+          <p:nvPr/>
+        </p:nvSpPr>
+        <p:spPr>
+          <a:xfrm>
+            <a:off x="1609344" y="2048256"/>
+            <a:ext cx="804672" cy="804672"/>
+          </a:xfrm>
+          <a:prstGeom prst="ellipse">
+            <a:avLst/>
+          </a:prstGeom>
+          <a:solidFill>
+            <a:srgbClr val="1F4E79"/>
+          </a:solidFill>
+          <a:ln w="12700">
+            <a:solidFill>
+              <a:srgbClr val="1F4E79"/>
+            </a:solidFill>
+            <a:prstDash val="solid"/>
+          </a:ln>
+        </p:spPr>
+      </p:sp>
+      <p:sp>
+        <p:nvSpPr>
+          <p:cNvPr id="24" name="Text 22"/>
+          <p:cNvSpPr/>
+          <p:nvPr/>
+        </p:nvSpPr>
+        <p:spPr>
+          <a:xfrm>
+            <a:off x="1609344" y="2313432"/>
+            <a:ext cx="804672" cy="274320"/>
+          </a:xfrm>
+          <a:prstGeom prst="rect">
+            <a:avLst/>
+          </a:prstGeom>
+          <a:noFill/>
+          <a:ln/>
+        </p:spPr>
+        <p:txBody>
+          <a:bodyPr wrap="square" lIns="0" tIns="0" rIns="0" bIns="0" rtlCol="0" anchor="ctr"/>
+          <a:lstStyle/>
+          <a:p>
+            <a:pPr algn="ctr" indent="0" marL="0">
+              <a:buNone/>
+            </a:pPr>
+            <a:r>
+              <a:rPr lang="en-US" sz="1100" b="1" dirty="0">
+                <a:solidFill>
+                  <a:srgbClr val="FFFFFF"/>
+                </a:solidFill>
+                <a:latin typeface="Courier New" pitchFamily="34" charset="0"/>
+                <a:ea typeface="Courier New" pitchFamily="34" charset="-122"/>
+                <a:cs typeface="Courier New" pitchFamily="34" charset="-120"/>
+              </a:rPr>
+              <a:t>MKT</a:t>
+            </a:r>
+            <a:endParaRPr lang="en-US" sz="1100" dirty="0"/>
+          </a:p>
+        </p:txBody>
+      </p:sp>
+      <p:sp>
+        <p:nvSpPr>
+          <p:cNvPr id="25" name="Text 23"/>
+          <p:cNvSpPr/>
+          <p:nvPr/>
+        </p:nvSpPr>
+        <p:spPr>
+          <a:xfrm>
+            <a:off x="1353312" y="2871216"/>
+            <a:ext cx="1316736" cy="182880"/>
+          </a:xfrm>
+          <a:prstGeom prst="rect">
+            <a:avLst/>
+          </a:prstGeom>
+          <a:noFill/>
+          <a:ln/>
+        </p:spPr>
+        <p:txBody>
+          <a:bodyPr wrap="square" lIns="0" tIns="0" rIns="0" bIns="0" rtlCol="0" anchor="ctr"/>
+          <a:lstStyle/>
+          <a:p>
+            <a:pPr algn="ctr" indent="0" marL="0">
+              <a:buNone/>
+            </a:pPr>
+            <a:r>
+              <a:rPr lang="en-US" sz="800" dirty="0">
+                <a:solidFill>
+                  <a:srgbClr val="767D86"/>
+                </a:solidFill>
+                <a:latin typeface="Courier New" pitchFamily="34" charset="0"/>
+                <a:ea typeface="Courier New" pitchFamily="34" charset="-122"/>
+                <a:cs typeface="Courier New" pitchFamily="34" charset="-120"/>
+              </a:rPr>
+              <a:t>Marketing</a:t>
+            </a:r>
+            <a:endParaRPr lang="en-US" sz="800" dirty="0"/>
+          </a:p>
+        </p:txBody>
+      </p:sp>
+      <p:sp>
+        <p:nvSpPr>
+          <p:cNvPr id="26" name="Shape 24"/>
+          <p:cNvSpPr/>
+          <p:nvPr/>
+        </p:nvSpPr>
+        <p:spPr>
+          <a:xfrm>
+            <a:off x="1609344" y="3310128"/>
+            <a:ext cx="804672" cy="804672"/>
+          </a:xfrm>
+          <a:prstGeom prst="ellipse">
+            <a:avLst/>
+          </a:prstGeom>
+          <a:solidFill>
+            <a:srgbClr val="FFFFFF"/>
+          </a:solidFill>
+          <a:ln w="20320">
+            <a:solidFill>
+              <a:srgbClr val="1F4E79"/>
+            </a:solidFill>
+            <a:prstDash val="solid"/>
+          </a:ln>
+        </p:spPr>
+      </p:sp>
+      <p:sp>
+        <p:nvSpPr>
+          <p:cNvPr id="27" name="Text 25"/>
+          <p:cNvSpPr/>
+          <p:nvPr/>
+        </p:nvSpPr>
+        <p:spPr>
+          <a:xfrm>
+            <a:off x="1609344" y="3575304"/>
+            <a:ext cx="804672" cy="274320"/>
+          </a:xfrm>
+          <a:prstGeom prst="rect">
+            <a:avLst/>
+          </a:prstGeom>
+          <a:noFill/>
+          <a:ln/>
+        </p:spPr>
+        <p:txBody>
+          <a:bodyPr wrap="square" lIns="0" tIns="0" rIns="0" bIns="0" rtlCol="0" anchor="ctr"/>
+          <a:lstStyle/>
+          <a:p>
+            <a:pPr algn="ctr" indent="0" marL="0">
+              <a:buNone/>
+            </a:pPr>
+            <a:r>
+              <a:rPr lang="en-US" sz="1100" b="1" dirty="0">
+                <a:solidFill>
+                  <a:srgbClr val="1F4E79"/>
+                </a:solidFill>
+                <a:latin typeface="Courier New" pitchFamily="34" charset="0"/>
+                <a:ea typeface="Courier New" pitchFamily="34" charset="-122"/>
+                <a:cs typeface="Courier New" pitchFamily="34" charset="-120"/>
+              </a:rPr>
+              <a:t>GM</a:t>
+            </a:r>
+            <a:endParaRPr lang="en-US" sz="1100" dirty="0"/>
+          </a:p>
+        </p:txBody>
+      </p:sp>
+      <p:sp>
+        <p:nvSpPr>
+          <p:cNvPr id="28" name="Text 26"/>
+          <p:cNvSpPr/>
+          <p:nvPr/>
+        </p:nvSpPr>
+        <p:spPr>
+          <a:xfrm>
+            <a:off x="1353312" y="4133088"/>
+            <a:ext cx="1316736" cy="182880"/>
+          </a:xfrm>
+          <a:prstGeom prst="rect">
+            <a:avLst/>
+          </a:prstGeom>
+          <a:noFill/>
+          <a:ln/>
+        </p:spPr>
+        <p:txBody>
+          <a:bodyPr wrap="square" lIns="0" tIns="0" rIns="0" bIns="0" rtlCol="0" anchor="ctr"/>
+          <a:lstStyle/>
+          <a:p>
+            <a:pPr algn="ctr" indent="0" marL="0">
+              <a:buNone/>
+            </a:pPr>
+            <a:r>
+              <a:rPr lang="en-US" sz="800" dirty="0">
+                <a:solidFill>
+                  <a:srgbClr val="767D86"/>
+                </a:solidFill>
+                <a:latin typeface="Courier New" pitchFamily="34" charset="0"/>
+                <a:ea typeface="Courier New" pitchFamily="34" charset="-122"/>
+                <a:cs typeface="Courier New" pitchFamily="34" charset="-120"/>
+              </a:rPr>
+              <a:t>Gen. Mgmt</a:t>
+            </a:r>
+            <a:endParaRPr lang="en-US" sz="800" dirty="0"/>
+          </a:p>
+        </p:txBody>
+      </p:sp>
+      <p:sp>
+        <p:nvSpPr>
+          <p:cNvPr id="29" name="Shape 27"/>
+          <p:cNvSpPr/>
+          <p:nvPr/>
+        </p:nvSpPr>
+        <p:spPr>
+          <a:xfrm>
+            <a:off x="2706624" y="3950208"/>
+            <a:ext cx="804672" cy="804672"/>
+          </a:xfrm>
+          <a:prstGeom prst="ellipse">
+            <a:avLst/>
+          </a:prstGeom>
+          <a:solidFill>
+            <a:srgbClr val="1F4E79"/>
+          </a:solidFill>
+          <a:ln w="12700">
+            <a:solidFill>
+              <a:srgbClr val="1F4E79"/>
+            </a:solidFill>
+            <a:prstDash val="solid"/>
+          </a:ln>
+        </p:spPr>
+      </p:sp>
+      <p:sp>
+        <p:nvSpPr>
+          <p:cNvPr id="30" name="Text 28"/>
+          <p:cNvSpPr/>
+          <p:nvPr/>
+        </p:nvSpPr>
+        <p:spPr>
+          <a:xfrm>
+            <a:off x="2706624" y="4215384"/>
+            <a:ext cx="804672" cy="274320"/>
+          </a:xfrm>
+          <a:prstGeom prst="rect">
+            <a:avLst/>
+          </a:prstGeom>
+          <a:noFill/>
+          <a:ln/>
+        </p:spPr>
+        <p:txBody>
+          <a:bodyPr wrap="square" lIns="0" tIns="0" rIns="0" bIns="0" rtlCol="0" anchor="ctr"/>
+          <a:lstStyle/>
+          <a:p>
+            <a:pPr algn="ctr" indent="0" marL="0">
+              <a:buNone/>
+            </a:pPr>
+            <a:r>
+              <a:rPr lang="en-US" sz="1100" b="1" dirty="0">
+                <a:solidFill>
+                  <a:srgbClr val="FFFFFF"/>
+                </a:solidFill>
+                <a:latin typeface="Courier New" pitchFamily="34" charset="0"/>
+                <a:ea typeface="Courier New" pitchFamily="34" charset="-122"/>
+                <a:cs typeface="Courier New" pitchFamily="34" charset="-120"/>
+              </a:rPr>
+              <a:t>IB</a:t>
+            </a:r>
+            <a:endParaRPr lang="en-US" sz="1100" dirty="0"/>
+          </a:p>
+        </p:txBody>
+      </p:sp>
+      <p:sp>
+        <p:nvSpPr>
+          <p:cNvPr id="31" name="Text 29"/>
+          <p:cNvSpPr/>
+          <p:nvPr/>
+        </p:nvSpPr>
+        <p:spPr>
+          <a:xfrm>
+            <a:off x="2450592" y="4773168"/>
+            <a:ext cx="1316736" cy="182880"/>
+          </a:xfrm>
+          <a:prstGeom prst="rect">
+            <a:avLst/>
+          </a:prstGeom>
+          <a:noFill/>
+          <a:ln/>
+        </p:spPr>
+        <p:txBody>
+          <a:bodyPr wrap="square" lIns="0" tIns="0" rIns="0" bIns="0" rtlCol="0" anchor="ctr"/>
+          <a:lstStyle/>
+          <a:p>
+            <a:pPr algn="ctr" indent="0" marL="0">
+              <a:buNone/>
+            </a:pPr>
+            <a:r>
+              <a:rPr lang="en-US" sz="800" dirty="0">
+                <a:solidFill>
+                  <a:srgbClr val="767D86"/>
+                </a:solidFill>
+                <a:latin typeface="Courier New" pitchFamily="34" charset="0"/>
+                <a:ea typeface="Courier New" pitchFamily="34" charset="-122"/>
+                <a:cs typeface="Courier New" pitchFamily="34" charset="-120"/>
+              </a:rPr>
+              <a:t>Int'l Business</a:t>
+            </a:r>
+            <a:endParaRPr lang="en-US" sz="800" dirty="0"/>
+          </a:p>
+        </p:txBody>
+      </p:sp>
+      <p:sp>
+        <p:nvSpPr>
+          <p:cNvPr id="32" name="Shape 30"/>
+          <p:cNvSpPr/>
+          <p:nvPr/>
+        </p:nvSpPr>
+        <p:spPr>
+          <a:xfrm>
+            <a:off x="3803904" y="3310128"/>
+            <a:ext cx="804672" cy="804672"/>
+          </a:xfrm>
+          <a:prstGeom prst="ellipse">
+            <a:avLst/>
+          </a:prstGeom>
+          <a:solidFill>
+            <a:srgbClr val="FFFFFF"/>
+          </a:solidFill>
+          <a:ln w="20320">
+            <a:solidFill>
+              <a:srgbClr val="1F4E79"/>
+            </a:solidFill>
+            <a:prstDash val="solid"/>
+          </a:ln>
+        </p:spPr>
+      </p:sp>
+      <p:sp>
+        <p:nvSpPr>
+          <p:cNvPr id="33" name="Text 31"/>
+          <p:cNvSpPr/>
+          <p:nvPr/>
+        </p:nvSpPr>
+        <p:spPr>
+          <a:xfrm>
+            <a:off x="3803904" y="3575304"/>
+            <a:ext cx="804672" cy="274320"/>
+          </a:xfrm>
+          <a:prstGeom prst="rect">
+            <a:avLst/>
+          </a:prstGeom>
+          <a:noFill/>
+          <a:ln/>
+        </p:spPr>
+        <p:txBody>
+          <a:bodyPr wrap="square" lIns="0" tIns="0" rIns="0" bIns="0" rtlCol="0" anchor="ctr"/>
+          <a:lstStyle/>
+          <a:p>
+            <a:pPr algn="ctr" indent="0" marL="0">
+              <a:buNone/>
+            </a:pPr>
+            <a:r>
+              <a:rPr lang="en-US" sz="1100" b="1" dirty="0">
+                <a:solidFill>
+                  <a:srgbClr val="1F4E79"/>
+                </a:solidFill>
+                <a:latin typeface="Courier New" pitchFamily="34" charset="0"/>
+                <a:ea typeface="Courier New" pitchFamily="34" charset="-122"/>
+                <a:cs typeface="Courier New" pitchFamily="34" charset="-120"/>
+              </a:rPr>
+              <a:t>CSR</a:t>
+            </a:r>
+            <a:endParaRPr lang="en-US" sz="1100" dirty="0"/>
+          </a:p>
+        </p:txBody>
+      </p:sp>
+      <p:sp>
+        <p:nvSpPr>
+          <p:cNvPr id="34" name="Text 32"/>
+          <p:cNvSpPr/>
+          <p:nvPr/>
+        </p:nvSpPr>
+        <p:spPr>
+          <a:xfrm>
+            <a:off x="3547872" y="4133088"/>
+            <a:ext cx="1316736" cy="182880"/>
+          </a:xfrm>
+          <a:prstGeom prst="rect">
+            <a:avLst/>
+          </a:prstGeom>
+          <a:noFill/>
+          <a:ln/>
+        </p:spPr>
+        <p:txBody>
+          <a:bodyPr wrap="square" lIns="0" tIns="0" rIns="0" bIns="0" rtlCol="0" anchor="ctr"/>
+          <a:lstStyle/>
+          <a:p>
+            <a:pPr algn="ctr" indent="0" marL="0">
+              <a:buNone/>
+            </a:pPr>
+            <a:r>
+              <a:rPr lang="en-US" sz="800" dirty="0">
+                <a:solidFill>
+                  <a:srgbClr val="767D86"/>
+                </a:solidFill>
+                <a:latin typeface="Courier New" pitchFamily="34" charset="0"/>
+                <a:ea typeface="Courier New" pitchFamily="34" charset="-122"/>
+                <a:cs typeface="Courier New" pitchFamily="34" charset="-120"/>
+              </a:rPr>
+              <a:t>CSR</a:t>
+            </a:r>
+            <a:endParaRPr lang="en-US" sz="800" dirty="0"/>
+          </a:p>
+        </p:txBody>
+      </p:sp>
+      <p:sp>
+        <p:nvSpPr>
+          <p:cNvPr id="35" name="Shape 33"/>
+          <p:cNvSpPr/>
+          <p:nvPr/>
+        </p:nvSpPr>
+        <p:spPr>
+          <a:xfrm>
+            <a:off x="3803904" y="2048256"/>
+            <a:ext cx="804672" cy="804672"/>
+          </a:xfrm>
+          <a:prstGeom prst="ellipse">
+            <a:avLst/>
+          </a:prstGeom>
+          <a:solidFill>
+            <a:srgbClr val="1F4E79"/>
+          </a:solidFill>
+          <a:ln w="12700">
+            <a:solidFill>
+              <a:srgbClr val="1F4E79"/>
+            </a:solidFill>
+            <a:prstDash val="solid"/>
+          </a:ln>
+        </p:spPr>
+      </p:sp>
+      <p:sp>
+        <p:nvSpPr>
+          <p:cNvPr id="36" name="Text 34"/>
+          <p:cNvSpPr/>
+          <p:nvPr/>
+        </p:nvSpPr>
+        <p:spPr>
+          <a:xfrm>
+            <a:off x="3803904" y="2313432"/>
+            <a:ext cx="804672" cy="274320"/>
+          </a:xfrm>
+          <a:prstGeom prst="rect">
+            <a:avLst/>
+          </a:prstGeom>
+          <a:noFill/>
+          <a:ln/>
+        </p:spPr>
+        <p:txBody>
+          <a:bodyPr wrap="square" lIns="0" tIns="0" rIns="0" bIns="0" rtlCol="0" anchor="ctr"/>
+          <a:lstStyle/>
+          <a:p>
+            <a:pPr algn="ctr" indent="0" marL="0">
+              <a:buNone/>
+            </a:pPr>
+            <a:r>
+              <a:rPr lang="en-US" sz="1100" b="1" dirty="0">
+                <a:solidFill>
+                  <a:srgbClr val="FFFFFF"/>
+                </a:solidFill>
+                <a:latin typeface="Courier New" pitchFamily="34" charset="0"/>
+                <a:ea typeface="Courier New" pitchFamily="34" charset="-122"/>
+                <a:cs typeface="Courier New" pitchFamily="34" charset="-120"/>
+              </a:rPr>
+              <a:t>FIN</a:t>
+            </a:r>
+            <a:endParaRPr lang="en-US" sz="1100" dirty="0"/>
+          </a:p>
+        </p:txBody>
+      </p:sp>
+      <p:sp>
+        <p:nvSpPr>
+          <p:cNvPr id="37" name="Text 35"/>
+          <p:cNvSpPr/>
+          <p:nvPr/>
+        </p:nvSpPr>
+        <p:spPr>
+          <a:xfrm>
+            <a:off x="3547872" y="2871216"/>
+            <a:ext cx="1316736" cy="182880"/>
+          </a:xfrm>
+          <a:prstGeom prst="rect">
+            <a:avLst/>
+          </a:prstGeom>
+          <a:noFill/>
+          <a:ln/>
+        </p:spPr>
+        <p:txBody>
+          <a:bodyPr wrap="square" lIns="0" tIns="0" rIns="0" bIns="0" rtlCol="0" anchor="ctr"/>
+          <a:lstStyle/>
+          <a:p>
+            <a:pPr algn="ctr" indent="0" marL="0">
+              <a:buNone/>
+            </a:pPr>
+            <a:r>
+              <a:rPr lang="en-US" sz="800" dirty="0">
+                <a:solidFill>
+                  <a:srgbClr val="767D86"/>
+                </a:solidFill>
+                <a:latin typeface="Courier New" pitchFamily="34" charset="0"/>
+                <a:ea typeface="Courier New" pitchFamily="34" charset="-122"/>
+                <a:cs typeface="Courier New" pitchFamily="34" charset="-120"/>
+              </a:rPr>
+              <a:t>Finance</a:t>
+            </a:r>
+            <a:endParaRPr lang="en-US" sz="800" dirty="0"/>
+          </a:p>
+        </p:txBody>
+      </p:sp>
+      <p:sp>
+        <p:nvSpPr>
+          <p:cNvPr id="38" name="Shape 36"/>
+          <p:cNvSpPr/>
+          <p:nvPr/>
+        </p:nvSpPr>
+        <p:spPr>
+          <a:xfrm>
+            <a:off x="658368" y="5138928"/>
+            <a:ext cx="310896" cy="0"/>
+          </a:xfrm>
+          <a:prstGeom prst="line">
+            <a:avLst/>
+          </a:prstGeom>
+          <a:noFill/>
+          <a:ln w="20320">
+            <a:solidFill>
+              <a:srgbClr val="8C3A1B"/>
+            </a:solidFill>
+            <a:prstDash val="dash"/>
+          </a:ln>
+        </p:spPr>
+      </p:sp>
+      <p:sp>
+        <p:nvSpPr>
+          <p:cNvPr id="39" name="Text 37"/>
+          <p:cNvSpPr/>
+          <p:nvPr/>
+        </p:nvSpPr>
+        <p:spPr>
+          <a:xfrm>
+            <a:off x="1060704" y="5047488"/>
+            <a:ext cx="1463040" cy="182880"/>
+          </a:xfrm>
+          <a:prstGeom prst="rect">
+            <a:avLst/>
+          </a:prstGeom>
+          <a:noFill/>
+          <a:ln/>
+        </p:spPr>
+        <p:txBody>
+          <a:bodyPr wrap="square" lIns="0" tIns="0" rIns="0" bIns="0" rtlCol="0" anchor="ctr"/>
+          <a:lstStyle/>
+          <a:p>
+            <a:pPr indent="0" marL="0">
+              <a:buNone/>
+            </a:pPr>
+            <a:r>
+              <a:rPr lang="en-US" sz="850" dirty="0">
+                <a:solidFill>
+                  <a:srgbClr val="8C3A1B"/>
+                </a:solidFill>
+                <a:latin typeface="Courier New" pitchFamily="34" charset="0"/>
+                <a:ea typeface="Courier New" pitchFamily="34" charset="-122"/>
+                <a:cs typeface="Courier New" pitchFamily="34" charset="-120"/>
+              </a:rPr>
+              <a:t>no shared region</a:t>
+            </a:r>
+            <a:endParaRPr lang="en-US" sz="850" dirty="0"/>
+          </a:p>
+        </p:txBody>
+      </p:sp>
+      <p:sp>
+        <p:nvSpPr>
+          <p:cNvPr id="40" name="Shape 38"/>
+          <p:cNvSpPr/>
+          <p:nvPr/>
+        </p:nvSpPr>
+        <p:spPr>
+          <a:xfrm>
+            <a:off x="2670048" y="5065776"/>
+            <a:ext cx="146304" cy="146304"/>
+          </a:xfrm>
+          <a:prstGeom prst="ellipse">
+            <a:avLst/>
+          </a:prstGeom>
+          <a:solidFill>
+            <a:srgbClr val="1F4E79"/>
+          </a:solidFill>
+          <a:ln w="12700">
+            <a:solidFill>
+              <a:srgbClr val="333333"/>
+            </a:solidFill>
+            <a:prstDash val="solid"/>
+          </a:ln>
+        </p:spPr>
+      </p:sp>
+      <p:sp>
+        <p:nvSpPr>
+          <p:cNvPr id="41" name="Text 39"/>
+          <p:cNvSpPr/>
+          <p:nvPr/>
+        </p:nvSpPr>
+        <p:spPr>
+          <a:xfrm>
+            <a:off x="2889504" y="5047488"/>
+            <a:ext cx="1463040" cy="182880"/>
+          </a:xfrm>
+          <a:prstGeom prst="rect">
+            <a:avLst/>
+          </a:prstGeom>
+          <a:noFill/>
+          <a:ln/>
+        </p:spPr>
+        <p:txBody>
+          <a:bodyPr wrap="square" lIns="0" tIns="0" rIns="0" bIns="0" rtlCol="0" anchor="ctr"/>
+          <a:lstStyle/>
+          <a:p>
+            <a:pPr indent="0" marL="0">
+              <a:buNone/>
+            </a:pPr>
+            <a:r>
+              <a:rPr lang="en-US" sz="850" dirty="0">
+                <a:solidFill>
+                  <a:srgbClr val="767D86"/>
+                </a:solidFill>
+                <a:latin typeface="Courier New" pitchFamily="34" charset="0"/>
+                <a:ea typeface="Courier New" pitchFamily="34" charset="-122"/>
+                <a:cs typeface="Courier New" pitchFamily="34" charset="-120"/>
+              </a:rPr>
+              <a:t>overlaps all five</a:t>
+            </a:r>
+            <a:endParaRPr lang="en-US" sz="850" dirty="0"/>
+          </a:p>
+        </p:txBody>
+      </p:sp>
+      <p:sp>
+        <p:nvSpPr>
+          <p:cNvPr id="42" name="Shape 40"/>
+          <p:cNvSpPr/>
+          <p:nvPr/>
+        </p:nvSpPr>
+        <p:spPr>
+          <a:xfrm>
+            <a:off x="5989320" y="1572768"/>
+            <a:ext cx="5742432" cy="3310128"/>
+          </a:xfrm>
+          <a:prstGeom prst="rect">
+            <a:avLst/>
+          </a:prstGeom>
+          <a:solidFill>
+            <a:srgbClr val="FFFFFF"/>
+          </a:solidFill>
+          <a:ln w="12700">
+            <a:solidFill>
+              <a:srgbClr val="D8D4CB"/>
+            </a:solidFill>
+            <a:prstDash val="solid"/>
+          </a:ln>
+        </p:spPr>
+      </p:sp>
+      <p:sp>
+        <p:nvSpPr>
+          <p:cNvPr id="43" name="Text 41"/>
+          <p:cNvSpPr/>
+          <p:nvPr/>
+        </p:nvSpPr>
+        <p:spPr>
+          <a:xfrm>
+            <a:off x="6236208" y="1719072"/>
+            <a:ext cx="3657600" cy="237744"/>
+          </a:xfrm>
+          <a:prstGeom prst="rect">
+            <a:avLst/>
+          </a:prstGeom>
+          <a:noFill/>
+          <a:ln/>
+        </p:spPr>
+        <p:txBody>
+          <a:bodyPr wrap="square" lIns="0" tIns="0" rIns="0" bIns="0" rtlCol="0" anchor="ctr"/>
+          <a:lstStyle/>
+          <a:p>
+            <a:pPr indent="0" marL="0">
+              <a:buNone/>
+            </a:pPr>
+            <a:r>
+              <a:rPr lang="en-US" sz="1400" b="1" dirty="0">
+                <a:solidFill>
+                  <a:srgbClr val="14171C"/>
+                </a:solidFill>
+                <a:latin typeface="Georgia" pitchFamily="34" charset="0"/>
+                <a:ea typeface="Georgia" pitchFamily="34" charset="-122"/>
+                <a:cs typeface="Georgia" pitchFamily="34" charset="-120"/>
+              </a:rPr>
+              <a:t>Every pairing, read off</a:t>
+            </a:r>
+            <a:endParaRPr lang="en-US" sz="1400" dirty="0"/>
+          </a:p>
+        </p:txBody>
+      </p:sp>
+      <p:sp>
+        <p:nvSpPr>
+          <p:cNvPr id="44" name="Text 42"/>
+          <p:cNvSpPr/>
+          <p:nvPr/>
+        </p:nvSpPr>
+        <p:spPr>
+          <a:xfrm>
+            <a:off x="8229600" y="2066544"/>
+            <a:ext cx="329184" cy="219456"/>
+          </a:xfrm>
+          <a:prstGeom prst="rect">
+            <a:avLst/>
+          </a:prstGeom>
+          <a:noFill/>
+          <a:ln/>
+        </p:spPr>
+        <p:txBody>
+          <a:bodyPr wrap="square" lIns="0" tIns="0" rIns="0" bIns="0" rtlCol="0" anchor="ctr"/>
+          <a:lstStyle/>
+          <a:p>
+            <a:pPr algn="ctr" indent="0" marL="0">
+              <a:buNone/>
+            </a:pPr>
+            <a:r>
+              <a:rPr lang="en-US" sz="850" b="1" dirty="0">
+                <a:solidFill>
+                  <a:srgbClr val="1F4E79"/>
+                </a:solidFill>
+                <a:latin typeface="Courier New" pitchFamily="34" charset="0"/>
+                <a:ea typeface="Courier New" pitchFamily="34" charset="-122"/>
+                <a:cs typeface="Courier New" pitchFamily="34" charset="-120"/>
+              </a:rPr>
+              <a:t>MKT</a:t>
+            </a:r>
+            <a:endParaRPr lang="en-US" sz="850" dirty="0"/>
+          </a:p>
+        </p:txBody>
+      </p:sp>
+      <p:sp>
+        <p:nvSpPr>
+          <p:cNvPr id="45" name="Text 43"/>
+          <p:cNvSpPr/>
+          <p:nvPr/>
+        </p:nvSpPr>
+        <p:spPr>
+          <a:xfrm>
+            <a:off x="8558784" y="2066544"/>
+            <a:ext cx="329184" cy="219456"/>
+          </a:xfrm>
+          <a:prstGeom prst="rect">
+            <a:avLst/>
+          </a:prstGeom>
+          <a:noFill/>
+          <a:ln/>
+        </p:spPr>
+        <p:txBody>
+          <a:bodyPr wrap="square" lIns="0" tIns="0" rIns="0" bIns="0" rtlCol="0" anchor="ctr"/>
+          <a:lstStyle/>
+          <a:p>
+            <a:pPr algn="ctr" indent="0" marL="0">
+              <a:buNone/>
+            </a:pPr>
+            <a:r>
+              <a:rPr lang="en-US" sz="850" b="1" dirty="0">
+                <a:solidFill>
+                  <a:srgbClr val="1F4E79"/>
+                </a:solidFill>
+                <a:latin typeface="Courier New" pitchFamily="34" charset="0"/>
+                <a:ea typeface="Courier New" pitchFamily="34" charset="-122"/>
+                <a:cs typeface="Courier New" pitchFamily="34" charset="-120"/>
+              </a:rPr>
+              <a:t>FIN</a:t>
+            </a:r>
+            <a:endParaRPr lang="en-US" sz="850" dirty="0"/>
+          </a:p>
+        </p:txBody>
+      </p:sp>
+      <p:sp>
+        <p:nvSpPr>
+          <p:cNvPr id="46" name="Text 44"/>
+          <p:cNvSpPr/>
+          <p:nvPr/>
+        </p:nvSpPr>
+        <p:spPr>
+          <a:xfrm>
+            <a:off x="8887968" y="2066544"/>
+            <a:ext cx="329184" cy="219456"/>
+          </a:xfrm>
+          <a:prstGeom prst="rect">
+            <a:avLst/>
+          </a:prstGeom>
+          <a:noFill/>
+          <a:ln/>
+        </p:spPr>
+        <p:txBody>
+          <a:bodyPr wrap="square" lIns="0" tIns="0" rIns="0" bIns="0" rtlCol="0" anchor="ctr"/>
+          <a:lstStyle/>
+          <a:p>
+            <a:pPr algn="ctr" indent="0" marL="0">
+              <a:buNone/>
+            </a:pPr>
+            <a:r>
+              <a:rPr lang="en-US" sz="850" b="1" dirty="0">
+                <a:solidFill>
+                  <a:srgbClr val="1F4E79"/>
+                </a:solidFill>
+                <a:latin typeface="Courier New" pitchFamily="34" charset="0"/>
+                <a:ea typeface="Courier New" pitchFamily="34" charset="-122"/>
+                <a:cs typeface="Courier New" pitchFamily="34" charset="-120"/>
+              </a:rPr>
+              <a:t>IB</a:t>
+            </a:r>
+            <a:endParaRPr lang="en-US" sz="850" dirty="0"/>
+          </a:p>
+        </p:txBody>
+      </p:sp>
+      <p:sp>
+        <p:nvSpPr>
+          <p:cNvPr id="47" name="Text 45"/>
+          <p:cNvSpPr/>
+          <p:nvPr/>
+        </p:nvSpPr>
+        <p:spPr>
+          <a:xfrm>
+            <a:off x="9217152" y="2066544"/>
+            <a:ext cx="329184" cy="219456"/>
+          </a:xfrm>
+          <a:prstGeom prst="rect">
+            <a:avLst/>
+          </a:prstGeom>
+          <a:noFill/>
+          <a:ln/>
+        </p:spPr>
+        <p:txBody>
+          <a:bodyPr wrap="square" lIns="0" tIns="0" rIns="0" bIns="0" rtlCol="0" anchor="ctr"/>
+          <a:lstStyle/>
+          <a:p>
+            <a:pPr algn="ctr" indent="0" marL="0">
+              <a:buNone/>
+            </a:pPr>
+            <a:r>
+              <a:rPr lang="en-US" sz="850" b="1" dirty="0">
+                <a:solidFill>
+                  <a:srgbClr val="1F4E79"/>
+                </a:solidFill>
+                <a:latin typeface="Courier New" pitchFamily="34" charset="0"/>
+                <a:ea typeface="Courier New" pitchFamily="34" charset="-122"/>
+                <a:cs typeface="Courier New" pitchFamily="34" charset="-120"/>
+              </a:rPr>
+              <a:t>GM</a:t>
+            </a:r>
+            <a:endParaRPr lang="en-US" sz="850" dirty="0"/>
+          </a:p>
+        </p:txBody>
+      </p:sp>
+      <p:sp>
+        <p:nvSpPr>
+          <p:cNvPr id="48" name="Text 46"/>
+          <p:cNvSpPr/>
+          <p:nvPr/>
+        </p:nvSpPr>
+        <p:spPr>
+          <a:xfrm>
+            <a:off x="9546336" y="2066544"/>
+            <a:ext cx="329184" cy="219456"/>
+          </a:xfrm>
+          <a:prstGeom prst="rect">
+            <a:avLst/>
+          </a:prstGeom>
+          <a:noFill/>
+          <a:ln/>
+        </p:spPr>
+        <p:txBody>
+          <a:bodyPr wrap="square" lIns="0" tIns="0" rIns="0" bIns="0" rtlCol="0" anchor="ctr"/>
+          <a:lstStyle/>
+          <a:p>
+            <a:pPr algn="ctr" indent="0" marL="0">
+              <a:buNone/>
+            </a:pPr>
+            <a:r>
+              <a:rPr lang="en-US" sz="850" b="1" dirty="0">
+                <a:solidFill>
+                  <a:srgbClr val="1F4E79"/>
+                </a:solidFill>
+                <a:latin typeface="Courier New" pitchFamily="34" charset="0"/>
+                <a:ea typeface="Courier New" pitchFamily="34" charset="-122"/>
+                <a:cs typeface="Courier New" pitchFamily="34" charset="-120"/>
+              </a:rPr>
+              <a:t>CSR</a:t>
+            </a:r>
+            <a:endParaRPr lang="en-US" sz="850" dirty="0"/>
+          </a:p>
+        </p:txBody>
+      </p:sp>
+      <p:sp>
+        <p:nvSpPr>
+          <p:cNvPr id="49" name="Text 47"/>
+          <p:cNvSpPr/>
+          <p:nvPr/>
+        </p:nvSpPr>
+        <p:spPr>
+          <a:xfrm>
+            <a:off x="9875520" y="2066544"/>
+            <a:ext cx="329184" cy="219456"/>
+          </a:xfrm>
+          <a:prstGeom prst="rect">
+            <a:avLst/>
+          </a:prstGeom>
+          <a:noFill/>
+          <a:ln/>
+        </p:spPr>
+        <p:txBody>
+          <a:bodyPr wrap="square" lIns="0" tIns="0" rIns="0" bIns="0" rtlCol="0" anchor="ctr"/>
+          <a:lstStyle/>
+          <a:p>
+            <a:pPr algn="ctr" indent="0" marL="0">
+              <a:buNone/>
+            </a:pPr>
+            <a:r>
+              <a:rPr lang="en-US" sz="850" b="1" dirty="0">
+                <a:solidFill>
+                  <a:srgbClr val="1F4E79"/>
+                </a:solidFill>
+                <a:latin typeface="Courier New" pitchFamily="34" charset="0"/>
+                <a:ea typeface="Courier New" pitchFamily="34" charset="-122"/>
+                <a:cs typeface="Courier New" pitchFamily="34" charset="-120"/>
+              </a:rPr>
+              <a:t>SCM</a:t>
+            </a:r>
+            <a:endParaRPr lang="en-US" sz="850" dirty="0"/>
+          </a:p>
+        </p:txBody>
+      </p:sp>
+      <p:sp>
+        <p:nvSpPr>
+          <p:cNvPr id="50" name="Text 48"/>
+          <p:cNvSpPr/>
+          <p:nvPr/>
+        </p:nvSpPr>
+        <p:spPr>
+          <a:xfrm>
+            <a:off x="7296912" y="2432304"/>
+            <a:ext cx="859536" cy="219456"/>
+          </a:xfrm>
+          <a:prstGeom prst="rect">
+            <a:avLst/>
+          </a:prstGeom>
+          <a:noFill/>
+          <a:ln/>
+        </p:spPr>
+        <p:txBody>
+          <a:bodyPr wrap="square" lIns="0" tIns="0" rIns="0" bIns="0" rtlCol="0" anchor="ctr"/>
+          <a:lstStyle/>
+          <a:p>
+            <a:pPr algn="r" indent="0" marL="0">
+              <a:buNone/>
+            </a:pPr>
+            <a:r>
+              <a:rPr lang="en-US" sz="850" b="1" dirty="0">
+                <a:solidFill>
+                  <a:srgbClr val="1F4E79"/>
+                </a:solidFill>
+                <a:latin typeface="Courier New" pitchFamily="34" charset="0"/>
+                <a:ea typeface="Courier New" pitchFamily="34" charset="-122"/>
+                <a:cs typeface="Courier New" pitchFamily="34" charset="-120"/>
+              </a:rPr>
+              <a:t>MKT</a:t>
+            </a:r>
+            <a:endParaRPr lang="en-US" sz="850" dirty="0"/>
+          </a:p>
+        </p:txBody>
+      </p:sp>
+      <p:sp>
+        <p:nvSpPr>
+          <p:cNvPr id="51" name="Shape 49"/>
+          <p:cNvSpPr/>
+          <p:nvPr/>
+        </p:nvSpPr>
+        <p:spPr>
+          <a:xfrm>
+            <a:off x="8229600" y="2340864"/>
+            <a:ext cx="283464" cy="283464"/>
+          </a:xfrm>
+          <a:prstGeom prst="rect">
+            <a:avLst/>
+          </a:prstGeom>
+          <a:solidFill>
+            <a:srgbClr val="EDEAE3"/>
+          </a:solidFill>
+          <a:ln w="9525">
+            <a:solidFill>
+              <a:srgbClr val="D8D4CB"/>
+            </a:solidFill>
+            <a:prstDash val="solid"/>
+          </a:ln>
+        </p:spPr>
+      </p:sp>
+      <p:sp>
+        <p:nvSpPr>
+          <p:cNvPr id="52" name="Shape 50"/>
+          <p:cNvSpPr/>
+          <p:nvPr/>
+        </p:nvSpPr>
+        <p:spPr>
+          <a:xfrm>
+            <a:off x="8558784" y="2340864"/>
+            <a:ext cx="283464" cy="283464"/>
+          </a:xfrm>
+          <a:prstGeom prst="rect">
+            <a:avLst/>
+          </a:prstGeom>
+          <a:solidFill>
+            <a:srgbClr val="1F4E79"/>
+          </a:solidFill>
+          <a:ln w="9525">
+            <a:solidFill>
+              <a:srgbClr val="1F4E79"/>
+            </a:solidFill>
+            <a:prstDash val="solid"/>
+          </a:ln>
+        </p:spPr>
+      </p:sp>
+      <p:sp>
+        <p:nvSpPr>
+          <p:cNvPr id="53" name="Shape 51"/>
+          <p:cNvSpPr/>
+          <p:nvPr/>
+        </p:nvSpPr>
+        <p:spPr>
+          <a:xfrm>
+            <a:off x="8887968" y="2340864"/>
+            <a:ext cx="283464" cy="283464"/>
+          </a:xfrm>
+          <a:prstGeom prst="rect">
+            <a:avLst/>
+          </a:prstGeom>
+          <a:solidFill>
+            <a:srgbClr val="1F4E79"/>
+          </a:solidFill>
+          <a:ln w="9525">
+            <a:solidFill>
+              <a:srgbClr val="1F4E79"/>
+            </a:solidFill>
+            <a:prstDash val="solid"/>
+          </a:ln>
+        </p:spPr>
+      </p:sp>
+      <p:sp>
+        <p:nvSpPr>
+          <p:cNvPr id="54" name="Shape 52"/>
+          <p:cNvSpPr/>
+          <p:nvPr/>
+        </p:nvSpPr>
+        <p:spPr>
+          <a:xfrm>
+            <a:off x="9217152" y="2340864"/>
+            <a:ext cx="283464" cy="283464"/>
+          </a:xfrm>
+          <a:prstGeom prst="rect">
+            <a:avLst/>
+          </a:prstGeom>
+          <a:solidFill>
+            <a:srgbClr val="1F4E79"/>
+          </a:solidFill>
+          <a:ln w="9525">
+            <a:solidFill>
+              <a:srgbClr val="1F4E79"/>
+            </a:solidFill>
+            <a:prstDash val="solid"/>
+          </a:ln>
+        </p:spPr>
+      </p:sp>
+      <p:sp>
+        <p:nvSpPr>
+          <p:cNvPr id="55" name="Shape 53"/>
+          <p:cNvSpPr/>
+          <p:nvPr/>
+        </p:nvSpPr>
+        <p:spPr>
+          <a:xfrm>
+            <a:off x="9546336" y="2340864"/>
+            <a:ext cx="283464" cy="283464"/>
+          </a:xfrm>
+          <a:prstGeom prst="rect">
+            <a:avLst/>
+          </a:prstGeom>
+          <a:solidFill>
+            <a:srgbClr val="1F4E79"/>
+          </a:solidFill>
+          <a:ln w="9525">
+            <a:solidFill>
+              <a:srgbClr val="1F4E79"/>
+            </a:solidFill>
+            <a:prstDash val="solid"/>
+          </a:ln>
+        </p:spPr>
+      </p:sp>
+      <p:sp>
+        <p:nvSpPr>
+          <p:cNvPr id="56" name="Shape 54"/>
+          <p:cNvSpPr/>
+          <p:nvPr/>
+        </p:nvSpPr>
+        <p:spPr>
+          <a:xfrm>
+            <a:off x="9875520" y="2340864"/>
+            <a:ext cx="283464" cy="283464"/>
+          </a:xfrm>
+          <a:prstGeom prst="rect">
+            <a:avLst/>
+          </a:prstGeom>
+          <a:solidFill>
+            <a:srgbClr val="1F4E79"/>
+          </a:solidFill>
+          <a:ln w="9525">
+            <a:solidFill>
+              <a:srgbClr val="1F4E79"/>
+            </a:solidFill>
+            <a:prstDash val="solid"/>
+          </a:ln>
+        </p:spPr>
+      </p:sp>
+      <p:sp>
+        <p:nvSpPr>
+          <p:cNvPr id="57" name="Text 55"/>
+          <p:cNvSpPr/>
+          <p:nvPr/>
+        </p:nvSpPr>
+        <p:spPr>
+          <a:xfrm>
+            <a:off x="7296912" y="2761488"/>
+            <a:ext cx="859536" cy="219456"/>
+          </a:xfrm>
+          <a:prstGeom prst="rect">
+            <a:avLst/>
+          </a:prstGeom>
+          <a:noFill/>
+          <a:ln/>
+        </p:spPr>
+        <p:txBody>
+          <a:bodyPr wrap="square" lIns="0" tIns="0" rIns="0" bIns="0" rtlCol="0" anchor="ctr"/>
+          <a:lstStyle/>
+          <a:p>
+            <a:pPr algn="r" indent="0" marL="0">
+              <a:buNone/>
+            </a:pPr>
+            <a:r>
+              <a:rPr lang="en-US" sz="850" b="1" dirty="0">
+                <a:solidFill>
+                  <a:srgbClr val="1F4E79"/>
+                </a:solidFill>
+                <a:latin typeface="Courier New" pitchFamily="34" charset="0"/>
+                <a:ea typeface="Courier New" pitchFamily="34" charset="-122"/>
+                <a:cs typeface="Courier New" pitchFamily="34" charset="-120"/>
+              </a:rPr>
+              <a:t>FIN</a:t>
+            </a:r>
+            <a:endParaRPr lang="en-US" sz="850" dirty="0"/>
+          </a:p>
+        </p:txBody>
+      </p:sp>
+      <p:sp>
+        <p:nvSpPr>
+          <p:cNvPr id="58" name="Shape 56"/>
+          <p:cNvSpPr/>
+          <p:nvPr/>
+        </p:nvSpPr>
+        <p:spPr>
+          <a:xfrm>
+            <a:off x="8229600" y="2670048"/>
+            <a:ext cx="283464" cy="283464"/>
+          </a:xfrm>
+          <a:prstGeom prst="rect">
+            <a:avLst/>
+          </a:prstGeom>
+          <a:solidFill>
+            <a:srgbClr val="1F4E79"/>
+          </a:solidFill>
+          <a:ln w="9525">
+            <a:solidFill>
+              <a:srgbClr val="1F4E79"/>
+            </a:solidFill>
+            <a:prstDash val="solid"/>
+          </a:ln>
+        </p:spPr>
+      </p:sp>
+      <p:sp>
+        <p:nvSpPr>
+          <p:cNvPr id="59" name="Shape 57"/>
+          <p:cNvSpPr/>
+          <p:nvPr/>
+        </p:nvSpPr>
+        <p:spPr>
+          <a:xfrm>
+            <a:off x="8558784" y="2670048"/>
+            <a:ext cx="283464" cy="283464"/>
+          </a:xfrm>
+          <a:prstGeom prst="rect">
+            <a:avLst/>
+          </a:prstGeom>
+          <a:solidFill>
+            <a:srgbClr val="EDEAE3"/>
+          </a:solidFill>
+          <a:ln w="9525">
+            <a:solidFill>
+              <a:srgbClr val="D8D4CB"/>
+            </a:solidFill>
+            <a:prstDash val="solid"/>
+          </a:ln>
+        </p:spPr>
+      </p:sp>
+      <p:sp>
+        <p:nvSpPr>
+          <p:cNvPr id="60" name="Shape 58"/>
+          <p:cNvSpPr/>
+          <p:nvPr/>
+        </p:nvSpPr>
+        <p:spPr>
+          <a:xfrm>
+            <a:off x="8887968" y="2670048"/>
+            <a:ext cx="283464" cy="283464"/>
+          </a:xfrm>
+          <a:prstGeom prst="rect">
+            <a:avLst/>
+          </a:prstGeom>
+          <a:solidFill>
+            <a:srgbClr val="1F4E79"/>
+          </a:solidFill>
+          <a:ln w="9525">
+            <a:solidFill>
+              <a:srgbClr val="1F4E79"/>
+            </a:solidFill>
+            <a:prstDash val="solid"/>
+          </a:ln>
+        </p:spPr>
+      </p:sp>
+      <p:sp>
+        <p:nvSpPr>
+          <p:cNvPr id="61" name="Shape 59"/>
+          <p:cNvSpPr/>
+          <p:nvPr/>
+        </p:nvSpPr>
+        <p:spPr>
+          <a:xfrm>
+            <a:off x="9217152" y="2670048"/>
+            <a:ext cx="283464" cy="283464"/>
+          </a:xfrm>
+          <a:prstGeom prst="rect">
+            <a:avLst/>
+          </a:prstGeom>
+          <a:solidFill>
+            <a:srgbClr val="1F4E79"/>
+          </a:solidFill>
+          <a:ln w="9525">
+            <a:solidFill>
+              <a:srgbClr val="1F4E79"/>
+            </a:solidFill>
+            <a:prstDash val="solid"/>
+          </a:ln>
+        </p:spPr>
+      </p:sp>
+      <p:sp>
+        <p:nvSpPr>
+          <p:cNvPr id="62" name="Shape 60"/>
+          <p:cNvSpPr/>
+          <p:nvPr/>
+        </p:nvSpPr>
+        <p:spPr>
+          <a:xfrm>
+            <a:off x="9546336" y="2670048"/>
+            <a:ext cx="283464" cy="283464"/>
+          </a:xfrm>
+          <a:prstGeom prst="rect">
+            <a:avLst/>
+          </a:prstGeom>
+          <a:solidFill>
+            <a:srgbClr val="1F4E79"/>
+          </a:solidFill>
+          <a:ln w="9525">
+            <a:solidFill>
+              <a:srgbClr val="1F4E79"/>
+            </a:solidFill>
+            <a:prstDash val="solid"/>
+          </a:ln>
+        </p:spPr>
+      </p:sp>
+      <p:sp>
+        <p:nvSpPr>
+          <p:cNvPr id="63" name="Shape 61"/>
+          <p:cNvSpPr/>
+          <p:nvPr/>
+        </p:nvSpPr>
+        <p:spPr>
+          <a:xfrm>
+            <a:off x="9875520" y="2670048"/>
+            <a:ext cx="283464" cy="283464"/>
+          </a:xfrm>
+          <a:prstGeom prst="rect">
+            <a:avLst/>
+          </a:prstGeom>
+          <a:solidFill>
+            <a:srgbClr val="1F4E79"/>
+          </a:solidFill>
+          <a:ln w="9525">
+            <a:solidFill>
+              <a:srgbClr val="1F4E79"/>
+            </a:solidFill>
+            <a:prstDash val="solid"/>
+          </a:ln>
+        </p:spPr>
+      </p:sp>
+      <p:sp>
+        <p:nvSpPr>
+          <p:cNvPr id="64" name="Text 62"/>
+          <p:cNvSpPr/>
+          <p:nvPr/>
+        </p:nvSpPr>
+        <p:spPr>
+          <a:xfrm>
+            <a:off x="7296912" y="3090672"/>
+            <a:ext cx="859536" cy="219456"/>
+          </a:xfrm>
+          <a:prstGeom prst="rect">
+            <a:avLst/>
+          </a:prstGeom>
+          <a:noFill/>
+          <a:ln/>
+        </p:spPr>
+        <p:txBody>
+          <a:bodyPr wrap="square" lIns="0" tIns="0" rIns="0" bIns="0" rtlCol="0" anchor="ctr"/>
+          <a:lstStyle/>
+          <a:p>
+            <a:pPr algn="r" indent="0" marL="0">
+              <a:buNone/>
+            </a:pPr>
+            <a:r>
+              <a:rPr lang="en-US" sz="850" b="1" dirty="0">
+                <a:solidFill>
+                  <a:srgbClr val="1F4E79"/>
+                </a:solidFill>
+                <a:latin typeface="Courier New" pitchFamily="34" charset="0"/>
+                <a:ea typeface="Courier New" pitchFamily="34" charset="-122"/>
+                <a:cs typeface="Courier New" pitchFamily="34" charset="-120"/>
+              </a:rPr>
+              <a:t>IB</a:t>
+            </a:r>
+            <a:endParaRPr lang="en-US" sz="850" dirty="0"/>
+          </a:p>
+        </p:txBody>
+      </p:sp>
+      <p:sp>
+        <p:nvSpPr>
+          <p:cNvPr id="65" name="Shape 63"/>
+          <p:cNvSpPr/>
+          <p:nvPr/>
+        </p:nvSpPr>
+        <p:spPr>
+          <a:xfrm>
+            <a:off x="8229600" y="2999232"/>
+            <a:ext cx="283464" cy="283464"/>
+          </a:xfrm>
+          <a:prstGeom prst="rect">
+            <a:avLst/>
+          </a:prstGeom>
+          <a:solidFill>
+            <a:srgbClr val="1F4E79"/>
+          </a:solidFill>
+          <a:ln w="9525">
+            <a:solidFill>
+              <a:srgbClr val="1F4E79"/>
+            </a:solidFill>
+            <a:prstDash val="solid"/>
+          </a:ln>
+        </p:spPr>
+      </p:sp>
+      <p:sp>
+        <p:nvSpPr>
+          <p:cNvPr id="66" name="Shape 64"/>
+          <p:cNvSpPr/>
+          <p:nvPr/>
+        </p:nvSpPr>
+        <p:spPr>
+          <a:xfrm>
+            <a:off x="8558784" y="2999232"/>
+            <a:ext cx="283464" cy="283464"/>
+          </a:xfrm>
+          <a:prstGeom prst="rect">
+            <a:avLst/>
+          </a:prstGeom>
+          <a:solidFill>
+            <a:srgbClr val="1F4E79"/>
+          </a:solidFill>
+          <a:ln w="9525">
+            <a:solidFill>
+              <a:srgbClr val="1F4E79"/>
+            </a:solidFill>
+            <a:prstDash val="solid"/>
+          </a:ln>
+        </p:spPr>
+      </p:sp>
+      <p:sp>
+        <p:nvSpPr>
+          <p:cNvPr id="67" name="Shape 65"/>
+          <p:cNvSpPr/>
+          <p:nvPr/>
+        </p:nvSpPr>
+        <p:spPr>
+          <a:xfrm>
+            <a:off x="8887968" y="2999232"/>
+            <a:ext cx="283464" cy="283464"/>
+          </a:xfrm>
+          <a:prstGeom prst="rect">
+            <a:avLst/>
+          </a:prstGeom>
+          <a:solidFill>
+            <a:srgbClr val="EDEAE3"/>
+          </a:solidFill>
+          <a:ln w="9525">
+            <a:solidFill>
+              <a:srgbClr val="D8D4CB"/>
+            </a:solidFill>
+            <a:prstDash val="solid"/>
+          </a:ln>
+        </p:spPr>
+      </p:sp>
+      <p:sp>
+        <p:nvSpPr>
+          <p:cNvPr id="68" name="Shape 66"/>
+          <p:cNvSpPr/>
+          <p:nvPr/>
+        </p:nvSpPr>
+        <p:spPr>
+          <a:xfrm>
+            <a:off x="9217152" y="2999232"/>
+            <a:ext cx="283464" cy="283464"/>
+          </a:xfrm>
+          <a:prstGeom prst="rect">
+            <a:avLst/>
+          </a:prstGeom>
+          <a:solidFill>
+            <a:srgbClr val="1F4E79"/>
+          </a:solidFill>
+          <a:ln w="9525">
+            <a:solidFill>
+              <a:srgbClr val="1F4E79"/>
+            </a:solidFill>
+            <a:prstDash val="solid"/>
+          </a:ln>
+        </p:spPr>
+      </p:sp>
+      <p:sp>
+        <p:nvSpPr>
+          <p:cNvPr id="69" name="Shape 67"/>
+          <p:cNvSpPr/>
+          <p:nvPr/>
+        </p:nvSpPr>
+        <p:spPr>
+          <a:xfrm>
+            <a:off x="9546336" y="2999232"/>
+            <a:ext cx="283464" cy="283464"/>
+          </a:xfrm>
+          <a:prstGeom prst="rect">
+            <a:avLst/>
+          </a:prstGeom>
+          <a:solidFill>
+            <a:srgbClr val="1F4E79"/>
+          </a:solidFill>
+          <a:ln w="9525">
+            <a:solidFill>
+              <a:srgbClr val="1F4E79"/>
+            </a:solidFill>
+            <a:prstDash val="solid"/>
+          </a:ln>
+        </p:spPr>
+      </p:sp>
+      <p:sp>
+        <p:nvSpPr>
+          <p:cNvPr id="70" name="Shape 68"/>
+          <p:cNvSpPr/>
+          <p:nvPr/>
+        </p:nvSpPr>
+        <p:spPr>
+          <a:xfrm>
+            <a:off x="9875520" y="2999232"/>
+            <a:ext cx="283464" cy="283464"/>
+          </a:xfrm>
+          <a:prstGeom prst="rect">
+            <a:avLst/>
+          </a:prstGeom>
+          <a:solidFill>
+            <a:srgbClr val="1F4E79"/>
+          </a:solidFill>
+          <a:ln w="9525">
+            <a:solidFill>
+              <a:srgbClr val="1F4E79"/>
+            </a:solidFill>
+            <a:prstDash val="solid"/>
+          </a:ln>
+        </p:spPr>
+      </p:sp>
+      <p:sp>
+        <p:nvSpPr>
+          <p:cNvPr id="71" name="Text 69"/>
+          <p:cNvSpPr/>
+          <p:nvPr/>
+        </p:nvSpPr>
+        <p:spPr>
+          <a:xfrm>
+            <a:off x="7296912" y="3419856"/>
+            <a:ext cx="859536" cy="219456"/>
+          </a:xfrm>
+          <a:prstGeom prst="rect">
+            <a:avLst/>
+          </a:prstGeom>
+          <a:noFill/>
+          <a:ln/>
+        </p:spPr>
+        <p:txBody>
+          <a:bodyPr wrap="square" lIns="0" tIns="0" rIns="0" bIns="0" rtlCol="0" anchor="ctr"/>
+          <a:lstStyle/>
+          <a:p>
+            <a:pPr algn="r" indent="0" marL="0">
+              <a:buNone/>
+            </a:pPr>
+            <a:r>
+              <a:rPr lang="en-US" sz="850" b="1" dirty="0">
+                <a:solidFill>
+                  <a:srgbClr val="1F4E79"/>
+                </a:solidFill>
+                <a:latin typeface="Courier New" pitchFamily="34" charset="0"/>
+                <a:ea typeface="Courier New" pitchFamily="34" charset="-122"/>
+                <a:cs typeface="Courier New" pitchFamily="34" charset="-120"/>
+              </a:rPr>
+              <a:t>GM</a:t>
+            </a:r>
+            <a:endParaRPr lang="en-US" sz="850" dirty="0"/>
+          </a:p>
+        </p:txBody>
+      </p:sp>
+      <p:sp>
+        <p:nvSpPr>
+          <p:cNvPr id="72" name="Shape 70"/>
+          <p:cNvSpPr/>
+          <p:nvPr/>
+        </p:nvSpPr>
+        <p:spPr>
+          <a:xfrm>
+            <a:off x="8229600" y="3328416"/>
+            <a:ext cx="283464" cy="283464"/>
+          </a:xfrm>
+          <a:prstGeom prst="rect">
+            <a:avLst/>
+          </a:prstGeom>
+          <a:solidFill>
+            <a:srgbClr val="1F4E79"/>
+          </a:solidFill>
+          <a:ln w="9525">
+            <a:solidFill>
+              <a:srgbClr val="1F4E79"/>
+            </a:solidFill>
+            <a:prstDash val="solid"/>
+          </a:ln>
+        </p:spPr>
+      </p:sp>
+      <p:sp>
+        <p:nvSpPr>
+          <p:cNvPr id="73" name="Shape 71"/>
+          <p:cNvSpPr/>
+          <p:nvPr/>
+        </p:nvSpPr>
+        <p:spPr>
+          <a:xfrm>
+            <a:off x="8558784" y="3328416"/>
+            <a:ext cx="283464" cy="283464"/>
+          </a:xfrm>
+          <a:prstGeom prst="rect">
+            <a:avLst/>
+          </a:prstGeom>
+          <a:solidFill>
+            <a:srgbClr val="1F4E79"/>
+          </a:solidFill>
+          <a:ln w="9525">
+            <a:solidFill>
+              <a:srgbClr val="1F4E79"/>
+            </a:solidFill>
+            <a:prstDash val="solid"/>
+          </a:ln>
+        </p:spPr>
+      </p:sp>
+      <p:sp>
+        <p:nvSpPr>
+          <p:cNvPr id="74" name="Shape 72"/>
+          <p:cNvSpPr/>
+          <p:nvPr/>
+        </p:nvSpPr>
+        <p:spPr>
+          <a:xfrm>
+            <a:off x="8887968" y="3328416"/>
+            <a:ext cx="283464" cy="283464"/>
+          </a:xfrm>
+          <a:prstGeom prst="rect">
+            <a:avLst/>
+          </a:prstGeom>
+          <a:solidFill>
+            <a:srgbClr val="1F4E79"/>
+          </a:solidFill>
+          <a:ln w="9525">
+            <a:solidFill>
+              <a:srgbClr val="1F4E79"/>
+            </a:solidFill>
+            <a:prstDash val="solid"/>
+          </a:ln>
+        </p:spPr>
+      </p:sp>
+      <p:sp>
+        <p:nvSpPr>
+          <p:cNvPr id="75" name="Shape 73"/>
+          <p:cNvSpPr/>
+          <p:nvPr/>
+        </p:nvSpPr>
+        <p:spPr>
+          <a:xfrm>
+            <a:off x="9217152" y="3328416"/>
+            <a:ext cx="283464" cy="283464"/>
+          </a:xfrm>
+          <a:prstGeom prst="rect">
+            <a:avLst/>
+          </a:prstGeom>
+          <a:solidFill>
+            <a:srgbClr val="EDEAE3"/>
+          </a:solidFill>
+          <a:ln w="9525">
+            <a:solidFill>
+              <a:srgbClr val="D8D4CB"/>
+            </a:solidFill>
+            <a:prstDash val="solid"/>
+          </a:ln>
+        </p:spPr>
+      </p:sp>
+      <p:sp>
+        <p:nvSpPr>
+          <p:cNvPr id="76" name="Shape 74"/>
+          <p:cNvSpPr/>
+          <p:nvPr/>
+        </p:nvSpPr>
+        <p:spPr>
+          <a:xfrm>
+            <a:off x="9546336" y="3328416"/>
+            <a:ext cx="283464" cy="283464"/>
+          </a:xfrm>
+          <a:prstGeom prst="rect">
+            <a:avLst/>
+          </a:prstGeom>
+          <a:solidFill>
+            <a:srgbClr val="1F4E79"/>
+          </a:solidFill>
+          <a:ln w="9525">
+            <a:solidFill>
+              <a:srgbClr val="1F4E79"/>
+            </a:solidFill>
+            <a:prstDash val="solid"/>
+          </a:ln>
+        </p:spPr>
+      </p:sp>
+      <p:sp>
+        <p:nvSpPr>
+          <p:cNvPr id="77" name="Shape 75"/>
+          <p:cNvSpPr/>
+          <p:nvPr/>
+        </p:nvSpPr>
+        <p:spPr>
+          <a:xfrm>
+            <a:off x="9875520" y="3328416"/>
+            <a:ext cx="283464" cy="283464"/>
+          </a:xfrm>
+          <a:prstGeom prst="rect">
+            <a:avLst/>
+          </a:prstGeom>
+          <a:solidFill>
+            <a:srgbClr val="FBF0EB"/>
+          </a:solidFill>
+          <a:ln w="9525">
+            <a:solidFill>
+              <a:srgbClr val="E0BCAE"/>
+            </a:solidFill>
+            <a:prstDash val="solid"/>
+          </a:ln>
+        </p:spPr>
+      </p:sp>
+      <p:sp>
+        <p:nvSpPr>
+          <p:cNvPr id="78" name="Text 76"/>
+          <p:cNvSpPr/>
+          <p:nvPr/>
+        </p:nvSpPr>
+        <p:spPr>
+          <a:xfrm>
+            <a:off x="9875520" y="3383280"/>
+            <a:ext cx="283464" cy="219456"/>
+          </a:xfrm>
+          <a:prstGeom prst="rect">
+            <a:avLst/>
+          </a:prstGeom>
+          <a:noFill/>
+          <a:ln/>
+        </p:spPr>
+        <p:txBody>
+          <a:bodyPr wrap="square" lIns="0" tIns="0" rIns="0" bIns="0" rtlCol="0" anchor="ctr"/>
+          <a:lstStyle/>
+          <a:p>
+            <a:pPr algn="ctr" indent="0" marL="0">
+              <a:buNone/>
+            </a:pPr>
+            <a:r>
+              <a:rPr lang="en-US" sz="1000" dirty="0">
+                <a:solidFill>
+                  <a:srgbClr val="8C3A1B"/>
+                </a:solidFill>
+                <a:latin typeface="Courier New" pitchFamily="34" charset="0"/>
+                <a:ea typeface="Courier New" pitchFamily="34" charset="-122"/>
+                <a:cs typeface="Courier New" pitchFamily="34" charset="-120"/>
+              </a:rPr>
+              <a:t>—</a:t>
+            </a:r>
+            <a:endParaRPr lang="en-US" sz="1000" dirty="0"/>
+          </a:p>
+        </p:txBody>
+      </p:sp>
+      <p:sp>
+        <p:nvSpPr>
+          <p:cNvPr id="79" name="Text 77"/>
+          <p:cNvSpPr/>
+          <p:nvPr/>
+        </p:nvSpPr>
+        <p:spPr>
+          <a:xfrm>
+            <a:off x="7296912" y="3749040"/>
+            <a:ext cx="859536" cy="219456"/>
+          </a:xfrm>
+          <a:prstGeom prst="rect">
+            <a:avLst/>
+          </a:prstGeom>
+          <a:noFill/>
+          <a:ln/>
+        </p:spPr>
+        <p:txBody>
+          <a:bodyPr wrap="square" lIns="0" tIns="0" rIns="0" bIns="0" rtlCol="0" anchor="ctr"/>
+          <a:lstStyle/>
+          <a:p>
+            <a:pPr algn="r" indent="0" marL="0">
+              <a:buNone/>
+            </a:pPr>
+            <a:r>
+              <a:rPr lang="en-US" sz="850" b="1" dirty="0">
+                <a:solidFill>
+                  <a:srgbClr val="1F4E79"/>
+                </a:solidFill>
+                <a:latin typeface="Courier New" pitchFamily="34" charset="0"/>
+                <a:ea typeface="Courier New" pitchFamily="34" charset="-122"/>
+                <a:cs typeface="Courier New" pitchFamily="34" charset="-120"/>
+              </a:rPr>
+              <a:t>CSR</a:t>
+            </a:r>
+            <a:endParaRPr lang="en-US" sz="850" dirty="0"/>
+          </a:p>
+        </p:txBody>
+      </p:sp>
+      <p:sp>
+        <p:nvSpPr>
+          <p:cNvPr id="80" name="Shape 78"/>
+          <p:cNvSpPr/>
+          <p:nvPr/>
+        </p:nvSpPr>
+        <p:spPr>
+          <a:xfrm>
+            <a:off x="8229600" y="3657600"/>
+            <a:ext cx="283464" cy="283464"/>
+          </a:xfrm>
+          <a:prstGeom prst="rect">
+            <a:avLst/>
+          </a:prstGeom>
+          <a:solidFill>
+            <a:srgbClr val="1F4E79"/>
+          </a:solidFill>
+          <a:ln w="9525">
+            <a:solidFill>
+              <a:srgbClr val="1F4E79"/>
+            </a:solidFill>
+            <a:prstDash val="solid"/>
+          </a:ln>
+        </p:spPr>
+      </p:sp>
+      <p:sp>
+        <p:nvSpPr>
+          <p:cNvPr id="81" name="Shape 79"/>
+          <p:cNvSpPr/>
+          <p:nvPr/>
+        </p:nvSpPr>
+        <p:spPr>
+          <a:xfrm>
+            <a:off x="8558784" y="3657600"/>
+            <a:ext cx="283464" cy="283464"/>
+          </a:xfrm>
+          <a:prstGeom prst="rect">
+            <a:avLst/>
+          </a:prstGeom>
+          <a:solidFill>
+            <a:srgbClr val="1F4E79"/>
+          </a:solidFill>
+          <a:ln w="9525">
+            <a:solidFill>
+              <a:srgbClr val="1F4E79"/>
+            </a:solidFill>
+            <a:prstDash val="solid"/>
+          </a:ln>
+        </p:spPr>
+      </p:sp>
+      <p:sp>
+        <p:nvSpPr>
+          <p:cNvPr id="82" name="Shape 80"/>
+          <p:cNvSpPr/>
+          <p:nvPr/>
+        </p:nvSpPr>
+        <p:spPr>
+          <a:xfrm>
+            <a:off x="8887968" y="3657600"/>
+            <a:ext cx="283464" cy="283464"/>
+          </a:xfrm>
+          <a:prstGeom prst="rect">
+            <a:avLst/>
+          </a:prstGeom>
+          <a:solidFill>
+            <a:srgbClr val="1F4E79"/>
+          </a:solidFill>
+          <a:ln w="9525">
+            <a:solidFill>
+              <a:srgbClr val="1F4E79"/>
+            </a:solidFill>
+            <a:prstDash val="solid"/>
+          </a:ln>
+        </p:spPr>
+      </p:sp>
+      <p:sp>
+        <p:nvSpPr>
+          <p:cNvPr id="83" name="Shape 81"/>
+          <p:cNvSpPr/>
+          <p:nvPr/>
+        </p:nvSpPr>
+        <p:spPr>
+          <a:xfrm>
+            <a:off x="9217152" y="3657600"/>
+            <a:ext cx="283464" cy="283464"/>
+          </a:xfrm>
+          <a:prstGeom prst="rect">
+            <a:avLst/>
+          </a:prstGeom>
+          <a:solidFill>
+            <a:srgbClr val="1F4E79"/>
+          </a:solidFill>
+          <a:ln w="9525">
+            <a:solidFill>
+              <a:srgbClr val="1F4E79"/>
+            </a:solidFill>
+            <a:prstDash val="solid"/>
+          </a:ln>
+        </p:spPr>
+      </p:sp>
+      <p:sp>
+        <p:nvSpPr>
+          <p:cNvPr id="84" name="Shape 82"/>
+          <p:cNvSpPr/>
+          <p:nvPr/>
+        </p:nvSpPr>
+        <p:spPr>
+          <a:xfrm>
+            <a:off x="9546336" y="3657600"/>
+            <a:ext cx="283464" cy="283464"/>
+          </a:xfrm>
+          <a:prstGeom prst="rect">
+            <a:avLst/>
+          </a:prstGeom>
+          <a:solidFill>
+            <a:srgbClr val="EDEAE3"/>
+          </a:solidFill>
+          <a:ln w="9525">
+            <a:solidFill>
+              <a:srgbClr val="D8D4CB"/>
+            </a:solidFill>
+            <a:prstDash val="solid"/>
+          </a:ln>
+        </p:spPr>
+      </p:sp>
+      <p:sp>
+        <p:nvSpPr>
+          <p:cNvPr id="85" name="Shape 83"/>
+          <p:cNvSpPr/>
+          <p:nvPr/>
+        </p:nvSpPr>
+        <p:spPr>
+          <a:xfrm>
+            <a:off x="9875520" y="3657600"/>
+            <a:ext cx="283464" cy="283464"/>
+          </a:xfrm>
+          <a:prstGeom prst="rect">
+            <a:avLst/>
+          </a:prstGeom>
+          <a:solidFill>
+            <a:srgbClr val="FBF0EB"/>
+          </a:solidFill>
+          <a:ln w="9525">
+            <a:solidFill>
+              <a:srgbClr val="E0BCAE"/>
+            </a:solidFill>
+            <a:prstDash val="solid"/>
+          </a:ln>
+        </p:spPr>
+      </p:sp>
+      <p:sp>
+        <p:nvSpPr>
+          <p:cNvPr id="86" name="Text 84"/>
+          <p:cNvSpPr/>
+          <p:nvPr/>
+        </p:nvSpPr>
+        <p:spPr>
+          <a:xfrm>
+            <a:off x="9875520" y="3712464"/>
+            <a:ext cx="283464" cy="219456"/>
+          </a:xfrm>
+          <a:prstGeom prst="rect">
+            <a:avLst/>
+          </a:prstGeom>
+          <a:noFill/>
+          <a:ln/>
+        </p:spPr>
+        <p:txBody>
+          <a:bodyPr wrap="square" lIns="0" tIns="0" rIns="0" bIns="0" rtlCol="0" anchor="ctr"/>
+          <a:lstStyle/>
+          <a:p>
+            <a:pPr algn="ctr" indent="0" marL="0">
+              <a:buNone/>
+            </a:pPr>
+            <a:r>
+              <a:rPr lang="en-US" sz="1000" dirty="0">
+                <a:solidFill>
+                  <a:srgbClr val="8C3A1B"/>
+                </a:solidFill>
+                <a:latin typeface="Courier New" pitchFamily="34" charset="0"/>
+                <a:ea typeface="Courier New" pitchFamily="34" charset="-122"/>
+                <a:cs typeface="Courier New" pitchFamily="34" charset="-120"/>
+              </a:rPr>
+              <a:t>—</a:t>
+            </a:r>
+            <a:endParaRPr lang="en-US" sz="1000" dirty="0"/>
+          </a:p>
+        </p:txBody>
+      </p:sp>
+      <p:sp>
+        <p:nvSpPr>
+          <p:cNvPr id="87" name="Text 85"/>
+          <p:cNvSpPr/>
+          <p:nvPr/>
+        </p:nvSpPr>
+        <p:spPr>
+          <a:xfrm>
+            <a:off x="7296912" y="4078224"/>
+            <a:ext cx="859536" cy="219456"/>
+          </a:xfrm>
+          <a:prstGeom prst="rect">
+            <a:avLst/>
+          </a:prstGeom>
+          <a:noFill/>
+          <a:ln/>
+        </p:spPr>
+        <p:txBody>
+          <a:bodyPr wrap="square" lIns="0" tIns="0" rIns="0" bIns="0" rtlCol="0" anchor="ctr"/>
+          <a:lstStyle/>
+          <a:p>
+            <a:pPr algn="r" indent="0" marL="0">
+              <a:buNone/>
+            </a:pPr>
+            <a:r>
+              <a:rPr lang="en-US" sz="850" b="1" dirty="0">
+                <a:solidFill>
+                  <a:srgbClr val="8C3A1B"/>
+                </a:solidFill>
+                <a:latin typeface="Courier New" pitchFamily="34" charset="0"/>
+                <a:ea typeface="Courier New" pitchFamily="34" charset="-122"/>
+                <a:cs typeface="Courier New" pitchFamily="34" charset="-120"/>
+              </a:rPr>
+              <a:t>SCM</a:t>
+            </a:r>
+            <a:endParaRPr lang="en-US" sz="850" dirty="0"/>
+          </a:p>
+        </p:txBody>
+      </p:sp>
+      <p:sp>
+        <p:nvSpPr>
+          <p:cNvPr id="88" name="Shape 86"/>
+          <p:cNvSpPr/>
+          <p:nvPr/>
+        </p:nvSpPr>
+        <p:spPr>
+          <a:xfrm>
+            <a:off x="8229600" y="3986784"/>
+            <a:ext cx="283464" cy="283464"/>
+          </a:xfrm>
+          <a:prstGeom prst="rect">
+            <a:avLst/>
+          </a:prstGeom>
+          <a:solidFill>
+            <a:srgbClr val="1F4E79"/>
+          </a:solidFill>
+          <a:ln w="9525">
+            <a:solidFill>
+              <a:srgbClr val="1F4E79"/>
+            </a:solidFill>
+            <a:prstDash val="solid"/>
+          </a:ln>
+        </p:spPr>
+      </p:sp>
+      <p:sp>
+        <p:nvSpPr>
+          <p:cNvPr id="89" name="Shape 87"/>
+          <p:cNvSpPr/>
+          <p:nvPr/>
+        </p:nvSpPr>
+        <p:spPr>
+          <a:xfrm>
+            <a:off x="8558784" y="3986784"/>
+            <a:ext cx="283464" cy="283464"/>
+          </a:xfrm>
+          <a:prstGeom prst="rect">
+            <a:avLst/>
+          </a:prstGeom>
+          <a:solidFill>
+            <a:srgbClr val="1F4E79"/>
+          </a:solidFill>
+          <a:ln w="9525">
+            <a:solidFill>
+              <a:srgbClr val="1F4E79"/>
+            </a:solidFill>
+            <a:prstDash val="solid"/>
+          </a:ln>
+        </p:spPr>
+      </p:sp>
+      <p:sp>
+        <p:nvSpPr>
+          <p:cNvPr id="90" name="Shape 88"/>
+          <p:cNvSpPr/>
+          <p:nvPr/>
+        </p:nvSpPr>
+        <p:spPr>
+          <a:xfrm>
+            <a:off x="8887968" y="3986784"/>
+            <a:ext cx="283464" cy="283464"/>
+          </a:xfrm>
+          <a:prstGeom prst="rect">
+            <a:avLst/>
+          </a:prstGeom>
+          <a:solidFill>
+            <a:srgbClr val="1F4E79"/>
+          </a:solidFill>
+          <a:ln w="9525">
+            <a:solidFill>
+              <a:srgbClr val="1F4E79"/>
+            </a:solidFill>
+            <a:prstDash val="solid"/>
+          </a:ln>
+        </p:spPr>
+      </p:sp>
+      <p:sp>
+        <p:nvSpPr>
+          <p:cNvPr id="91" name="Shape 89"/>
+          <p:cNvSpPr/>
+          <p:nvPr/>
+        </p:nvSpPr>
+        <p:spPr>
+          <a:xfrm>
+            <a:off x="9217152" y="3986784"/>
+            <a:ext cx="283464" cy="283464"/>
+          </a:xfrm>
+          <a:prstGeom prst="rect">
+            <a:avLst/>
+          </a:prstGeom>
+          <a:solidFill>
+            <a:srgbClr val="FBF0EB"/>
+          </a:solidFill>
+          <a:ln w="9525">
+            <a:solidFill>
+              <a:srgbClr val="E0BCAE"/>
+            </a:solidFill>
+            <a:prstDash val="solid"/>
+          </a:ln>
+        </p:spPr>
+      </p:sp>
+      <p:sp>
+        <p:nvSpPr>
+          <p:cNvPr id="92" name="Text 90"/>
+          <p:cNvSpPr/>
+          <p:nvPr/>
+        </p:nvSpPr>
+        <p:spPr>
+          <a:xfrm>
+            <a:off x="9217152" y="4041648"/>
+            <a:ext cx="283464" cy="219456"/>
+          </a:xfrm>
+          <a:prstGeom prst="rect">
+            <a:avLst/>
+          </a:prstGeom>
+          <a:noFill/>
+          <a:ln/>
+        </p:spPr>
+        <p:txBody>
+          <a:bodyPr wrap="square" lIns="0" tIns="0" rIns="0" bIns="0" rtlCol="0" anchor="ctr"/>
+          <a:lstStyle/>
+          <a:p>
+            <a:pPr algn="ctr" indent="0" marL="0">
+              <a:buNone/>
+            </a:pPr>
+            <a:r>
+              <a:rPr lang="en-US" sz="1000" dirty="0">
+                <a:solidFill>
+                  <a:srgbClr val="8C3A1B"/>
+                </a:solidFill>
+                <a:latin typeface="Courier New" pitchFamily="34" charset="0"/>
+                <a:ea typeface="Courier New" pitchFamily="34" charset="-122"/>
+                <a:cs typeface="Courier New" pitchFamily="34" charset="-120"/>
+              </a:rPr>
+              <a:t>—</a:t>
+            </a:r>
+            <a:endParaRPr lang="en-US" sz="1000" dirty="0"/>
+          </a:p>
+        </p:txBody>
+      </p:sp>
+      <p:sp>
+        <p:nvSpPr>
+          <p:cNvPr id="93" name="Shape 91"/>
+          <p:cNvSpPr/>
+          <p:nvPr/>
+        </p:nvSpPr>
+        <p:spPr>
+          <a:xfrm>
+            <a:off x="9546336" y="3986784"/>
+            <a:ext cx="283464" cy="283464"/>
+          </a:xfrm>
+          <a:prstGeom prst="rect">
+            <a:avLst/>
+          </a:prstGeom>
+          <a:solidFill>
+            <a:srgbClr val="FBF0EB"/>
+          </a:solidFill>
+          <a:ln w="9525">
+            <a:solidFill>
+              <a:srgbClr val="E0BCAE"/>
+            </a:solidFill>
+            <a:prstDash val="solid"/>
+          </a:ln>
+        </p:spPr>
+      </p:sp>
+      <p:sp>
+        <p:nvSpPr>
+          <p:cNvPr id="94" name="Text 92"/>
+          <p:cNvSpPr/>
+          <p:nvPr/>
+        </p:nvSpPr>
+        <p:spPr>
+          <a:xfrm>
+            <a:off x="9546336" y="4041648"/>
+            <a:ext cx="283464" cy="219456"/>
+          </a:xfrm>
+          <a:prstGeom prst="rect">
+            <a:avLst/>
+          </a:prstGeom>
+          <a:noFill/>
+          <a:ln/>
+        </p:spPr>
+        <p:txBody>
+          <a:bodyPr wrap="square" lIns="0" tIns="0" rIns="0" bIns="0" rtlCol="0" anchor="ctr"/>
+          <a:lstStyle/>
+          <a:p>
+            <a:pPr algn="ctr" indent="0" marL="0">
+              <a:buNone/>
+            </a:pPr>
+            <a:r>
+              <a:rPr lang="en-US" sz="1000" dirty="0">
+                <a:solidFill>
+                  <a:srgbClr val="8C3A1B"/>
+                </a:solidFill>
+                <a:latin typeface="Courier New" pitchFamily="34" charset="0"/>
+                <a:ea typeface="Courier New" pitchFamily="34" charset="-122"/>
+                <a:cs typeface="Courier New" pitchFamily="34" charset="-120"/>
+              </a:rPr>
+              <a:t>—</a:t>
+            </a:r>
+            <a:endParaRPr lang="en-US" sz="1000" dirty="0"/>
+          </a:p>
+        </p:txBody>
+      </p:sp>
+      <p:sp>
+        <p:nvSpPr>
+          <p:cNvPr id="95" name="Shape 93"/>
+          <p:cNvSpPr/>
+          <p:nvPr/>
+        </p:nvSpPr>
+        <p:spPr>
+          <a:xfrm>
+            <a:off x="9875520" y="3986784"/>
+            <a:ext cx="283464" cy="283464"/>
+          </a:xfrm>
+          <a:prstGeom prst="rect">
+            <a:avLst/>
+          </a:prstGeom>
+          <a:solidFill>
+            <a:srgbClr val="EDEAE3"/>
+          </a:solidFill>
+          <a:ln w="9525">
+            <a:solidFill>
+              <a:srgbClr val="D8D4CB"/>
+            </a:solidFill>
+            <a:prstDash val="solid"/>
+          </a:ln>
+        </p:spPr>
+      </p:sp>
+      <p:sp>
+        <p:nvSpPr>
+          <p:cNvPr id="96" name="Text 94"/>
+          <p:cNvSpPr/>
+          <p:nvPr/>
+        </p:nvSpPr>
+        <p:spPr>
+          <a:xfrm>
+            <a:off x="6236208" y="4498848"/>
+            <a:ext cx="5248656" cy="548640"/>
+          </a:xfrm>
+          <a:prstGeom prst="rect">
+            <a:avLst/>
+          </a:prstGeom>
+          <a:noFill/>
+          <a:ln/>
+        </p:spPr>
+        <p:txBody>
+          <a:bodyPr wrap="square" lIns="0" tIns="0" rIns="0" bIns="0" rtlCol="0" anchor="ctr"/>
+          <a:lstStyle/>
+          <a:p>
+            <a:pPr indent="0" marL="0">
+              <a:buNone/>
+            </a:pPr>
+            <a:r>
+              <a:rPr lang="en-US" sz="1100" dirty="0">
+                <a:solidFill>
+                  <a:srgbClr val="454B54"/>
+                </a:solidFill>
+                <a:latin typeface="Cambria" pitchFamily="34" charset="0"/>
+                <a:ea typeface="Cambria" pitchFamily="34" charset="-122"/>
+                <a:cs typeface="Cambria" pitchFamily="34" charset="-120"/>
+              </a:rPr>
+              <a:t>Marketing, Finance and International Business each touch all five others. General Management and CSR touch everything except Supply Chain. Supply Chain touches only those three central disciplines — the two blank cells are the whole structure of the map.</a:t>
+            </a:r>
+            <a:endParaRPr lang="en-US" sz="1100" dirty="0"/>
+          </a:p>
+        </p:txBody>
+      </p:sp>
+      <p:sp>
+        <p:nvSpPr>
+          <p:cNvPr id="97" name="Shape 95"/>
+          <p:cNvSpPr/>
+          <p:nvPr/>
+        </p:nvSpPr>
+        <p:spPr>
+          <a:xfrm>
+            <a:off x="457200" y="5358384"/>
+            <a:ext cx="11274552" cy="950976"/>
+          </a:xfrm>
+          <a:prstGeom prst="rect">
+            <a:avLst/>
+          </a:prstGeom>
+          <a:solidFill>
+            <a:srgbClr val="FBF6EA"/>
+          </a:solidFill>
+          <a:ln w="25400">
+            <a:solidFill>
+              <a:srgbClr val="8A6410"/>
+            </a:solidFill>
+            <a:prstDash val="dash"/>
+          </a:ln>
+        </p:spPr>
+      </p:sp>
+      <p:sp>
+        <p:nvSpPr>
+          <p:cNvPr id="98" name="Text 96"/>
+          <p:cNvSpPr/>
+          <p:nvPr/>
+        </p:nvSpPr>
+        <p:spPr>
+          <a:xfrm>
+            <a:off x="713232" y="5468112"/>
+            <a:ext cx="5486400" cy="201168"/>
+          </a:xfrm>
+          <a:prstGeom prst="rect">
+            <a:avLst/>
+          </a:prstGeom>
+          <a:noFill/>
+          <a:ln/>
+        </p:spPr>
+        <p:txBody>
+          <a:bodyPr wrap="square" lIns="0" tIns="0" rIns="0" bIns="0" rtlCol="0" anchor="ctr"/>
+          <a:lstStyle/>
+          <a:p>
+            <a:pPr indent="0" marL="0">
+              <a:buNone/>
+            </a:pPr>
+            <a:r>
+              <a:rPr lang="en-US" sz="900" b="1" spc="130" kern="0" dirty="0">
+                <a:solidFill>
+                  <a:srgbClr val="8A6410"/>
+                </a:solidFill>
+                <a:latin typeface="Courier New" pitchFamily="34" charset="0"/>
+                <a:ea typeface="Courier New" pitchFamily="34" charset="-122"/>
+                <a:cs typeface="Courier New" pitchFamily="34" charset="-120"/>
+              </a:rPr>
+              <a:t>WHAT THE MAP STILL DOES NOT SAY</a:t>
+            </a:r>
+            <a:endParaRPr lang="en-US" sz="900" dirty="0"/>
+          </a:p>
+        </p:txBody>
+      </p:sp>
+      <p:sp>
+        <p:nvSpPr>
+          <p:cNvPr id="99" name="Text 97"/>
+          <p:cNvSpPr/>
+          <p:nvPr/>
+        </p:nvSpPr>
+        <p:spPr>
+          <a:xfrm>
+            <a:off x="713232" y="5687568"/>
+            <a:ext cx="10789920" cy="530352"/>
+          </a:xfrm>
+          <a:prstGeom prst="rect">
+            <a:avLst/>
+          </a:prstGeom>
+          <a:noFill/>
+          <a:ln/>
+        </p:spPr>
+        <p:txBody>
+          <a:bodyPr wrap="square" lIns="0" tIns="0" rIns="0" bIns="0" rtlCol="0" anchor="ctr"/>
+          <a:lstStyle/>
+          <a:p>
+            <a:pPr indent="0" marL="0">
+              <a:buNone/>
+            </a:pPr>
+            <a:r>
+              <a:rPr lang="en-US" sz="1150" dirty="0">
+                <a:solidFill>
+                  <a:srgbClr val="454B54"/>
+                </a:solidFill>
+                <a:latin typeface="Cambria" pitchFamily="34" charset="0"/>
+                <a:ea typeface="Cambria" pitchFamily="34" charset="-122"/>
+                <a:cs typeface="Cambria" pitchFamily="34" charset="-120"/>
+              </a:rPr>
+              <a:t>It shows WHO touches WHOM, not what happens at the touch point. Name the intersections — international marketing, cross-border capital, global sourcing — and the same structural question returns: each one becomes international only when evidence must be gathered comparably in more than one country.</a:t>
+            </a:r>
+            <a:endParaRPr lang="en-US" sz="1150" dirty="0"/>
+          </a:p>
+        </p:txBody>
+      </p:sp>
+      <p:sp>
+        <p:nvSpPr>
+          <p:cNvPr id="100" name="Text 98"/>
+          <p:cNvSpPr/>
+          <p:nvPr/>
+        </p:nvSpPr>
+        <p:spPr>
+          <a:xfrm>
+            <a:off x="457200" y="6419088"/>
+            <a:ext cx="7315200" cy="201168"/>
+          </a:xfrm>
+          <a:prstGeom prst="rect">
+            <a:avLst/>
+          </a:prstGeom>
+          <a:noFill/>
+          <a:ln/>
+        </p:spPr>
+        <p:txBody>
+          <a:bodyPr wrap="square" lIns="0" tIns="0" rIns="0" bIns="0" rtlCol="0" anchor="ctr"/>
+          <a:lstStyle/>
+          <a:p>
+            <a:pPr indent="0" marL="0">
+              <a:buNone/>
+            </a:pPr>
+            <a:r>
+              <a:rPr lang="en-US" sz="850" spc="50" kern="0" dirty="0">
+                <a:solidFill>
+                  <a:srgbClr val="767D86"/>
+                </a:solidFill>
+                <a:latin typeface="Courier New" pitchFamily="34" charset="0"/>
+                <a:ea typeface="Courier New" pitchFamily="34" charset="-122"/>
+                <a:cs typeface="Courier New" pitchFamily="34" charset="-120"/>
+              </a:rPr>
+              <a:t>Yasir A. Malik   ·   github.com/AuditingAI/Profile   ·   2 / 3</a:t>
+            </a:r>
+            <a:endParaRPr lang="en-US" sz="850" dirty="0"/>
+          </a:p>
+        </p:txBody>
+      </p:sp>
+    </p:spTree>
+  </p:cSld>
+  <p:clrMapOvr>
+    <a:masterClrMapping/>
+  </p:clrMapOvr>
+</p:sld>
+</file>
+
+<file path=ppt/slides/slide3.xml><?xml version="1.0" encoding="utf-8"?>
+<p:sld xmlns:a="http://schemas.openxmlformats.org/drawingml/2006/main" xmlns:r="http://schemas.openxmlformats.org/officeDocument/2006/relationships" xmlns:p="http://schemas.openxmlformats.org/presentationml/2006/main">
+  <p:cSld name="Slide 3">
     <p:bg>
       <p:bgPr>
         <a:solidFill>
@@ -4350,7 +7500,7 @@
                 <a:ea typeface="Courier New" pitchFamily="34" charset="-122"/>
                 <a:cs typeface="Courier New" pitchFamily="34" charset="-120"/>
               </a:rPr>
-              <a:t>Yasir A. Malik   ·   github.com/AuditingAI/Profile   ·   2 / 2</a:t>
+              <a:t>Yasir A. Malik   ·   github.com/AuditingAI/Profile   ·   3 / 3</a:t>
             </a:r>
             <a:endParaRPr lang="en-US" sz="850" dirty="0"/>
           </a:p>
